--- a/Documents/NexusFlow_Presentation.pptx
+++ b/Documents/NexusFlow_Presentation.pptx
@@ -4,6 +4,9 @@
   <p:sldMasterIdLst>
     <p:sldMasterId id="2147483648" r:id="rId1"/>
   </p:sldMasterIdLst>
+  <p:notesMasterIdLst>
+    <p:notesMasterId r:id="rId14"/>
+  </p:notesMasterIdLst>
   <p:sldIdLst>
     <p:sldId id="256" r:id="rId2"/>
     <p:sldId id="257" r:id="rId3"/>
@@ -18,9 +21,6 @@
     <p:sldId id="266" r:id="rId12"/>
     <p:sldId id="267" r:id="rId13"/>
   </p:sldIdLst>
-  <p:notesMasterIdLst>
-    <p:notesMasterId r:id="rId14"/>
-  </p:notesMasterIdLst>
   <p:sldSz cx="12192000" cy="6858000"/>
   <p:notesSz cx="6858000" cy="12192000"/>
   <p:defaultTextStyle>
@@ -115,6 +115,11 @@
       </a:defRPr>
     </a:lvl9pPr>
   </p:defaultTextStyle>
+  <p:extLst>
+    <p:ext uri="{EFAFB233-063F-42B5-8137-9DF3F51BA10A}">
+      <p15:sldGuideLst xmlns:p15="http://schemas.microsoft.com/office/powerpoint/2012/main"/>
+    </p:ext>
+  </p:extLst>
 </p:presentation>
 </file>
 
@@ -140,234 +145,10 @@
           <a:chExt cx="0" cy="0"/>
         </a:xfrm>
       </p:grpSpPr>
-      <p:sp>
-        <p:nvSpPr>
-          <p:cNvPr id="2" name="Header Placeholder 1"/>
-          <p:cNvSpPr>
-            <a:spLocks noGrp="1"/>
-          </p:cNvSpPr>
-          <p:nvPr>
-            <p:ph type="hdr" sz="quarter"/>
-          </p:nvPr>
-        </p:nvSpPr>
-        <p:spPr>
-          <a:xfrm>
-            <a:off x="0" y="0"/>
-            <a:ext cx="2971800" cy="458788"/>
-          </a:xfrm>
-          <a:prstGeom prst="rect">
-            <a:avLst/>
-          </a:prstGeom>
-        </p:spPr>
-        <p:txBody>
-          <a:bodyPr vert="horz" lIns="91440" tIns="45720" rIns="91440" bIns="45720" rtlCol="0"/>
-          <a:lstStyle>
-            <a:lvl1pPr algn="l">
-              <a:defRPr sz="1200"/>
-            </a:lvl1pPr>
-          </a:lstStyle>
-          <a:p>
-            <a:endParaRPr lang="en-US"/>
-          </a:p>
-        </p:txBody>
-      </p:sp>
-      <p:sp>
-        <p:nvSpPr>
-          <p:cNvPr id="3" name="Date Placeholder 2"/>
-          <p:cNvSpPr>
-            <a:spLocks noGrp="1"/>
-          </p:cNvSpPr>
-          <p:nvPr>
-            <p:ph type="dt" idx="1"/>
-          </p:nvPr>
-        </p:nvSpPr>
-        <p:spPr>
-          <a:xfrm>
-            <a:off x="3884613" y="0"/>
-            <a:ext cx="2971800" cy="458788"/>
-          </a:xfrm>
-          <a:prstGeom prst="rect">
-            <a:avLst/>
-          </a:prstGeom>
-        </p:spPr>
-        <p:txBody>
-          <a:bodyPr vert="horz" lIns="91440" tIns="45720" rIns="91440" bIns="45720" rtlCol="0"/>
-          <a:lstStyle>
-            <a:lvl1pPr algn="r">
-              <a:defRPr sz="1200"/>
-            </a:lvl1pPr>
-          </a:lstStyle>
-          <a:p>
-            <a:fld id="{5282F153-3F37-0F45-9E97-73ACFA13230C}" type="datetimeFigureOut">
-              <a:rPr lang="en-US"/>
-              <a:t>7/23/19</a:t>
-            </a:fld>
-            <a:endParaRPr lang="en-US"/>
-          </a:p>
-        </p:txBody>
-      </p:sp>
-      <p:sp>
-        <p:nvSpPr>
-          <p:cNvPr id="4" name="Slide Image Placeholder 3"/>
-          <p:cNvSpPr>
-            <a:spLocks noGrp="1" noRot="1" noChangeAspect="1"/>
-          </p:cNvSpPr>
-          <p:nvPr>
-            <p:ph type="sldImg" idx="2"/>
-          </p:nvPr>
-        </p:nvSpPr>
-        <p:spPr>
-          <a:xfrm>
-            <a:off x="685800" y="1143000"/>
-            <a:ext cx="5486400" cy="3086100"/>
-          </a:xfrm>
-          <a:prstGeom prst="rect">
-            <a:avLst/>
-          </a:prstGeom>
-          <a:noFill/>
-          <a:ln w="12700">
-            <a:solidFill>
-              <a:prstClr val="black"/>
-            </a:solidFill>
-          </a:ln>
-        </p:spPr>
-        <p:txBody>
-          <a:bodyPr vert="horz" lIns="91440" tIns="45720" rIns="91440" bIns="45720" rtlCol="0" anchor="ctr"/>
-          <a:lstStyle/>
-          <a:p>
-            <a:endParaRPr lang="en-US"/>
-          </a:p>
-        </p:txBody>
-      </p:sp>
-      <p:sp>
-        <p:nvSpPr>
-          <p:cNvPr id="5" name="Notes Placeholder 4"/>
-          <p:cNvSpPr>
-            <a:spLocks noGrp="1"/>
-          </p:cNvSpPr>
-          <p:nvPr>
-            <p:ph type="body" sz="quarter" idx="3"/>
-          </p:nvPr>
-        </p:nvSpPr>
-        <p:spPr>
-          <a:xfrm>
-            <a:off x="685800" y="4400550"/>
-            <a:ext cx="5486400" cy="3600450"/>
-          </a:xfrm>
-          <a:prstGeom prst="rect">
-            <a:avLst/>
-          </a:prstGeom>
-        </p:spPr>
-        <p:txBody>
-          <a:bodyPr vert="horz" lIns="91440" tIns="45720" rIns="91440" bIns="45720" rtlCol="0"/>
-          <a:lstStyle/>
-          <a:p>
-            <a:pPr lvl="0"/>
-            <a:r>
-              <a:rPr lang="en-US"/>
-              <a:t>Click to edit Master text styles</a:t>
-            </a:r>
-          </a:p>
-          <a:p>
-            <a:pPr lvl="1"/>
-            <a:r>
-              <a:rPr lang="en-US"/>
-              <a:t>Second level</a:t>
-            </a:r>
-          </a:p>
-          <a:p>
-            <a:pPr lvl="2"/>
-            <a:r>
-              <a:rPr lang="en-US"/>
-              <a:t>Third level</a:t>
-            </a:r>
-          </a:p>
-          <a:p>
-            <a:pPr lvl="3"/>
-            <a:r>
-              <a:rPr lang="en-US"/>
-              <a:t>Fourth level</a:t>
-            </a:r>
-          </a:p>
-          <a:p>
-            <a:pPr lvl="4"/>
-            <a:r>
-              <a:rPr lang="en-US"/>
-              <a:t>Fifth level</a:t>
-            </a:r>
-          </a:p>
-        </p:txBody>
-      </p:sp>
-      <p:sp>
-        <p:nvSpPr>
-          <p:cNvPr id="6" name="Footer Placeholder 5"/>
-          <p:cNvSpPr>
-            <a:spLocks noGrp="1"/>
-          </p:cNvSpPr>
-          <p:nvPr>
-            <p:ph type="ftr" sz="quarter" idx="4"/>
-          </p:nvPr>
-        </p:nvSpPr>
-        <p:spPr>
-          <a:xfrm>
-            <a:off x="0" y="8685213"/>
-            <a:ext cx="2971800" cy="458787"/>
-          </a:xfrm>
-          <a:prstGeom prst="rect">
-            <a:avLst/>
-          </a:prstGeom>
-        </p:spPr>
-        <p:txBody>
-          <a:bodyPr vert="horz" lIns="91440" tIns="45720" rIns="91440" bIns="45720" rtlCol="0" anchor="b"/>
-          <a:lstStyle>
-            <a:lvl1pPr algn="l">
-              <a:defRPr sz="1200"/>
-            </a:lvl1pPr>
-          </a:lstStyle>
-          <a:p>
-            <a:endParaRPr lang="en-US"/>
-          </a:p>
-        </p:txBody>
-      </p:sp>
-      <p:sp>
-        <p:nvSpPr>
-          <p:cNvPr id="7" name="Slide Number Placeholder 6"/>
-          <p:cNvSpPr>
-            <a:spLocks noGrp="1"/>
-          </p:cNvSpPr>
-          <p:nvPr>
-            <p:ph type="sldNum" sz="quarter" idx="5"/>
-          </p:nvPr>
-        </p:nvSpPr>
-        <p:spPr>
-          <a:xfrm>
-            <a:off x="3884613" y="8685213"/>
-            <a:ext cx="2971800" cy="458787"/>
-          </a:xfrm>
-          <a:prstGeom prst="rect">
-            <a:avLst/>
-          </a:prstGeom>
-        </p:spPr>
-        <p:txBody>
-          <a:bodyPr vert="horz" lIns="91440" tIns="45720" rIns="91440" bIns="45720" rtlCol="0" anchor="b"/>
-          <a:lstStyle>
-            <a:lvl1pPr algn="r">
-              <a:defRPr sz="1200"/>
-            </a:lvl1pPr>
-          </a:lstStyle>
-          <a:p>
-            <a:fld id="{CE5E9CC1-C706-0F49-92D6-E571CC5EEA8F}" type="slidenum">
-              <a:rPr lang="en-US"/>
-              <a:t>‹#›</a:t>
-            </a:fld>
-            <a:endParaRPr lang="en-US"/>
-          </a:p>
-        </p:txBody>
-      </p:sp>
     </p:spTree>
     <p:extLst>
       <p:ext uri="{BB962C8B-B14F-4D97-AF65-F5344CB8AC3E}">
-        <p14:creationId xmlns:p14="http://schemas.microsoft.com/office/powerpoint/2010/main" val="1024086991"/>
+        <p14:creationId xmlns:p14="http://schemas.microsoft.com/office/powerpoint/2010/main" val="3082229890"/>
       </p:ext>
     </p:extLst>
   </p:cSld>
@@ -515,7 +296,6 @@
               <a:rPr lang="en-US" dirty="0"/>
               <a:t>Introduce yourself, the project name, and the one-line pitch: NexusFlow is a full-stack enterprise project and task collaboration platform built solo, end to end. Mention the guide's name and thank the mentor for their time before moving to the problem statement.</a:t>
             </a:r>
-            <a:endParaRPr lang="en-US" dirty="0"/>
           </a:p>
         </p:txBody>
       </p:sp>
@@ -603,7 +383,6 @@
               <a:rPr lang="en-US" dirty="0"/>
               <a:t>The 4-role model exists in the schema and JWT claims today; enforcement of role-specific restrictions on every endpoint is still being tightened — worth mentioning proactively if asked, rather than letting it surface as a gap during questions.</a:t>
             </a:r>
-            <a:endParaRPr lang="en-US" dirty="0"/>
           </a:p>
         </p:txBody>
       </p:sp>
@@ -691,7 +470,6 @@
               <a:rPr lang="en-US" dirty="0"/>
               <a:t>Future scope items are listed honestly as not-yet-built, matching what's in the project report's own Limitations chapter — don't oversell any of these as already done if asked directly.</a:t>
             </a:r>
-            <a:endParaRPr lang="en-US" dirty="0"/>
           </a:p>
         </p:txBody>
       </p:sp>
@@ -779,7 +557,6 @@
               <a:rPr lang="en-US" dirty="0"/>
               <a:t>Close, invite questions. Have the live app ready in a browser tab in case the mentor wants a live walkthrough of the Accept -&gt; Clarify -&gt; Respond loop instead of just the workflow slide.</a:t>
             </a:r>
-            <a:endParaRPr lang="en-US" dirty="0"/>
           </a:p>
         </p:txBody>
       </p:sp>
@@ -867,7 +644,6 @@
               <a:rPr lang="en-US" dirty="0"/>
               <a:t>Keep this brief — the mentor already knows the general pain points of scattered tooling. The key point to land: NexusFlow's actual differentiator isn't the CRUD (any project has that) — it's that a task assignment leads somewhere, not just a notification with no follow-up.</a:t>
             </a:r>
-            <a:endParaRPr lang="en-US" dirty="0"/>
           </a:p>
         </p:txBody>
       </p:sp>
@@ -955,7 +731,6 @@
               <a:rPr lang="en-US" dirty="0"/>
               <a:t>Five objectives, each one maps directly to a module you'll show later. Emphasize objective 2 — workflow-driven collaboration — since that's the core thing that separates this from a basic CRUD project management app.</a:t>
             </a:r>
-            <a:endParaRPr lang="en-US" dirty="0"/>
           </a:p>
         </p:txBody>
       </p:sp>
@@ -1043,7 +818,6 @@
               <a:rPr lang="en-US" dirty="0"/>
               <a:t>Straight technical inventory. If asked why Clean Architecture for a solo project — the honest answer is it kept the 4-layer separation enforceable even while working alone, and made the later workflow-feature addition a contained change instead of a rewrite.</a:t>
             </a:r>
-            <a:endParaRPr lang="en-US" dirty="0"/>
           </a:p>
         </p:txBody>
       </p:sp>
@@ -1131,7 +905,6 @@
               <a:rPr lang="en-US" dirty="0"/>
               <a:t>Walk top to bottom: a request enters through Angular, hits an API controller, flows into an Application service, which operates on Domain entities via the Infrastructure layer's repositories — all coordinated through one Unit of Work per request so a partial failure can't leave the database half-updated.</a:t>
             </a:r>
-            <a:endParaRPr lang="en-US" dirty="0"/>
           </a:p>
         </p:txBody>
       </p:sp>
@@ -1219,7 +992,6 @@
               <a:rPr lang="en-US" dirty="0"/>
               <a:t>Seven modules, all working end to end. Workflow Engine (highlighted) is the newest and most substantial addition — it's what turns Task Management from a CRUD list into an actual collaboration loop. Happy to open the live app and demo any one of these on request.</a:t>
             </a:r>
-            <a:endParaRPr lang="en-US" dirty="0"/>
           </a:p>
         </p:txBody>
       </p:sp>
@@ -1307,7 +1079,6 @@
               <a:rPr lang="en-US" dirty="0"/>
               <a:t>This is the loop that answers the review question 'what happens after you assign a task?' Walk it left to right, top row then bottom row: a task is created under a project, assigned to a user, who gets a clickable notification, accepts it, can request clarification if the brief is unclear, the manager responds, status updates flow through with an optional work-log note, every step is captured in the Activity Timeline, and it ends Completed.</a:t>
             </a:r>
-            <a:endParaRPr lang="en-US" dirty="0"/>
           </a:p>
         </p:txBody>
       </p:sp>
@@ -1395,7 +1166,6 @@
               <a:rPr lang="en-US" dirty="0"/>
               <a:t>These five are the features most worth demoing live if there's time. The ownership checks point is worth emphasizing — it's enforced server-side in the service layer, not just hidden in the UI, so a user can't call the API directly to bypass it.</a:t>
             </a:r>
-            <a:endParaRPr lang="en-US" dirty="0"/>
           </a:p>
         </p:txBody>
       </p:sp>
@@ -1483,7 +1253,6 @@
               <a:rPr lang="en-US" dirty="0"/>
               <a:t>Live screenshots from the running application, not mockups. Point out the notification panel specifically — the entries visible there ('Task Accepted', 'Clarification Requested', 'Task Status Updated') are the workflow engine's actual output, captured mid-testing.</a:t>
             </a:r>
-            <a:endParaRPr lang="en-US" dirty="0"/>
           </a:p>
         </p:txBody>
       </p:sp>
@@ -1556,6 +1325,11 @@
 <file path=ppt/slideMasters/slideMaster1.xml><?xml version="1.0" encoding="utf-8"?>
 <p:sldMaster xmlns:a="http://schemas.openxmlformats.org/drawingml/2006/main" xmlns:r="http://schemas.openxmlformats.org/officeDocument/2006/relationships" xmlns:p="http://schemas.openxmlformats.org/presentationml/2006/main">
   <p:cSld>
+    <p:bg>
+      <p:bgRef idx="1001">
+        <a:schemeClr val="bg1"/>
+      </p:bgRef>
+    </p:bg>
     <p:spTree>
       <p:nvGrpSpPr>
         <p:cNvPr id="1" name=""/>
@@ -1838,6 +1612,7 @@
         <a:solidFill>
           <a:srgbClr val="1E1B4B"/>
         </a:solidFill>
+        <a:effectLst/>
       </p:bgPr>
     </p:bg>
     <p:spTree>
@@ -1896,14 +1671,14 @@
       </p:sp>
       <p:pic>
         <p:nvPicPr>
-          <p:cNvPr id="4" name="Image 0" descr="preencoded.png">    </p:cNvPr>
+          <p:cNvPr id="4" name="Image 0" descr="preencoded.png"/>
           <p:cNvPicPr>
             <a:picLocks noChangeAspect="1"/>
           </p:cNvPicPr>
           <p:nvPr/>
         </p:nvPicPr>
         <p:blipFill>
-          <a:blip r:embed="rId1"/>
+          <a:blip r:embed="rId3"/>
           <a:stretch>
             <a:fillRect/>
           </a:stretch>
@@ -1939,7 +1714,7 @@
           <a:bodyPr wrap="square" lIns="0" tIns="0" rIns="0" bIns="0" rtlCol="0" anchor="ctr"/>
           <a:lstStyle/>
           <a:p>
-            <a:pPr indent="0" marL="0">
+            <a:pPr marL="0" indent="0">
               <a:buNone/>
             </a:pPr>
             <a:r>
@@ -1978,7 +1753,7 @@
           <a:bodyPr wrap="square" lIns="0" tIns="0" rIns="0" bIns="0" rtlCol="0" anchor="ctr"/>
           <a:lstStyle/>
           <a:p>
-            <a:pPr indent="0" marL="0">
+            <a:pPr marL="0" indent="0">
               <a:buNone/>
             </a:pPr>
             <a:r>
@@ -2040,11 +1815,11 @@
           <a:bodyPr wrap="square" lIns="0" tIns="0" rIns="0" bIns="0" rtlCol="0" anchor="ctr"/>
           <a:lstStyle/>
           <a:p>
-            <a:pPr indent="0" marL="0">
-              <a:buNone/>
-            </a:pPr>
-            <a:r>
-              <a:rPr lang="en-US" sz="1000" b="1" spc="100" kern="0" dirty="0">
+            <a:pPr marL="0" indent="0">
+              <a:buNone/>
+            </a:pPr>
+            <a:r>
+              <a:rPr lang="en-US" sz="1000" b="1" kern="0" spc="100" dirty="0">
                 <a:solidFill>
                   <a:srgbClr val="9089E8"/>
                 </a:solidFill>
@@ -2079,7 +1854,7 @@
           <a:bodyPr wrap="square" lIns="0" tIns="0" rIns="0" bIns="0" rtlCol="0" anchor="ctr"/>
           <a:lstStyle/>
           <a:p>
-            <a:pPr indent="0" marL="0">
+            <a:pPr marL="0" indent="0">
               <a:buNone/>
             </a:pPr>
             <a:r>
@@ -2118,11 +1893,11 @@
           <a:bodyPr wrap="square" lIns="0" tIns="0" rIns="0" bIns="0" rtlCol="0" anchor="ctr"/>
           <a:lstStyle/>
           <a:p>
-            <a:pPr indent="0" marL="0">
-              <a:buNone/>
-            </a:pPr>
-            <a:r>
-              <a:rPr lang="en-US" sz="1000" b="1" spc="100" kern="0" dirty="0">
+            <a:pPr marL="0" indent="0">
+              <a:buNone/>
+            </a:pPr>
+            <a:r>
+              <a:rPr lang="en-US" sz="1000" b="1" kern="0" spc="100" dirty="0">
                 <a:solidFill>
                   <a:srgbClr val="9089E8"/>
                 </a:solidFill>
@@ -2157,7 +1932,7 @@
           <a:bodyPr wrap="square" lIns="0" tIns="0" rIns="0" bIns="0" rtlCol="0" anchor="ctr"/>
           <a:lstStyle/>
           <a:p>
-            <a:pPr indent="0" marL="0">
+            <a:pPr marL="0" indent="0">
               <a:buNone/>
             </a:pPr>
             <a:r>
@@ -2177,7 +1952,7 @@
       </p:sp>
       <p:sp>
         <p:nvSpPr>
-          <p:cNvPr id="12" name="Text 9"/>
+          <p:cNvPr id="14" name="Text 11"/>
           <p:cNvSpPr/>
           <p:nvPr/>
         </p:nvSpPr>
@@ -2196,11 +1971,11 @@
           <a:bodyPr wrap="square" lIns="0" tIns="0" rIns="0" bIns="0" rtlCol="0" anchor="ctr"/>
           <a:lstStyle/>
           <a:p>
-            <a:pPr indent="0" marL="0">
-              <a:buNone/>
-            </a:pPr>
-            <a:r>
-              <a:rPr lang="en-US" sz="1000" b="1" spc="100" kern="0" dirty="0">
+            <a:pPr marL="0" indent="0">
+              <a:buNone/>
+            </a:pPr>
+            <a:r>
+              <a:rPr lang="en-US" sz="1000" b="1" kern="0" spc="100" dirty="0">
                 <a:solidFill>
                   <a:srgbClr val="9089E8"/>
                 </a:solidFill>
@@ -2208,7 +1983,7 @@
                 <a:ea typeface="Calibri" pitchFamily="34" charset="-122"/>
                 <a:cs typeface="Calibri" pitchFamily="34" charset="-120"/>
               </a:rPr>
-              <a:t>INSTITUTE</a:t>
+              <a:t>GUIDED BY</a:t>
             </a:r>
             <a:endParaRPr lang="en-US" sz="1000" dirty="0"/>
           </a:p>
@@ -2216,7 +1991,7 @@
       </p:sp>
       <p:sp>
         <p:nvSpPr>
-          <p:cNvPr id="13" name="Text 10"/>
+          <p:cNvPr id="15" name="Text 12"/>
           <p:cNvSpPr/>
           <p:nvPr/>
         </p:nvSpPr>
@@ -2235,7 +2010,7 @@
           <a:bodyPr wrap="square" lIns="0" tIns="0" rIns="0" bIns="0" rtlCol="0" anchor="ctr"/>
           <a:lstStyle/>
           <a:p>
-            <a:pPr indent="0" marL="0">
+            <a:pPr marL="0" indent="0">
               <a:buNone/>
             </a:pPr>
             <a:r>
@@ -2247,85 +2022,7 @@
                 <a:ea typeface="Calibri" pitchFamily="34" charset="-122"/>
                 <a:cs typeface="Calibri" pitchFamily="34" charset="-120"/>
               </a:rPr>
-              <a:t>Institute of Information Technology &amp; Management, New Delhi</a:t>
-            </a:r>
-            <a:endParaRPr lang="en-US" sz="1300" dirty="0"/>
-          </a:p>
-        </p:txBody>
-      </p:sp>
-      <p:sp>
-        <p:nvSpPr>
-          <p:cNvPr id="14" name="Text 11"/>
-          <p:cNvSpPr/>
-          <p:nvPr/>
-        </p:nvSpPr>
-        <p:spPr>
-          <a:xfrm>
-            <a:off x="822960" y="5330952"/>
-            <a:ext cx="1920240" cy="274320"/>
-          </a:xfrm>
-          <a:prstGeom prst="rect">
-            <a:avLst/>
-          </a:prstGeom>
-          <a:noFill/>
-          <a:ln/>
-        </p:spPr>
-        <p:txBody>
-          <a:bodyPr wrap="square" lIns="0" tIns="0" rIns="0" bIns="0" rtlCol="0" anchor="ctr"/>
-          <a:lstStyle/>
-          <a:p>
-            <a:pPr indent="0" marL="0">
-              <a:buNone/>
-            </a:pPr>
-            <a:r>
-              <a:rPr lang="en-US" sz="1000" b="1" spc="100" kern="0" dirty="0">
-                <a:solidFill>
-                  <a:srgbClr val="9089E8"/>
-                </a:solidFill>
-                <a:latin typeface="Calibri" pitchFamily="34" charset="0"/>
-                <a:ea typeface="Calibri" pitchFamily="34" charset="-122"/>
-                <a:cs typeface="Calibri" pitchFamily="34" charset="-120"/>
-              </a:rPr>
-              <a:t>GUIDED BY</a:t>
-            </a:r>
-            <a:endParaRPr lang="en-US" sz="1000" dirty="0"/>
-          </a:p>
-        </p:txBody>
-      </p:sp>
-      <p:sp>
-        <p:nvSpPr>
-          <p:cNvPr id="15" name="Text 12"/>
-          <p:cNvSpPr/>
-          <p:nvPr/>
-        </p:nvSpPr>
-        <p:spPr>
-          <a:xfrm>
-            <a:off x="2788920" y="5303520"/>
-            <a:ext cx="5120640" cy="320040"/>
-          </a:xfrm>
-          <a:prstGeom prst="rect">
-            <a:avLst/>
-          </a:prstGeom>
-          <a:noFill/>
-          <a:ln/>
-        </p:spPr>
-        <p:txBody>
-          <a:bodyPr wrap="square" lIns="0" tIns="0" rIns="0" bIns="0" rtlCol="0" anchor="ctr"/>
-          <a:lstStyle/>
-          <a:p>
-            <a:pPr indent="0" marL="0">
-              <a:buNone/>
-            </a:pPr>
-            <a:r>
-              <a:rPr lang="en-US" sz="1300" dirty="0">
-                <a:solidFill>
-                  <a:srgbClr val="FFFFFF"/>
-                </a:solidFill>
-                <a:latin typeface="Calibri" pitchFamily="34" charset="0"/>
-                <a:ea typeface="Calibri" pitchFamily="34" charset="-122"/>
-                <a:cs typeface="Calibri" pitchFamily="34" charset="-120"/>
-              </a:rPr>
-              <a:t>Rohit Kumar</a:t>
+              <a:t>Linux Mantra</a:t>
             </a:r>
             <a:endParaRPr lang="en-US" sz="1300" dirty="0"/>
           </a:p>
@@ -2347,6 +2044,7 @@
         <a:solidFill>
           <a:srgbClr val="FFFFFF"/>
         </a:solidFill>
+        <a:effectLst/>
       </p:bgPr>
     </p:bg>
     <p:spTree>
@@ -2384,11 +2082,11 @@
           <a:bodyPr wrap="square" lIns="0" tIns="0" rIns="0" bIns="0" rtlCol="0" anchor="ctr"/>
           <a:lstStyle/>
           <a:p>
-            <a:pPr indent="0" marL="0">
-              <a:buNone/>
-            </a:pPr>
-            <a:r>
-              <a:rPr lang="en-US" sz="1200" b="1" spc="200" kern="0" dirty="0">
+            <a:pPr marL="0" indent="0">
+              <a:buNone/>
+            </a:pPr>
+            <a:r>
+              <a:rPr lang="en-US" sz="1200" b="1" kern="0" spc="200" dirty="0">
                 <a:solidFill>
                   <a:srgbClr val="4F46E5"/>
                 </a:solidFill>
@@ -2423,7 +2121,7 @@
           <a:bodyPr wrap="square" lIns="0" tIns="0" rIns="0" bIns="0" rtlCol="0" anchor="ctr"/>
           <a:lstStyle/>
           <a:p>
-            <a:pPr indent="0" marL="0">
+            <a:pPr marL="0" indent="0">
               <a:buNone/>
             </a:pPr>
             <a:r>
@@ -2484,7 +2182,7 @@
           <a:bodyPr wrap="square" lIns="0" tIns="0" rIns="0" bIns="0" rtlCol="0" anchor="ctr"/>
           <a:lstStyle/>
           <a:p>
-            <a:pPr indent="0" marL="0">
+            <a:pPr marL="0" indent="0">
               <a:buNone/>
             </a:pPr>
             <a:r>
@@ -2524,251 +2222,7 @@
       </p:sp>
       <p:pic>
         <p:nvPicPr>
-          <p:cNvPr id="7" name="Image 0" descr="preencoded.png">    </p:cNvPr>
-          <p:cNvPicPr>
-            <a:picLocks noChangeAspect="1"/>
-          </p:cNvPicPr>
-          <p:nvPr/>
-        </p:nvPicPr>
-        <p:blipFill>
-          <a:blip r:embed="rId1"/>
-          <a:stretch>
-            <a:fillRect/>
-          </a:stretch>
-        </p:blipFill>
-        <p:spPr>
-          <a:xfrm>
-            <a:off x="987552" y="2313432"/>
-            <a:ext cx="219456" cy="219456"/>
-          </a:xfrm>
-          <a:prstGeom prst="rect">
-            <a:avLst/>
-          </a:prstGeom>
-        </p:spPr>
-      </p:pic>
-      <p:sp>
-        <p:nvSpPr>
-          <p:cNvPr id="8" name="Text 5"/>
-          <p:cNvSpPr/>
-          <p:nvPr/>
-        </p:nvSpPr>
-        <p:spPr>
-          <a:xfrm>
-            <a:off x="1490472" y="2167128"/>
-            <a:ext cx="4133088" cy="274320"/>
-          </a:xfrm>
-          <a:prstGeom prst="rect">
-            <a:avLst/>
-          </a:prstGeom>
-          <a:noFill/>
-          <a:ln/>
-        </p:spPr>
-        <p:txBody>
-          <a:bodyPr wrap="square" lIns="0" tIns="0" rIns="0" bIns="0" rtlCol="0" anchor="ctr"/>
-          <a:lstStyle/>
-          <a:p>
-            <a:pPr indent="0" marL="0">
-              <a:buNone/>
-            </a:pPr>
-            <a:r>
-              <a:rPr lang="en-US" sz="1500" b="1" dirty="0">
-                <a:solidFill>
-                  <a:srgbClr val="171B23"/>
-                </a:solidFill>
-                <a:latin typeface="Calibri" pitchFamily="34" charset="0"/>
-                <a:ea typeface="Calibri" pitchFamily="34" charset="-122"/>
-                <a:cs typeface="Calibri" pitchFamily="34" charset="-120"/>
-              </a:rPr>
-              <a:t>Single source of truth</a:t>
-            </a:r>
-            <a:endParaRPr lang="en-US" sz="1500" dirty="0"/>
-          </a:p>
-        </p:txBody>
-      </p:sp>
-      <p:sp>
-        <p:nvSpPr>
-          <p:cNvPr id="9" name="Text 6"/>
-          <p:cNvSpPr/>
-          <p:nvPr/>
-        </p:nvSpPr>
-        <p:spPr>
-          <a:xfrm>
-            <a:off x="1490472" y="2432304"/>
-            <a:ext cx="4133088" cy="457200"/>
-          </a:xfrm>
-          <a:prstGeom prst="rect">
-            <a:avLst/>
-          </a:prstGeom>
-          <a:noFill/>
-          <a:ln/>
-        </p:spPr>
-        <p:txBody>
-          <a:bodyPr wrap="square" lIns="0" tIns="0" rIns="0" bIns="0" rtlCol="0" anchor="t"/>
-          <a:lstStyle/>
-          <a:p>
-            <a:pPr indent="0" marL="0">
-              <a:buNone/>
-            </a:pPr>
-            <a:r>
-              <a:rPr lang="en-US" sz="1150" dirty="0">
-                <a:solidFill>
-                  <a:srgbClr val="5B6472"/>
-                </a:solidFill>
-                <a:latin typeface="Calibri" pitchFamily="34" charset="0"/>
-                <a:ea typeface="Calibri" pitchFamily="34" charset="-122"/>
-                <a:cs typeface="Calibri" pitchFamily="34" charset="-120"/>
-              </a:rPr>
-              <a:t>One system instead of scattered chats and sheets</a:t>
-            </a:r>
-            <a:endParaRPr lang="en-US" sz="1150" dirty="0"/>
-          </a:p>
-        </p:txBody>
-      </p:sp>
-      <p:sp>
-        <p:nvSpPr>
-          <p:cNvPr id="10" name="Shape 7"/>
-          <p:cNvSpPr/>
-          <p:nvPr/>
-        </p:nvSpPr>
-        <p:spPr>
-          <a:xfrm>
-            <a:off x="868680" y="3108960"/>
-            <a:ext cx="457200" cy="457200"/>
-          </a:xfrm>
-          <a:prstGeom prst="ellipse">
-            <a:avLst/>
-          </a:prstGeom>
-          <a:solidFill>
-            <a:srgbClr val="4F46E5"/>
-          </a:solidFill>
-          <a:ln/>
-        </p:spPr>
-      </p:sp>
-      <p:pic>
-        <p:nvPicPr>
-          <p:cNvPr id="11" name="Image 1" descr="preencoded.png">    </p:cNvPr>
-          <p:cNvPicPr>
-            <a:picLocks noChangeAspect="1"/>
-          </p:cNvPicPr>
-          <p:nvPr/>
-        </p:nvPicPr>
-        <p:blipFill>
-          <a:blip r:embed="rId2"/>
-          <a:stretch>
-            <a:fillRect/>
-          </a:stretch>
-        </p:blipFill>
-        <p:spPr>
-          <a:xfrm>
-            <a:off x="987552" y="3227832"/>
-            <a:ext cx="219456" cy="219456"/>
-          </a:xfrm>
-          <a:prstGeom prst="rect">
-            <a:avLst/>
-          </a:prstGeom>
-        </p:spPr>
-      </p:pic>
-      <p:sp>
-        <p:nvSpPr>
-          <p:cNvPr id="12" name="Text 8"/>
-          <p:cNvSpPr/>
-          <p:nvPr/>
-        </p:nvSpPr>
-        <p:spPr>
-          <a:xfrm>
-            <a:off x="1490472" y="3081528"/>
-            <a:ext cx="4133088" cy="274320"/>
-          </a:xfrm>
-          <a:prstGeom prst="rect">
-            <a:avLst/>
-          </a:prstGeom>
-          <a:noFill/>
-          <a:ln/>
-        </p:spPr>
-        <p:txBody>
-          <a:bodyPr wrap="square" lIns="0" tIns="0" rIns="0" bIns="0" rtlCol="0" anchor="ctr"/>
-          <a:lstStyle/>
-          <a:p>
-            <a:pPr indent="0" marL="0">
-              <a:buNone/>
-            </a:pPr>
-            <a:r>
-              <a:rPr lang="en-US" sz="1500" b="1" dirty="0">
-                <a:solidFill>
-                  <a:srgbClr val="171B23"/>
-                </a:solidFill>
-                <a:latin typeface="Calibri" pitchFamily="34" charset="0"/>
-                <a:ea typeface="Calibri" pitchFamily="34" charset="-122"/>
-                <a:cs typeface="Calibri" pitchFamily="34" charset="-120"/>
-              </a:rPr>
-              <a:t>Faster task turnaround</a:t>
-            </a:r>
-            <a:endParaRPr lang="en-US" sz="1500" dirty="0"/>
-          </a:p>
-        </p:txBody>
-      </p:sp>
-      <p:sp>
-        <p:nvSpPr>
-          <p:cNvPr id="13" name="Text 9"/>
-          <p:cNvSpPr/>
-          <p:nvPr/>
-        </p:nvSpPr>
-        <p:spPr>
-          <a:xfrm>
-            <a:off x="1490472" y="3346704"/>
-            <a:ext cx="4133088" cy="457200"/>
-          </a:xfrm>
-          <a:prstGeom prst="rect">
-            <a:avLst/>
-          </a:prstGeom>
-          <a:noFill/>
-          <a:ln/>
-        </p:spPr>
-        <p:txBody>
-          <a:bodyPr wrap="square" lIns="0" tIns="0" rIns="0" bIns="0" rtlCol="0" anchor="t"/>
-          <a:lstStyle/>
-          <a:p>
-            <a:pPr indent="0" marL="0">
-              <a:buNone/>
-            </a:pPr>
-            <a:r>
-              <a:rPr lang="en-US" sz="1150" dirty="0">
-                <a:solidFill>
-                  <a:srgbClr val="5B6472"/>
-                </a:solidFill>
-                <a:latin typeface="Calibri" pitchFamily="34" charset="0"/>
-                <a:ea typeface="Calibri" pitchFamily="34" charset="-122"/>
-                <a:cs typeface="Calibri" pitchFamily="34" charset="-120"/>
-              </a:rPr>
-              <a:t>A clear next action at every stage of a task</a:t>
-            </a:r>
-            <a:endParaRPr lang="en-US" sz="1150" dirty="0"/>
-          </a:p>
-        </p:txBody>
-      </p:sp>
-      <p:sp>
-        <p:nvSpPr>
-          <p:cNvPr id="14" name="Shape 10"/>
-          <p:cNvSpPr/>
-          <p:nvPr/>
-        </p:nvSpPr>
-        <p:spPr>
-          <a:xfrm>
-            <a:off x="868680" y="4023360"/>
-            <a:ext cx="457200" cy="457200"/>
-          </a:xfrm>
-          <a:prstGeom prst="ellipse">
-            <a:avLst/>
-          </a:prstGeom>
-          <a:solidFill>
-            <a:srgbClr val="4F46E5"/>
-          </a:solidFill>
-          <a:ln/>
-        </p:spPr>
-      </p:sp>
-      <p:pic>
-        <p:nvPicPr>
-          <p:cNvPr id="15" name="Image 2" descr="preencoded.png">    </p:cNvPr>
+          <p:cNvPr id="7" name="Image 0" descr="preencoded.png"/>
           <p:cNvPicPr>
             <a:picLocks noChangeAspect="1"/>
           </p:cNvPicPr>
@@ -2782,7 +2236,7 @@
         </p:blipFill>
         <p:spPr>
           <a:xfrm>
-            <a:off x="987552" y="4142232"/>
+            <a:off x="987552" y="2313432"/>
             <a:ext cx="219456" cy="219456"/>
           </a:xfrm>
           <a:prstGeom prst="rect">
@@ -2792,13 +2246,13 @@
       </p:pic>
       <p:sp>
         <p:nvSpPr>
-          <p:cNvPr id="16" name="Text 11"/>
-          <p:cNvSpPr/>
-          <p:nvPr/>
-        </p:nvSpPr>
-        <p:spPr>
-          <a:xfrm>
-            <a:off x="1490472" y="3995928"/>
+          <p:cNvPr id="8" name="Text 5"/>
+          <p:cNvSpPr/>
+          <p:nvPr/>
+        </p:nvSpPr>
+        <p:spPr>
+          <a:xfrm>
+            <a:off x="1490472" y="2167128"/>
             <a:ext cx="4133088" cy="274320"/>
           </a:xfrm>
           <a:prstGeom prst="rect">
@@ -2811,7 +2265,7 @@
           <a:bodyPr wrap="square" lIns="0" tIns="0" rIns="0" bIns="0" rtlCol="0" anchor="ctr"/>
           <a:lstStyle/>
           <a:p>
-            <a:pPr indent="0" marL="0">
+            <a:pPr marL="0" indent="0">
               <a:buNone/>
             </a:pPr>
             <a:r>
@@ -2823,7 +2277,7 @@
                 <a:ea typeface="Calibri" pitchFamily="34" charset="-122"/>
                 <a:cs typeface="Calibri" pitchFamily="34" charset="-120"/>
               </a:rPr>
-              <a:t>Built-in transparency</a:t>
+              <a:t>Single source of truth</a:t>
             </a:r>
             <a:endParaRPr lang="en-US" sz="1500" dirty="0"/>
           </a:p>
@@ -2831,13 +2285,13 @@
       </p:sp>
       <p:sp>
         <p:nvSpPr>
-          <p:cNvPr id="17" name="Text 12"/>
-          <p:cNvSpPr/>
-          <p:nvPr/>
-        </p:nvSpPr>
-        <p:spPr>
-          <a:xfrm>
-            <a:off x="1490472" y="4261104"/>
+          <p:cNvPr id="9" name="Text 6"/>
+          <p:cNvSpPr/>
+          <p:nvPr/>
+        </p:nvSpPr>
+        <p:spPr>
+          <a:xfrm>
+            <a:off x="1490472" y="2432304"/>
             <a:ext cx="4133088" cy="457200"/>
           </a:xfrm>
           <a:prstGeom prst="rect">
@@ -2850,7 +2304,7 @@
           <a:bodyPr wrap="square" lIns="0" tIns="0" rIns="0" bIns="0" rtlCol="0" anchor="t"/>
           <a:lstStyle/>
           <a:p>
-            <a:pPr indent="0" marL="0">
+            <a:pPr marL="0" indent="0">
               <a:buNone/>
             </a:pPr>
             <a:r>
@@ -2862,7 +2316,7 @@
                 <a:ea typeface="Calibri" pitchFamily="34" charset="-122"/>
                 <a:cs typeface="Calibri" pitchFamily="34" charset="-120"/>
               </a:rPr>
-              <a:t>Every change is attributable and time-stamped</a:t>
+              <a:t>One system instead of scattered chats and sheets</a:t>
             </a:r>
             <a:endParaRPr lang="en-US" sz="1150" dirty="0"/>
           </a:p>
@@ -2870,13 +2324,13 @@
       </p:sp>
       <p:sp>
         <p:nvSpPr>
-          <p:cNvPr id="18" name="Shape 13"/>
-          <p:cNvSpPr/>
-          <p:nvPr/>
-        </p:nvSpPr>
-        <p:spPr>
-          <a:xfrm>
-            <a:off x="868680" y="4937760"/>
+          <p:cNvPr id="10" name="Shape 7"/>
+          <p:cNvSpPr/>
+          <p:nvPr/>
+        </p:nvSpPr>
+        <p:spPr>
+          <a:xfrm>
+            <a:off x="868680" y="3108960"/>
             <a:ext cx="457200" cy="457200"/>
           </a:xfrm>
           <a:prstGeom prst="ellipse">
@@ -2890,20 +2344,264 @@
       </p:sp>
       <p:pic>
         <p:nvPicPr>
-          <p:cNvPr id="19" name="Image 3" descr="preencoded.png">    </p:cNvPr>
+          <p:cNvPr id="11" name="Image 1" descr="preencoded.png"/>
           <p:cNvPicPr>
             <a:picLocks noChangeAspect="1"/>
           </p:cNvPicPr>
           <p:nvPr/>
         </p:nvPicPr>
         <p:blipFill>
-          <a:blip r:embed="rId4"/>
+          <a:blip r:embed="rId3"/>
           <a:stretch>
             <a:fillRect/>
           </a:stretch>
         </p:blipFill>
         <p:spPr>
           <a:xfrm>
+            <a:off x="987552" y="3227832"/>
+            <a:ext cx="219456" cy="219456"/>
+          </a:xfrm>
+          <a:prstGeom prst="rect">
+            <a:avLst/>
+          </a:prstGeom>
+        </p:spPr>
+      </p:pic>
+      <p:sp>
+        <p:nvSpPr>
+          <p:cNvPr id="12" name="Text 8"/>
+          <p:cNvSpPr/>
+          <p:nvPr/>
+        </p:nvSpPr>
+        <p:spPr>
+          <a:xfrm>
+            <a:off x="1490472" y="3081528"/>
+            <a:ext cx="4133088" cy="274320"/>
+          </a:xfrm>
+          <a:prstGeom prst="rect">
+            <a:avLst/>
+          </a:prstGeom>
+          <a:noFill/>
+          <a:ln/>
+        </p:spPr>
+        <p:txBody>
+          <a:bodyPr wrap="square" lIns="0" tIns="0" rIns="0" bIns="0" rtlCol="0" anchor="ctr"/>
+          <a:lstStyle/>
+          <a:p>
+            <a:pPr marL="0" indent="0">
+              <a:buNone/>
+            </a:pPr>
+            <a:r>
+              <a:rPr lang="en-US" sz="1500" b="1" dirty="0">
+                <a:solidFill>
+                  <a:srgbClr val="171B23"/>
+                </a:solidFill>
+                <a:latin typeface="Calibri" pitchFamily="34" charset="0"/>
+                <a:ea typeface="Calibri" pitchFamily="34" charset="-122"/>
+                <a:cs typeface="Calibri" pitchFamily="34" charset="-120"/>
+              </a:rPr>
+              <a:t>Faster task turnaround</a:t>
+            </a:r>
+            <a:endParaRPr lang="en-US" sz="1500" dirty="0"/>
+          </a:p>
+        </p:txBody>
+      </p:sp>
+      <p:sp>
+        <p:nvSpPr>
+          <p:cNvPr id="13" name="Text 9"/>
+          <p:cNvSpPr/>
+          <p:nvPr/>
+        </p:nvSpPr>
+        <p:spPr>
+          <a:xfrm>
+            <a:off x="1490472" y="3346704"/>
+            <a:ext cx="4133088" cy="457200"/>
+          </a:xfrm>
+          <a:prstGeom prst="rect">
+            <a:avLst/>
+          </a:prstGeom>
+          <a:noFill/>
+          <a:ln/>
+        </p:spPr>
+        <p:txBody>
+          <a:bodyPr wrap="square" lIns="0" tIns="0" rIns="0" bIns="0" rtlCol="0" anchor="t"/>
+          <a:lstStyle/>
+          <a:p>
+            <a:pPr marL="0" indent="0">
+              <a:buNone/>
+            </a:pPr>
+            <a:r>
+              <a:rPr lang="en-US" sz="1150" dirty="0">
+                <a:solidFill>
+                  <a:srgbClr val="5B6472"/>
+                </a:solidFill>
+                <a:latin typeface="Calibri" pitchFamily="34" charset="0"/>
+                <a:ea typeface="Calibri" pitchFamily="34" charset="-122"/>
+                <a:cs typeface="Calibri" pitchFamily="34" charset="-120"/>
+              </a:rPr>
+              <a:t>A clear next action at every stage of a task</a:t>
+            </a:r>
+            <a:endParaRPr lang="en-US" sz="1150" dirty="0"/>
+          </a:p>
+        </p:txBody>
+      </p:sp>
+      <p:sp>
+        <p:nvSpPr>
+          <p:cNvPr id="14" name="Shape 10"/>
+          <p:cNvSpPr/>
+          <p:nvPr/>
+        </p:nvSpPr>
+        <p:spPr>
+          <a:xfrm>
+            <a:off x="868680" y="4023360"/>
+            <a:ext cx="457200" cy="457200"/>
+          </a:xfrm>
+          <a:prstGeom prst="ellipse">
+            <a:avLst/>
+          </a:prstGeom>
+          <a:solidFill>
+            <a:srgbClr val="4F46E5"/>
+          </a:solidFill>
+          <a:ln/>
+        </p:spPr>
+      </p:sp>
+      <p:pic>
+        <p:nvPicPr>
+          <p:cNvPr id="15" name="Image 2" descr="preencoded.png"/>
+          <p:cNvPicPr>
+            <a:picLocks noChangeAspect="1"/>
+          </p:cNvPicPr>
+          <p:nvPr/>
+        </p:nvPicPr>
+        <p:blipFill>
+          <a:blip r:embed="rId3"/>
+          <a:stretch>
+            <a:fillRect/>
+          </a:stretch>
+        </p:blipFill>
+        <p:spPr>
+          <a:xfrm>
+            <a:off x="987552" y="4142232"/>
+            <a:ext cx="219456" cy="219456"/>
+          </a:xfrm>
+          <a:prstGeom prst="rect">
+            <a:avLst/>
+          </a:prstGeom>
+        </p:spPr>
+      </p:pic>
+      <p:sp>
+        <p:nvSpPr>
+          <p:cNvPr id="16" name="Text 11"/>
+          <p:cNvSpPr/>
+          <p:nvPr/>
+        </p:nvSpPr>
+        <p:spPr>
+          <a:xfrm>
+            <a:off x="1490472" y="3995928"/>
+            <a:ext cx="4133088" cy="274320"/>
+          </a:xfrm>
+          <a:prstGeom prst="rect">
+            <a:avLst/>
+          </a:prstGeom>
+          <a:noFill/>
+          <a:ln/>
+        </p:spPr>
+        <p:txBody>
+          <a:bodyPr wrap="square" lIns="0" tIns="0" rIns="0" bIns="0" rtlCol="0" anchor="ctr"/>
+          <a:lstStyle/>
+          <a:p>
+            <a:pPr marL="0" indent="0">
+              <a:buNone/>
+            </a:pPr>
+            <a:r>
+              <a:rPr lang="en-US" sz="1500" b="1" dirty="0">
+                <a:solidFill>
+                  <a:srgbClr val="171B23"/>
+                </a:solidFill>
+                <a:latin typeface="Calibri" pitchFamily="34" charset="0"/>
+                <a:ea typeface="Calibri" pitchFamily="34" charset="-122"/>
+                <a:cs typeface="Calibri" pitchFamily="34" charset="-120"/>
+              </a:rPr>
+              <a:t>Built-in transparency</a:t>
+            </a:r>
+            <a:endParaRPr lang="en-US" sz="1500" dirty="0"/>
+          </a:p>
+        </p:txBody>
+      </p:sp>
+      <p:sp>
+        <p:nvSpPr>
+          <p:cNvPr id="17" name="Text 12"/>
+          <p:cNvSpPr/>
+          <p:nvPr/>
+        </p:nvSpPr>
+        <p:spPr>
+          <a:xfrm>
+            <a:off x="1490472" y="4261104"/>
+            <a:ext cx="4133088" cy="457200"/>
+          </a:xfrm>
+          <a:prstGeom prst="rect">
+            <a:avLst/>
+          </a:prstGeom>
+          <a:noFill/>
+          <a:ln/>
+        </p:spPr>
+        <p:txBody>
+          <a:bodyPr wrap="square" lIns="0" tIns="0" rIns="0" bIns="0" rtlCol="0" anchor="t"/>
+          <a:lstStyle/>
+          <a:p>
+            <a:pPr marL="0" indent="0">
+              <a:buNone/>
+            </a:pPr>
+            <a:r>
+              <a:rPr lang="en-US" sz="1150" dirty="0">
+                <a:solidFill>
+                  <a:srgbClr val="5B6472"/>
+                </a:solidFill>
+                <a:latin typeface="Calibri" pitchFamily="34" charset="0"/>
+                <a:ea typeface="Calibri" pitchFamily="34" charset="-122"/>
+                <a:cs typeface="Calibri" pitchFamily="34" charset="-120"/>
+              </a:rPr>
+              <a:t>Every change is attributable and time-stamped</a:t>
+            </a:r>
+            <a:endParaRPr lang="en-US" sz="1150" dirty="0"/>
+          </a:p>
+        </p:txBody>
+      </p:sp>
+      <p:sp>
+        <p:nvSpPr>
+          <p:cNvPr id="18" name="Shape 13"/>
+          <p:cNvSpPr/>
+          <p:nvPr/>
+        </p:nvSpPr>
+        <p:spPr>
+          <a:xfrm>
+            <a:off x="868680" y="4937760"/>
+            <a:ext cx="457200" cy="457200"/>
+          </a:xfrm>
+          <a:prstGeom prst="ellipse">
+            <a:avLst/>
+          </a:prstGeom>
+          <a:solidFill>
+            <a:srgbClr val="4F46E5"/>
+          </a:solidFill>
+          <a:ln/>
+        </p:spPr>
+      </p:sp>
+      <p:pic>
+        <p:nvPicPr>
+          <p:cNvPr id="19" name="Image 3" descr="preencoded.png"/>
+          <p:cNvPicPr>
+            <a:picLocks noChangeAspect="1"/>
+          </p:cNvPicPr>
+          <p:nvPr/>
+        </p:nvPicPr>
+        <p:blipFill>
+          <a:blip r:embed="rId3"/>
+          <a:stretch>
+            <a:fillRect/>
+          </a:stretch>
+        </p:blipFill>
+        <p:spPr>
+          <a:xfrm>
             <a:off x="987552" y="5056632"/>
             <a:ext cx="219456" cy="219456"/>
           </a:xfrm>
@@ -2933,7 +2631,7 @@
           <a:bodyPr wrap="square" lIns="0" tIns="0" rIns="0" bIns="0" rtlCol="0" anchor="ctr"/>
           <a:lstStyle/>
           <a:p>
-            <a:pPr indent="0" marL="0">
+            <a:pPr marL="0" indent="0">
               <a:buNone/>
             </a:pPr>
             <a:r>
@@ -2972,7 +2670,7 @@
           <a:bodyPr wrap="square" lIns="0" tIns="0" rIns="0" bIns="0" rtlCol="0" anchor="t"/>
           <a:lstStyle/>
           <a:p>
-            <a:pPr indent="0" marL="0">
+            <a:pPr marL="0" indent="0">
               <a:buNone/>
             </a:pPr>
             <a:r>
@@ -3038,7 +2736,7 @@
           <a:bodyPr wrap="square" lIns="0" tIns="0" rIns="0" bIns="0" rtlCol="0" anchor="ctr"/>
           <a:lstStyle/>
           <a:p>
-            <a:pPr indent="0" marL="0">
+            <a:pPr marL="0" indent="0">
               <a:buNone/>
             </a:pPr>
             <a:r>
@@ -3078,14 +2776,14 @@
       </p:sp>
       <p:pic>
         <p:nvPicPr>
-          <p:cNvPr id="25" name="Image 4" descr="preencoded.png">    </p:cNvPr>
+          <p:cNvPr id="25" name="Image 4" descr="preencoded.png"/>
           <p:cNvPicPr>
             <a:picLocks noChangeAspect="1"/>
           </p:cNvPicPr>
           <p:nvPr/>
         </p:nvPicPr>
         <p:blipFill>
-          <a:blip r:embed="rId5"/>
+          <a:blip r:embed="rId4"/>
           <a:stretch>
             <a:fillRect/>
           </a:stretch>
@@ -3121,7 +2819,7 @@
           <a:bodyPr wrap="square" lIns="0" tIns="0" rIns="0" bIns="0" rtlCol="0" anchor="ctr"/>
           <a:lstStyle/>
           <a:p>
-            <a:pPr indent="0" marL="0">
+            <a:pPr marL="0" indent="0">
               <a:buNone/>
             </a:pPr>
             <a:r>
@@ -3160,7 +2858,7 @@
           <a:bodyPr wrap="square" lIns="0" tIns="0" rIns="0" bIns="0" rtlCol="0" anchor="t"/>
           <a:lstStyle/>
           <a:p>
-            <a:pPr indent="0" marL="0">
+            <a:pPr marL="0" indent="0">
               <a:buNone/>
             </a:pPr>
             <a:r>
@@ -3200,14 +2898,14 @@
       </p:sp>
       <p:pic>
         <p:nvPicPr>
-          <p:cNvPr id="29" name="Image 5" descr="preencoded.png">    </p:cNvPr>
+          <p:cNvPr id="29" name="Image 5" descr="preencoded.png"/>
           <p:cNvPicPr>
             <a:picLocks noChangeAspect="1"/>
           </p:cNvPicPr>
           <p:nvPr/>
         </p:nvPicPr>
         <p:blipFill>
-          <a:blip r:embed="rId6"/>
+          <a:blip r:embed="rId4"/>
           <a:stretch>
             <a:fillRect/>
           </a:stretch>
@@ -3243,7 +2941,7 @@
           <a:bodyPr wrap="square" lIns="0" tIns="0" rIns="0" bIns="0" rtlCol="0" anchor="ctr"/>
           <a:lstStyle/>
           <a:p>
-            <a:pPr indent="0" marL="0">
+            <a:pPr marL="0" indent="0">
               <a:buNone/>
             </a:pPr>
             <a:r>
@@ -3282,7 +2980,7 @@
           <a:bodyPr wrap="square" lIns="0" tIns="0" rIns="0" bIns="0" rtlCol="0" anchor="t"/>
           <a:lstStyle/>
           <a:p>
-            <a:pPr indent="0" marL="0">
+            <a:pPr marL="0" indent="0">
               <a:buNone/>
             </a:pPr>
             <a:r>
@@ -3322,14 +3020,14 @@
       </p:sp>
       <p:pic>
         <p:nvPicPr>
-          <p:cNvPr id="33" name="Image 6" descr="preencoded.png">    </p:cNvPr>
+          <p:cNvPr id="33" name="Image 6" descr="preencoded.png"/>
           <p:cNvPicPr>
             <a:picLocks noChangeAspect="1"/>
           </p:cNvPicPr>
           <p:nvPr/>
         </p:nvPicPr>
         <p:blipFill>
-          <a:blip r:embed="rId7"/>
+          <a:blip r:embed="rId4"/>
           <a:stretch>
             <a:fillRect/>
           </a:stretch>
@@ -3365,7 +3063,7 @@
           <a:bodyPr wrap="square" lIns="0" tIns="0" rIns="0" bIns="0" rtlCol="0" anchor="ctr"/>
           <a:lstStyle/>
           <a:p>
-            <a:pPr indent="0" marL="0">
+            <a:pPr marL="0" indent="0">
               <a:buNone/>
             </a:pPr>
             <a:r>
@@ -3404,7 +3102,7 @@
           <a:bodyPr wrap="square" lIns="0" tIns="0" rIns="0" bIns="0" rtlCol="0" anchor="t"/>
           <a:lstStyle/>
           <a:p>
-            <a:pPr indent="0" marL="0">
+            <a:pPr marL="0" indent="0">
               <a:buNone/>
             </a:pPr>
             <a:r>
@@ -3444,14 +3142,14 @@
       </p:sp>
       <p:pic>
         <p:nvPicPr>
-          <p:cNvPr id="37" name="Image 7" descr="preencoded.png">    </p:cNvPr>
+          <p:cNvPr id="37" name="Image 7" descr="preencoded.png"/>
           <p:cNvPicPr>
             <a:picLocks noChangeAspect="1"/>
           </p:cNvPicPr>
           <p:nvPr/>
         </p:nvPicPr>
         <p:blipFill>
-          <a:blip r:embed="rId8"/>
+          <a:blip r:embed="rId4"/>
           <a:stretch>
             <a:fillRect/>
           </a:stretch>
@@ -3487,7 +3185,7 @@
           <a:bodyPr wrap="square" lIns="0" tIns="0" rIns="0" bIns="0" rtlCol="0" anchor="ctr"/>
           <a:lstStyle/>
           <a:p>
-            <a:pPr indent="0" marL="0">
+            <a:pPr marL="0" indent="0">
               <a:buNone/>
             </a:pPr>
             <a:r>
@@ -3526,7 +3224,7 @@
           <a:bodyPr wrap="square" lIns="0" tIns="0" rIns="0" bIns="0" rtlCol="0" anchor="t"/>
           <a:lstStyle/>
           <a:p>
-            <a:pPr indent="0" marL="0">
+            <a:pPr marL="0" indent="0">
               <a:buNone/>
             </a:pPr>
             <a:r>
@@ -3565,7 +3263,7 @@
           <a:bodyPr wrap="square" lIns="0" tIns="0" rIns="0" bIns="0" rtlCol="0" anchor="ctr"/>
           <a:lstStyle/>
           <a:p>
-            <a:pPr indent="0" marL="0">
+            <a:pPr marL="0" indent="0">
               <a:buNone/>
             </a:pPr>
             <a:r>
@@ -3604,7 +3302,7 @@
           <a:bodyPr wrap="square" lIns="0" tIns="0" rIns="0" bIns="0" rtlCol="0" anchor="ctr"/>
           <a:lstStyle/>
           <a:p>
-            <a:pPr algn="r" indent="0" marL="0">
+            <a:pPr marL="0" indent="0" algn="r">
               <a:buNone/>
             </a:pPr>
             <a:r>
@@ -3638,6 +3336,7 @@
         <a:solidFill>
           <a:srgbClr val="FFFFFF"/>
         </a:solidFill>
+        <a:effectLst/>
       </p:bgPr>
     </p:bg>
     <p:spTree>
@@ -3675,11 +3374,11 @@
           <a:bodyPr wrap="square" lIns="0" tIns="0" rIns="0" bIns="0" rtlCol="0" anchor="ctr"/>
           <a:lstStyle/>
           <a:p>
-            <a:pPr indent="0" marL="0">
-              <a:buNone/>
-            </a:pPr>
-            <a:r>
-              <a:rPr lang="en-US" sz="1200" b="1" spc="200" kern="0" dirty="0">
+            <a:pPr marL="0" indent="0">
+              <a:buNone/>
+            </a:pPr>
+            <a:r>
+              <a:rPr lang="en-US" sz="1200" b="1" kern="0" spc="200" dirty="0">
                 <a:solidFill>
                   <a:srgbClr val="4F46E5"/>
                 </a:solidFill>
@@ -3714,7 +3413,7 @@
           <a:bodyPr wrap="square" lIns="0" tIns="0" rIns="0" bIns="0" rtlCol="0" anchor="ctr"/>
           <a:lstStyle/>
           <a:p>
-            <a:pPr indent="0" marL="0">
+            <a:pPr marL="0" indent="0">
               <a:buNone/>
             </a:pPr>
             <a:r>
@@ -3780,7 +3479,7 @@
           <a:bodyPr wrap="square" lIns="0" tIns="0" rIns="0" bIns="0" rtlCol="0" anchor="ctr"/>
           <a:lstStyle/>
           <a:p>
-            <a:pPr indent="0" marL="0">
+            <a:pPr marL="0" indent="0">
               <a:buNone/>
             </a:pPr>
             <a:r>
@@ -3820,251 +3519,7 @@
       </p:sp>
       <p:pic>
         <p:nvPicPr>
-          <p:cNvPr id="7" name="Image 0" descr="preencoded.png">    </p:cNvPr>
-          <p:cNvPicPr>
-            <a:picLocks noChangeAspect="1"/>
-          </p:cNvPicPr>
-          <p:nvPr/>
-        </p:nvPicPr>
-        <p:blipFill>
-          <a:blip r:embed="rId1"/>
-          <a:stretch>
-            <a:fillRect/>
-          </a:stretch>
-        </p:blipFill>
-        <p:spPr>
-          <a:xfrm>
-            <a:off x="987552" y="2313432"/>
-            <a:ext cx="219456" cy="219456"/>
-          </a:xfrm>
-          <a:prstGeom prst="rect">
-            <a:avLst/>
-          </a:prstGeom>
-        </p:spPr>
-      </p:pic>
-      <p:sp>
-        <p:nvSpPr>
-          <p:cNvPr id="8" name="Text 5"/>
-          <p:cNvSpPr/>
-          <p:nvPr/>
-        </p:nvSpPr>
-        <p:spPr>
-          <a:xfrm>
-            <a:off x="1490472" y="2167128"/>
-            <a:ext cx="4133088" cy="274320"/>
-          </a:xfrm>
-          <a:prstGeom prst="rect">
-            <a:avLst/>
-          </a:prstGeom>
-          <a:noFill/>
-          <a:ln/>
-        </p:spPr>
-        <p:txBody>
-          <a:bodyPr wrap="square" lIns="0" tIns="0" rIns="0" bIns="0" rtlCol="0" anchor="ctr"/>
-          <a:lstStyle/>
-          <a:p>
-            <a:pPr indent="0" marL="0">
-              <a:buNone/>
-            </a:pPr>
-            <a:r>
-              <a:rPr lang="en-US" sz="1500" b="1" dirty="0">
-                <a:solidFill>
-                  <a:srgbClr val="171B23"/>
-                </a:solidFill>
-                <a:latin typeface="Calibri" pitchFamily="34" charset="0"/>
-                <a:ea typeface="Calibri" pitchFamily="34" charset="-122"/>
-                <a:cs typeface="Calibri" pitchFamily="34" charset="-120"/>
-              </a:rPr>
-              <a:t>End-to-end system, built solo</a:t>
-            </a:r>
-            <a:endParaRPr lang="en-US" sz="1500" dirty="0"/>
-          </a:p>
-        </p:txBody>
-      </p:sp>
-      <p:sp>
-        <p:nvSpPr>
-          <p:cNvPr id="9" name="Text 6"/>
-          <p:cNvSpPr/>
-          <p:nvPr/>
-        </p:nvSpPr>
-        <p:spPr>
-          <a:xfrm>
-            <a:off x="1490472" y="2432304"/>
-            <a:ext cx="4133088" cy="457200"/>
-          </a:xfrm>
-          <a:prstGeom prst="rect">
-            <a:avLst/>
-          </a:prstGeom>
-          <a:noFill/>
-          <a:ln/>
-        </p:spPr>
-        <p:txBody>
-          <a:bodyPr wrap="square" lIns="0" tIns="0" rIns="0" bIns="0" rtlCol="0" anchor="t"/>
-          <a:lstStyle/>
-          <a:p>
-            <a:pPr indent="0" marL="0">
-              <a:buNone/>
-            </a:pPr>
-            <a:r>
-              <a:rPr lang="en-US" sz="1150" dirty="0">
-                <a:solidFill>
-                  <a:srgbClr val="5B6472"/>
-                </a:solidFill>
-                <a:latin typeface="Calibri" pitchFamily="34" charset="0"/>
-                <a:ea typeface="Calibri" pitchFamily="34" charset="-122"/>
-                <a:cs typeface="Calibri" pitchFamily="34" charset="-120"/>
-              </a:rPr>
-              <a:t>Angular frontend, ASP.NET Core backend, SQL Server — fully working</a:t>
-            </a:r>
-            <a:endParaRPr lang="en-US" sz="1150" dirty="0"/>
-          </a:p>
-        </p:txBody>
-      </p:sp>
-      <p:sp>
-        <p:nvSpPr>
-          <p:cNvPr id="10" name="Shape 7"/>
-          <p:cNvSpPr/>
-          <p:nvPr/>
-        </p:nvSpPr>
-        <p:spPr>
-          <a:xfrm>
-            <a:off x="868680" y="3154680"/>
-            <a:ext cx="457200" cy="457200"/>
-          </a:xfrm>
-          <a:prstGeom prst="ellipse">
-            <a:avLst/>
-          </a:prstGeom>
-          <a:solidFill>
-            <a:srgbClr val="4F46E5"/>
-          </a:solidFill>
-          <a:ln/>
-        </p:spPr>
-      </p:sp>
-      <p:pic>
-        <p:nvPicPr>
-          <p:cNvPr id="11" name="Image 1" descr="preencoded.png">    </p:cNvPr>
-          <p:cNvPicPr>
-            <a:picLocks noChangeAspect="1"/>
-          </p:cNvPicPr>
-          <p:nvPr/>
-        </p:nvPicPr>
-        <p:blipFill>
-          <a:blip r:embed="rId2"/>
-          <a:stretch>
-            <a:fillRect/>
-          </a:stretch>
-        </p:blipFill>
-        <p:spPr>
-          <a:xfrm>
-            <a:off x="987552" y="3273552"/>
-            <a:ext cx="219456" cy="219456"/>
-          </a:xfrm>
-          <a:prstGeom prst="rect">
-            <a:avLst/>
-          </a:prstGeom>
-        </p:spPr>
-      </p:pic>
-      <p:sp>
-        <p:nvSpPr>
-          <p:cNvPr id="12" name="Text 8"/>
-          <p:cNvSpPr/>
-          <p:nvPr/>
-        </p:nvSpPr>
-        <p:spPr>
-          <a:xfrm>
-            <a:off x="1490472" y="3127248"/>
-            <a:ext cx="4133088" cy="274320"/>
-          </a:xfrm>
-          <a:prstGeom prst="rect">
-            <a:avLst/>
-          </a:prstGeom>
-          <a:noFill/>
-          <a:ln/>
-        </p:spPr>
-        <p:txBody>
-          <a:bodyPr wrap="square" lIns="0" tIns="0" rIns="0" bIns="0" rtlCol="0" anchor="ctr"/>
-          <a:lstStyle/>
-          <a:p>
-            <a:pPr indent="0" marL="0">
-              <a:buNone/>
-            </a:pPr>
-            <a:r>
-              <a:rPr lang="en-US" sz="1500" b="1" dirty="0">
-                <a:solidFill>
-                  <a:srgbClr val="171B23"/>
-                </a:solidFill>
-                <a:latin typeface="Calibri" pitchFamily="34" charset="0"/>
-                <a:ea typeface="Calibri" pitchFamily="34" charset="-122"/>
-                <a:cs typeface="Calibri" pitchFamily="34" charset="-120"/>
-              </a:rPr>
-              <a:t>A real workflow, not just CRUD</a:t>
-            </a:r>
-            <a:endParaRPr lang="en-US" sz="1500" dirty="0"/>
-          </a:p>
-        </p:txBody>
-      </p:sp>
-      <p:sp>
-        <p:nvSpPr>
-          <p:cNvPr id="13" name="Text 9"/>
-          <p:cNvSpPr/>
-          <p:nvPr/>
-        </p:nvSpPr>
-        <p:spPr>
-          <a:xfrm>
-            <a:off x="1490472" y="3392424"/>
-            <a:ext cx="4133088" cy="457200"/>
-          </a:xfrm>
-          <a:prstGeom prst="rect">
-            <a:avLst/>
-          </a:prstGeom>
-          <a:noFill/>
-          <a:ln/>
-        </p:spPr>
-        <p:txBody>
-          <a:bodyPr wrap="square" lIns="0" tIns="0" rIns="0" bIns="0" rtlCol="0" anchor="t"/>
-          <a:lstStyle/>
-          <a:p>
-            <a:pPr indent="0" marL="0">
-              <a:buNone/>
-            </a:pPr>
-            <a:r>
-              <a:rPr lang="en-US" sz="1150" dirty="0">
-                <a:solidFill>
-                  <a:srgbClr val="5B6472"/>
-                </a:solidFill>
-                <a:latin typeface="Calibri" pitchFamily="34" charset="0"/>
-                <a:ea typeface="Calibri" pitchFamily="34" charset="-122"/>
-                <a:cs typeface="Calibri" pitchFamily="34" charset="-120"/>
-              </a:rPr>
-              <a:t>Assign, accept, clarify, update, and track — with an audit trail</a:t>
-            </a:r>
-            <a:endParaRPr lang="en-US" sz="1150" dirty="0"/>
-          </a:p>
-        </p:txBody>
-      </p:sp>
-      <p:sp>
-        <p:nvSpPr>
-          <p:cNvPr id="14" name="Shape 10"/>
-          <p:cNvSpPr/>
-          <p:nvPr/>
-        </p:nvSpPr>
-        <p:spPr>
-          <a:xfrm>
-            <a:off x="868680" y="4114800"/>
-            <a:ext cx="457200" cy="457200"/>
-          </a:xfrm>
-          <a:prstGeom prst="ellipse">
-            <a:avLst/>
-          </a:prstGeom>
-          <a:solidFill>
-            <a:srgbClr val="4F46E5"/>
-          </a:solidFill>
-          <a:ln/>
-        </p:spPr>
-      </p:sp>
-      <p:pic>
-        <p:nvPicPr>
-          <p:cNvPr id="15" name="Image 2" descr="preencoded.png">    </p:cNvPr>
+          <p:cNvPr id="7" name="Image 0" descr="preencoded.png"/>
           <p:cNvPicPr>
             <a:picLocks noChangeAspect="1"/>
           </p:cNvPicPr>
@@ -4078,6 +3533,250 @@
         </p:blipFill>
         <p:spPr>
           <a:xfrm>
+            <a:off x="987552" y="2313432"/>
+            <a:ext cx="219456" cy="219456"/>
+          </a:xfrm>
+          <a:prstGeom prst="rect">
+            <a:avLst/>
+          </a:prstGeom>
+        </p:spPr>
+      </p:pic>
+      <p:sp>
+        <p:nvSpPr>
+          <p:cNvPr id="8" name="Text 5"/>
+          <p:cNvSpPr/>
+          <p:nvPr/>
+        </p:nvSpPr>
+        <p:spPr>
+          <a:xfrm>
+            <a:off x="1490472" y="2167128"/>
+            <a:ext cx="4133088" cy="274320"/>
+          </a:xfrm>
+          <a:prstGeom prst="rect">
+            <a:avLst/>
+          </a:prstGeom>
+          <a:noFill/>
+          <a:ln/>
+        </p:spPr>
+        <p:txBody>
+          <a:bodyPr wrap="square" lIns="0" tIns="0" rIns="0" bIns="0" rtlCol="0" anchor="ctr"/>
+          <a:lstStyle/>
+          <a:p>
+            <a:pPr marL="0" indent="0">
+              <a:buNone/>
+            </a:pPr>
+            <a:r>
+              <a:rPr lang="en-US" sz="1500" b="1" dirty="0">
+                <a:solidFill>
+                  <a:srgbClr val="171B23"/>
+                </a:solidFill>
+                <a:latin typeface="Calibri" pitchFamily="34" charset="0"/>
+                <a:ea typeface="Calibri" pitchFamily="34" charset="-122"/>
+                <a:cs typeface="Calibri" pitchFamily="34" charset="-120"/>
+              </a:rPr>
+              <a:t>End-to-end system, built solo</a:t>
+            </a:r>
+            <a:endParaRPr lang="en-US" sz="1500" dirty="0"/>
+          </a:p>
+        </p:txBody>
+      </p:sp>
+      <p:sp>
+        <p:nvSpPr>
+          <p:cNvPr id="9" name="Text 6"/>
+          <p:cNvSpPr/>
+          <p:nvPr/>
+        </p:nvSpPr>
+        <p:spPr>
+          <a:xfrm>
+            <a:off x="1490472" y="2432304"/>
+            <a:ext cx="4133088" cy="457200"/>
+          </a:xfrm>
+          <a:prstGeom prst="rect">
+            <a:avLst/>
+          </a:prstGeom>
+          <a:noFill/>
+          <a:ln/>
+        </p:spPr>
+        <p:txBody>
+          <a:bodyPr wrap="square" lIns="0" tIns="0" rIns="0" bIns="0" rtlCol="0" anchor="t"/>
+          <a:lstStyle/>
+          <a:p>
+            <a:pPr marL="0" indent="0">
+              <a:buNone/>
+            </a:pPr>
+            <a:r>
+              <a:rPr lang="en-US" sz="1150" dirty="0">
+                <a:solidFill>
+                  <a:srgbClr val="5B6472"/>
+                </a:solidFill>
+                <a:latin typeface="Calibri" pitchFamily="34" charset="0"/>
+                <a:ea typeface="Calibri" pitchFamily="34" charset="-122"/>
+                <a:cs typeface="Calibri" pitchFamily="34" charset="-120"/>
+              </a:rPr>
+              <a:t>Angular frontend, ASP.NET Core backend, SQL Server — fully working</a:t>
+            </a:r>
+            <a:endParaRPr lang="en-US" sz="1150" dirty="0"/>
+          </a:p>
+        </p:txBody>
+      </p:sp>
+      <p:sp>
+        <p:nvSpPr>
+          <p:cNvPr id="10" name="Shape 7"/>
+          <p:cNvSpPr/>
+          <p:nvPr/>
+        </p:nvSpPr>
+        <p:spPr>
+          <a:xfrm>
+            <a:off x="868680" y="3154680"/>
+            <a:ext cx="457200" cy="457200"/>
+          </a:xfrm>
+          <a:prstGeom prst="ellipse">
+            <a:avLst/>
+          </a:prstGeom>
+          <a:solidFill>
+            <a:srgbClr val="4F46E5"/>
+          </a:solidFill>
+          <a:ln/>
+        </p:spPr>
+      </p:sp>
+      <p:pic>
+        <p:nvPicPr>
+          <p:cNvPr id="11" name="Image 1" descr="preencoded.png"/>
+          <p:cNvPicPr>
+            <a:picLocks noChangeAspect="1"/>
+          </p:cNvPicPr>
+          <p:nvPr/>
+        </p:nvPicPr>
+        <p:blipFill>
+          <a:blip r:embed="rId3"/>
+          <a:stretch>
+            <a:fillRect/>
+          </a:stretch>
+        </p:blipFill>
+        <p:spPr>
+          <a:xfrm>
+            <a:off x="987552" y="3273552"/>
+            <a:ext cx="219456" cy="219456"/>
+          </a:xfrm>
+          <a:prstGeom prst="rect">
+            <a:avLst/>
+          </a:prstGeom>
+        </p:spPr>
+      </p:pic>
+      <p:sp>
+        <p:nvSpPr>
+          <p:cNvPr id="12" name="Text 8"/>
+          <p:cNvSpPr/>
+          <p:nvPr/>
+        </p:nvSpPr>
+        <p:spPr>
+          <a:xfrm>
+            <a:off x="1490472" y="3127248"/>
+            <a:ext cx="4133088" cy="274320"/>
+          </a:xfrm>
+          <a:prstGeom prst="rect">
+            <a:avLst/>
+          </a:prstGeom>
+          <a:noFill/>
+          <a:ln/>
+        </p:spPr>
+        <p:txBody>
+          <a:bodyPr wrap="square" lIns="0" tIns="0" rIns="0" bIns="0" rtlCol="0" anchor="ctr"/>
+          <a:lstStyle/>
+          <a:p>
+            <a:pPr marL="0" indent="0">
+              <a:buNone/>
+            </a:pPr>
+            <a:r>
+              <a:rPr lang="en-US" sz="1500" b="1" dirty="0">
+                <a:solidFill>
+                  <a:srgbClr val="171B23"/>
+                </a:solidFill>
+                <a:latin typeface="Calibri" pitchFamily="34" charset="0"/>
+                <a:ea typeface="Calibri" pitchFamily="34" charset="-122"/>
+                <a:cs typeface="Calibri" pitchFamily="34" charset="-120"/>
+              </a:rPr>
+              <a:t>A real workflow, not just CRUD</a:t>
+            </a:r>
+            <a:endParaRPr lang="en-US" sz="1500" dirty="0"/>
+          </a:p>
+        </p:txBody>
+      </p:sp>
+      <p:sp>
+        <p:nvSpPr>
+          <p:cNvPr id="13" name="Text 9"/>
+          <p:cNvSpPr/>
+          <p:nvPr/>
+        </p:nvSpPr>
+        <p:spPr>
+          <a:xfrm>
+            <a:off x="1490472" y="3392424"/>
+            <a:ext cx="4133088" cy="457200"/>
+          </a:xfrm>
+          <a:prstGeom prst="rect">
+            <a:avLst/>
+          </a:prstGeom>
+          <a:noFill/>
+          <a:ln/>
+        </p:spPr>
+        <p:txBody>
+          <a:bodyPr wrap="square" lIns="0" tIns="0" rIns="0" bIns="0" rtlCol="0" anchor="t"/>
+          <a:lstStyle/>
+          <a:p>
+            <a:pPr marL="0" indent="0">
+              <a:buNone/>
+            </a:pPr>
+            <a:r>
+              <a:rPr lang="en-US" sz="1150" dirty="0">
+                <a:solidFill>
+                  <a:srgbClr val="5B6472"/>
+                </a:solidFill>
+                <a:latin typeface="Calibri" pitchFamily="34" charset="0"/>
+                <a:ea typeface="Calibri" pitchFamily="34" charset="-122"/>
+                <a:cs typeface="Calibri" pitchFamily="34" charset="-120"/>
+              </a:rPr>
+              <a:t>Assign, accept, clarify, update, and track — with an audit trail</a:t>
+            </a:r>
+            <a:endParaRPr lang="en-US" sz="1150" dirty="0"/>
+          </a:p>
+        </p:txBody>
+      </p:sp>
+      <p:sp>
+        <p:nvSpPr>
+          <p:cNvPr id="14" name="Shape 10"/>
+          <p:cNvSpPr/>
+          <p:nvPr/>
+        </p:nvSpPr>
+        <p:spPr>
+          <a:xfrm>
+            <a:off x="868680" y="4114800"/>
+            <a:ext cx="457200" cy="457200"/>
+          </a:xfrm>
+          <a:prstGeom prst="ellipse">
+            <a:avLst/>
+          </a:prstGeom>
+          <a:solidFill>
+            <a:srgbClr val="4F46E5"/>
+          </a:solidFill>
+          <a:ln/>
+        </p:spPr>
+      </p:sp>
+      <p:pic>
+        <p:nvPicPr>
+          <p:cNvPr id="15" name="Image 2" descr="preencoded.png"/>
+          <p:cNvPicPr>
+            <a:picLocks noChangeAspect="1"/>
+          </p:cNvPicPr>
+          <p:nvPr/>
+        </p:nvPicPr>
+        <p:blipFill>
+          <a:blip r:embed="rId3"/>
+          <a:stretch>
+            <a:fillRect/>
+          </a:stretch>
+        </p:blipFill>
+        <p:spPr>
+          <a:xfrm>
             <a:off x="987552" y="4233672"/>
             <a:ext cx="219456" cy="219456"/>
           </a:xfrm>
@@ -4107,7 +3806,7 @@
           <a:bodyPr wrap="square" lIns="0" tIns="0" rIns="0" bIns="0" rtlCol="0" anchor="ctr"/>
           <a:lstStyle/>
           <a:p>
-            <a:pPr indent="0" marL="0">
+            <a:pPr marL="0" indent="0">
               <a:buNone/>
             </a:pPr>
             <a:r>
@@ -4146,7 +3845,7 @@
           <a:bodyPr wrap="square" lIns="0" tIns="0" rIns="0" bIns="0" rtlCol="0" anchor="t"/>
           <a:lstStyle/>
           <a:p>
-            <a:pPr indent="0" marL="0">
+            <a:pPr marL="0" indent="0">
               <a:buNone/>
             </a:pPr>
             <a:r>
@@ -4207,7 +3906,7 @@
           <a:bodyPr wrap="square" lIns="0" tIns="0" rIns="0" bIns="0" rtlCol="0" anchor="ctr"/>
           <a:lstStyle/>
           <a:p>
-            <a:pPr indent="0" marL="0">
+            <a:pPr marL="0" indent="0">
               <a:buNone/>
             </a:pPr>
             <a:r>
@@ -4247,7 +3946,7 @@
       </p:sp>
       <p:pic>
         <p:nvPicPr>
-          <p:cNvPr id="21" name="Image 3" descr="preencoded.png">    </p:cNvPr>
+          <p:cNvPr id="21" name="Image 3" descr="preencoded.png"/>
           <p:cNvPicPr>
             <a:picLocks noChangeAspect="1"/>
           </p:cNvPicPr>
@@ -4290,7 +3989,7 @@
           <a:bodyPr wrap="square" lIns="0" tIns="0" rIns="0" bIns="0" rtlCol="0" anchor="ctr"/>
           <a:lstStyle/>
           <a:p>
-            <a:pPr indent="0" marL="0">
+            <a:pPr marL="0" indent="0">
               <a:buNone/>
             </a:pPr>
             <a:r>
@@ -4329,7 +4028,7 @@
           <a:bodyPr wrap="square" lIns="0" tIns="0" rIns="0" bIns="0" rtlCol="0" anchor="t"/>
           <a:lstStyle/>
           <a:p>
-            <a:pPr indent="0" marL="0">
+            <a:pPr marL="0" indent="0">
               <a:buNone/>
             </a:pPr>
             <a:r>
@@ -4369,14 +4068,14 @@
       </p:sp>
       <p:pic>
         <p:nvPicPr>
-          <p:cNvPr id="25" name="Image 4" descr="preencoded.png">    </p:cNvPr>
+          <p:cNvPr id="25" name="Image 4" descr="preencoded.png"/>
           <p:cNvPicPr>
             <a:picLocks noChangeAspect="1"/>
           </p:cNvPicPr>
           <p:nvPr/>
         </p:nvPicPr>
         <p:blipFill>
-          <a:blip r:embed="rId5"/>
+          <a:blip r:embed="rId4"/>
           <a:stretch>
             <a:fillRect/>
           </a:stretch>
@@ -4412,7 +4111,7 @@
           <a:bodyPr wrap="square" lIns="0" tIns="0" rIns="0" bIns="0" rtlCol="0" anchor="ctr"/>
           <a:lstStyle/>
           <a:p>
-            <a:pPr indent="0" marL="0">
+            <a:pPr marL="0" indent="0">
               <a:buNone/>
             </a:pPr>
             <a:r>
@@ -4451,7 +4150,7 @@
           <a:bodyPr wrap="square" lIns="0" tIns="0" rIns="0" bIns="0" rtlCol="0" anchor="t"/>
           <a:lstStyle/>
           <a:p>
-            <a:pPr indent="0" marL="0">
+            <a:pPr marL="0" indent="0">
               <a:buNone/>
             </a:pPr>
             <a:r>
@@ -4491,14 +4190,14 @@
       </p:sp>
       <p:pic>
         <p:nvPicPr>
-          <p:cNvPr id="29" name="Image 5" descr="preencoded.png">    </p:cNvPr>
+          <p:cNvPr id="29" name="Image 5" descr="preencoded.png"/>
           <p:cNvPicPr>
             <a:picLocks noChangeAspect="1"/>
           </p:cNvPicPr>
           <p:nvPr/>
         </p:nvPicPr>
         <p:blipFill>
-          <a:blip r:embed="rId6"/>
+          <a:blip r:embed="rId4"/>
           <a:stretch>
             <a:fillRect/>
           </a:stretch>
@@ -4534,7 +4233,7 @@
           <a:bodyPr wrap="square" lIns="0" tIns="0" rIns="0" bIns="0" rtlCol="0" anchor="ctr"/>
           <a:lstStyle/>
           <a:p>
-            <a:pPr indent="0" marL="0">
+            <a:pPr marL="0" indent="0">
               <a:buNone/>
             </a:pPr>
             <a:r>
@@ -4573,7 +4272,7 @@
           <a:bodyPr wrap="square" lIns="0" tIns="0" rIns="0" bIns="0" rtlCol="0" anchor="t"/>
           <a:lstStyle/>
           <a:p>
-            <a:pPr indent="0" marL="0">
+            <a:pPr marL="0" indent="0">
               <a:buNone/>
             </a:pPr>
             <a:r>
@@ -4613,14 +4312,14 @@
       </p:sp>
       <p:pic>
         <p:nvPicPr>
-          <p:cNvPr id="33" name="Image 6" descr="preencoded.png">    </p:cNvPr>
+          <p:cNvPr id="33" name="Image 6" descr="preencoded.png"/>
           <p:cNvPicPr>
             <a:picLocks noChangeAspect="1"/>
           </p:cNvPicPr>
           <p:nvPr/>
         </p:nvPicPr>
         <p:blipFill>
-          <a:blip r:embed="rId7"/>
+          <a:blip r:embed="rId4"/>
           <a:stretch>
             <a:fillRect/>
           </a:stretch>
@@ -4656,7 +4355,7 @@
           <a:bodyPr wrap="square" lIns="0" tIns="0" rIns="0" bIns="0" rtlCol="0" anchor="ctr"/>
           <a:lstStyle/>
           <a:p>
-            <a:pPr indent="0" marL="0">
+            <a:pPr marL="0" indent="0">
               <a:buNone/>
             </a:pPr>
             <a:r>
@@ -4695,7 +4394,7 @@
           <a:bodyPr wrap="square" lIns="0" tIns="0" rIns="0" bIns="0" rtlCol="0" anchor="t"/>
           <a:lstStyle/>
           <a:p>
-            <a:pPr indent="0" marL="0">
+            <a:pPr marL="0" indent="0">
               <a:buNone/>
             </a:pPr>
             <a:r>
@@ -4734,7 +4433,7 @@
           <a:bodyPr wrap="square" lIns="0" tIns="0" rIns="0" bIns="0" rtlCol="0" anchor="ctr"/>
           <a:lstStyle/>
           <a:p>
-            <a:pPr indent="0" marL="0">
+            <a:pPr marL="0" indent="0">
               <a:buNone/>
             </a:pPr>
             <a:r>
@@ -4773,7 +4472,7 @@
           <a:bodyPr wrap="square" lIns="0" tIns="0" rIns="0" bIns="0" rtlCol="0" anchor="ctr"/>
           <a:lstStyle/>
           <a:p>
-            <a:pPr algn="r" indent="0" marL="0">
+            <a:pPr marL="0" indent="0" algn="r">
               <a:buNone/>
             </a:pPr>
             <a:r>
@@ -4807,6 +4506,7 @@
         <a:solidFill>
           <a:srgbClr val="1E1B4B"/>
         </a:solidFill>
+        <a:effectLst/>
       </p:bgPr>
     </p:bg>
     <p:spTree>
@@ -4845,14 +4545,14 @@
       </p:sp>
       <p:pic>
         <p:nvPicPr>
-          <p:cNvPr id="3" name="Image 0" descr="preencoded.png">    </p:cNvPr>
+          <p:cNvPr id="3" name="Image 0" descr="preencoded.png"/>
           <p:cNvPicPr>
             <a:picLocks noChangeAspect="1"/>
           </p:cNvPicPr>
           <p:nvPr/>
         </p:nvPicPr>
         <p:blipFill>
-          <a:blip r:embed="rId1"/>
+          <a:blip r:embed="rId3"/>
           <a:stretch>
             <a:fillRect/>
           </a:stretch>
@@ -4888,7 +4588,7 @@
           <a:bodyPr wrap="square" lIns="0" tIns="0" rIns="0" bIns="0" rtlCol="0" anchor="ctr"/>
           <a:lstStyle/>
           <a:p>
-            <a:pPr algn="ctr" indent="0" marL="0">
+            <a:pPr marL="0" indent="0" algn="ctr">
               <a:buNone/>
             </a:pPr>
             <a:r>
@@ -4927,7 +4627,7 @@
           <a:bodyPr wrap="square" lIns="0" tIns="0" rIns="0" bIns="0" rtlCol="0" anchor="ctr"/>
           <a:lstStyle/>
           <a:p>
-            <a:pPr algn="ctr" indent="0" marL="0">
+            <a:pPr marL="0" indent="0" algn="ctr">
               <a:buNone/>
             </a:pPr>
             <a:r>
@@ -4966,7 +4666,7 @@
           <a:bodyPr wrap="square" lIns="0" tIns="0" rIns="0" bIns="0" rtlCol="0" anchor="ctr"/>
           <a:lstStyle/>
           <a:p>
-            <a:pPr algn="ctr" indent="0" marL="0">
+            <a:pPr marL="0" indent="0" algn="ctr">
               <a:buNone/>
             </a:pPr>
             <a:r>
@@ -4981,6 +4681,245 @@
               <a:t>NexusFlow  ·  Harsh Mishra  ·  04613702025</a:t>
             </a:r>
             <a:endParaRPr lang="en-US" sz="1100" dirty="0"/>
+          </a:p>
+        </p:txBody>
+      </p:sp>
+      <p:pic>
+        <p:nvPicPr>
+          <p:cNvPr id="1026" name="Picture 2" descr="Github Logo - Free social media icons">
+            <a:extLst>
+              <a:ext uri="{FF2B5EF4-FFF2-40B4-BE49-F238E27FC236}">
+                <a16:creationId xmlns:a16="http://schemas.microsoft.com/office/drawing/2014/main" id="{CC5CE463-A08D-86D1-F4FD-DDFCF9B01FD1}"/>
+              </a:ext>
+            </a:extLst>
+          </p:cNvPr>
+          <p:cNvPicPr>
+            <a:picLocks noChangeAspect="1" noChangeArrowheads="1"/>
+          </p:cNvPicPr>
+          <p:nvPr/>
+        </p:nvPicPr>
+        <p:blipFill>
+          <a:blip r:embed="rId4">
+            <a:extLst>
+              <a:ext uri="{28A0092B-C50C-407E-A947-70E740481C1C}">
+                <a14:useLocalDpi xmlns:a14="http://schemas.microsoft.com/office/drawing/2010/main" val="0"/>
+              </a:ext>
+            </a:extLst>
+          </a:blip>
+          <a:srcRect/>
+          <a:stretch>
+            <a:fillRect/>
+          </a:stretch>
+        </p:blipFill>
+        <p:spPr bwMode="auto">
+          <a:xfrm>
+            <a:off x="101600" y="4663440"/>
+            <a:ext cx="274319" cy="274319"/>
+          </a:xfrm>
+          <a:prstGeom prst="rect">
+            <a:avLst/>
+          </a:prstGeom>
+          <a:noFill/>
+          <a:extLst>
+            <a:ext uri="{909E8E84-426E-40DD-AFC4-6F175D3DCCD1}">
+              <a14:hiddenFill xmlns:a14="http://schemas.microsoft.com/office/drawing/2010/main">
+                <a:solidFill>
+                  <a:srgbClr val="FFFFFF"/>
+                </a:solidFill>
+              </a14:hiddenFill>
+            </a:ext>
+          </a:extLst>
+        </p:spPr>
+      </p:pic>
+      <p:pic>
+        <p:nvPicPr>
+          <p:cNvPr id="1028" name="Picture 4" descr="Linkedin logo png, Linkedin icon transparent png 18930480 PNG">
+            <a:extLst>
+              <a:ext uri="{FF2B5EF4-FFF2-40B4-BE49-F238E27FC236}">
+                <a16:creationId xmlns:a16="http://schemas.microsoft.com/office/drawing/2014/main" id="{AE863DAB-7D93-D72D-F22C-670EFC9B2903}"/>
+              </a:ext>
+            </a:extLst>
+          </p:cNvPr>
+          <p:cNvPicPr>
+            <a:picLocks noChangeAspect="1" noChangeArrowheads="1"/>
+          </p:cNvPicPr>
+          <p:nvPr/>
+        </p:nvPicPr>
+        <p:blipFill>
+          <a:blip r:embed="rId5">
+            <a:extLst>
+              <a:ext uri="{28A0092B-C50C-407E-A947-70E740481C1C}">
+                <a14:useLocalDpi xmlns:a14="http://schemas.microsoft.com/office/drawing/2010/main" val="0"/>
+              </a:ext>
+            </a:extLst>
+          </a:blip>
+          <a:srcRect/>
+          <a:stretch>
+            <a:fillRect/>
+          </a:stretch>
+        </p:blipFill>
+        <p:spPr bwMode="auto">
+          <a:xfrm>
+            <a:off x="-8467" y="4937761"/>
+            <a:ext cx="457200" cy="457200"/>
+          </a:xfrm>
+          <a:prstGeom prst="rect">
+            <a:avLst/>
+          </a:prstGeom>
+          <a:noFill/>
+          <a:extLst>
+            <a:ext uri="{909E8E84-426E-40DD-AFC4-6F175D3DCCD1}">
+              <a14:hiddenFill xmlns:a14="http://schemas.microsoft.com/office/drawing/2010/main">
+                <a:solidFill>
+                  <a:srgbClr val="FFFFFF"/>
+                </a:solidFill>
+              </a14:hiddenFill>
+            </a:ext>
+          </a:extLst>
+        </p:spPr>
+      </p:pic>
+      <p:pic>
+        <p:nvPicPr>
+          <p:cNvPr id="1044" name="Picture 20" descr="email and mail icon black 20009614 PNG">
+            <a:extLst>
+              <a:ext uri="{FF2B5EF4-FFF2-40B4-BE49-F238E27FC236}">
+                <a16:creationId xmlns:a16="http://schemas.microsoft.com/office/drawing/2014/main" id="{A6EEEFDD-14E8-E0E9-B4E8-E683D4BCCCAF}"/>
+              </a:ext>
+            </a:extLst>
+          </p:cNvPr>
+          <p:cNvPicPr>
+            <a:picLocks noChangeAspect="1" noChangeArrowheads="1"/>
+          </p:cNvPicPr>
+          <p:nvPr/>
+        </p:nvPicPr>
+        <p:blipFill>
+          <a:blip r:embed="rId6">
+            <a:extLst>
+              <a:ext uri="{28A0092B-C50C-407E-A947-70E740481C1C}">
+                <a14:useLocalDpi xmlns:a14="http://schemas.microsoft.com/office/drawing/2010/main" val="0"/>
+              </a:ext>
+            </a:extLst>
+          </a:blip>
+          <a:srcRect/>
+          <a:stretch>
+            <a:fillRect/>
+          </a:stretch>
+        </p:blipFill>
+        <p:spPr bwMode="auto">
+          <a:xfrm>
+            <a:off x="78739" y="5417818"/>
+            <a:ext cx="320040" cy="320040"/>
+          </a:xfrm>
+          <a:prstGeom prst="rect">
+            <a:avLst/>
+          </a:prstGeom>
+          <a:solidFill>
+            <a:schemeClr val="tx1"/>
+          </a:solidFill>
+        </p:spPr>
+      </p:pic>
+      <p:sp>
+        <p:nvSpPr>
+          <p:cNvPr id="7" name="TextBox 6">
+            <a:extLst>
+              <a:ext uri="{FF2B5EF4-FFF2-40B4-BE49-F238E27FC236}">
+                <a16:creationId xmlns:a16="http://schemas.microsoft.com/office/drawing/2014/main" id="{6EAD68C0-C463-FF12-4614-C6E252E38F45}"/>
+              </a:ext>
+            </a:extLst>
+          </p:cNvPr>
+          <p:cNvSpPr txBox="1"/>
+          <p:nvPr/>
+        </p:nvSpPr>
+        <p:spPr>
+          <a:xfrm>
+            <a:off x="375919" y="4663440"/>
+            <a:ext cx="2002792" cy="276999"/>
+          </a:xfrm>
+          <a:prstGeom prst="rect">
+            <a:avLst/>
+          </a:prstGeom>
+          <a:noFill/>
+        </p:spPr>
+        <p:txBody>
+          <a:bodyPr wrap="none" rtlCol="0">
+            <a:spAutoFit/>
+          </a:bodyPr>
+          <a:lstStyle/>
+          <a:p>
+            <a:r>
+              <a:rPr lang="en-IN" sz="1200" dirty="0"/>
+              <a:t>https://github.com/harsh-nix</a:t>
+            </a:r>
+          </a:p>
+        </p:txBody>
+      </p:sp>
+      <p:sp>
+        <p:nvSpPr>
+          <p:cNvPr id="8" name="TextBox 7">
+            <a:extLst>
+              <a:ext uri="{FF2B5EF4-FFF2-40B4-BE49-F238E27FC236}">
+                <a16:creationId xmlns:a16="http://schemas.microsoft.com/office/drawing/2014/main" id="{8E03C98A-EED1-9DD0-5123-EA06161AF2E1}"/>
+              </a:ext>
+            </a:extLst>
+          </p:cNvPr>
+          <p:cNvSpPr txBox="1"/>
+          <p:nvPr/>
+        </p:nvSpPr>
+        <p:spPr>
+          <a:xfrm>
+            <a:off x="375919" y="5029130"/>
+            <a:ext cx="2151615" cy="276999"/>
+          </a:xfrm>
+          <a:prstGeom prst="rect">
+            <a:avLst/>
+          </a:prstGeom>
+          <a:noFill/>
+        </p:spPr>
+        <p:txBody>
+          <a:bodyPr wrap="none" rtlCol="0">
+            <a:spAutoFit/>
+          </a:bodyPr>
+          <a:lstStyle/>
+          <a:p>
+            <a:r>
+              <a:rPr lang="en-IN" sz="1200" dirty="0"/>
+              <a:t>www.linkedin.com/in/harsh-nix</a:t>
+            </a:r>
+          </a:p>
+        </p:txBody>
+      </p:sp>
+      <p:sp>
+        <p:nvSpPr>
+          <p:cNvPr id="12" name="TextBox 11">
+            <a:extLst>
+              <a:ext uri="{FF2B5EF4-FFF2-40B4-BE49-F238E27FC236}">
+                <a16:creationId xmlns:a16="http://schemas.microsoft.com/office/drawing/2014/main" id="{EEEC2350-1B13-F26B-6EE1-4D3E19CA7145}"/>
+              </a:ext>
+            </a:extLst>
+          </p:cNvPr>
+          <p:cNvSpPr txBox="1"/>
+          <p:nvPr/>
+        </p:nvSpPr>
+        <p:spPr>
+          <a:xfrm>
+            <a:off x="351905" y="5389671"/>
+            <a:ext cx="1940211" cy="276999"/>
+          </a:xfrm>
+          <a:prstGeom prst="rect">
+            <a:avLst/>
+          </a:prstGeom>
+          <a:noFill/>
+        </p:spPr>
+        <p:txBody>
+          <a:bodyPr wrap="none" rtlCol="0">
+            <a:spAutoFit/>
+          </a:bodyPr>
+          <a:lstStyle/>
+          <a:p>
+            <a:r>
+              <a:rPr lang="en-IN" sz="1200" dirty="0"/>
+              <a:t>harshmishra85@yahoo.com</a:t>
+            </a:r>
           </a:p>
         </p:txBody>
       </p:sp>
@@ -5000,6 +4939,7 @@
         <a:solidFill>
           <a:srgbClr val="FFFFFF"/>
         </a:solidFill>
+        <a:effectLst/>
       </p:bgPr>
     </p:bg>
     <p:spTree>
@@ -5037,11 +4977,11 @@
           <a:bodyPr wrap="square" lIns="0" tIns="0" rIns="0" bIns="0" rtlCol="0" anchor="ctr"/>
           <a:lstStyle/>
           <a:p>
-            <a:pPr indent="0" marL="0">
-              <a:buNone/>
-            </a:pPr>
-            <a:r>
-              <a:rPr lang="en-US" sz="1200" b="1" spc="200" kern="0" dirty="0">
+            <a:pPr marL="0" indent="0">
+              <a:buNone/>
+            </a:pPr>
+            <a:r>
+              <a:rPr lang="en-US" sz="1200" b="1" kern="0" spc="200" dirty="0">
                 <a:solidFill>
                   <a:srgbClr val="4F46E5"/>
                 </a:solidFill>
@@ -5076,7 +5016,7 @@
           <a:bodyPr wrap="square" lIns="0" tIns="0" rIns="0" bIns="0" rtlCol="0" anchor="ctr"/>
           <a:lstStyle/>
           <a:p>
-            <a:pPr indent="0" marL="0">
+            <a:pPr marL="0" indent="0">
               <a:buNone/>
             </a:pPr>
             <a:r>
@@ -5137,7 +5077,7 @@
           <a:bodyPr wrap="square" lIns="0" tIns="0" rIns="0" bIns="0" rtlCol="0" anchor="ctr"/>
           <a:lstStyle/>
           <a:p>
-            <a:pPr indent="0" marL="0">
+            <a:pPr marL="0" indent="0">
               <a:buNone/>
             </a:pPr>
             <a:r>
@@ -5177,251 +5117,7 @@
       </p:sp>
       <p:pic>
         <p:nvPicPr>
-          <p:cNvPr id="7" name="Image 0" descr="preencoded.png">    </p:cNvPr>
-          <p:cNvPicPr>
-            <a:picLocks noChangeAspect="1"/>
-          </p:cNvPicPr>
-          <p:nvPr/>
-        </p:nvPicPr>
-        <p:blipFill>
-          <a:blip r:embed="rId1"/>
-          <a:stretch>
-            <a:fillRect/>
-          </a:stretch>
-        </p:blipFill>
-        <p:spPr>
-          <a:xfrm>
-            <a:off x="987552" y="2267712"/>
-            <a:ext cx="219456" cy="219456"/>
-          </a:xfrm>
-          <a:prstGeom prst="rect">
-            <a:avLst/>
-          </a:prstGeom>
-        </p:spPr>
-      </p:pic>
-      <p:sp>
-        <p:nvSpPr>
-          <p:cNvPr id="8" name="Text 5"/>
-          <p:cNvSpPr/>
-          <p:nvPr/>
-        </p:nvSpPr>
-        <p:spPr>
-          <a:xfrm>
-            <a:off x="1490472" y="2121408"/>
-            <a:ext cx="4133088" cy="274320"/>
-          </a:xfrm>
-          <a:prstGeom prst="rect">
-            <a:avLst/>
-          </a:prstGeom>
-          <a:noFill/>
-          <a:ln/>
-        </p:spPr>
-        <p:txBody>
-          <a:bodyPr wrap="square" lIns="0" tIns="0" rIns="0" bIns="0" rtlCol="0" anchor="ctr"/>
-          <a:lstStyle/>
-          <a:p>
-            <a:pPr indent="0" marL="0">
-              <a:buNone/>
-            </a:pPr>
-            <a:r>
-              <a:rPr lang="en-US" sz="1500" b="1" dirty="0">
-                <a:solidFill>
-                  <a:srgbClr val="171B23"/>
-                </a:solidFill>
-                <a:latin typeface="Calibri" pitchFamily="34" charset="0"/>
-                <a:ea typeface="Calibri" pitchFamily="34" charset="-122"/>
-                <a:cs typeface="Calibri" pitchFamily="34" charset="-120"/>
-              </a:rPr>
-              <a:t>Tools scattered across chat, sheets, and docs</a:t>
-            </a:r>
-            <a:endParaRPr lang="en-US" sz="1500" dirty="0"/>
-          </a:p>
-        </p:txBody>
-      </p:sp>
-      <p:sp>
-        <p:nvSpPr>
-          <p:cNvPr id="9" name="Text 6"/>
-          <p:cNvSpPr/>
-          <p:nvPr/>
-        </p:nvSpPr>
-        <p:spPr>
-          <a:xfrm>
-            <a:off x="1490472" y="2386584"/>
-            <a:ext cx="4133088" cy="457200"/>
-          </a:xfrm>
-          <a:prstGeom prst="rect">
-            <a:avLst/>
-          </a:prstGeom>
-          <a:noFill/>
-          <a:ln/>
-        </p:spPr>
-        <p:txBody>
-          <a:bodyPr wrap="square" lIns="0" tIns="0" rIns="0" bIns="0" rtlCol="0" anchor="t"/>
-          <a:lstStyle/>
-          <a:p>
-            <a:pPr indent="0" marL="0">
-              <a:buNone/>
-            </a:pPr>
-            <a:r>
-              <a:rPr lang="en-US" sz="1150" dirty="0">
-                <a:solidFill>
-                  <a:srgbClr val="5B6472"/>
-                </a:solidFill>
-                <a:latin typeface="Calibri" pitchFamily="34" charset="0"/>
-                <a:ea typeface="Calibri" pitchFamily="34" charset="-122"/>
-                <a:cs typeface="Calibri" pitchFamily="34" charset="-120"/>
-              </a:rPr>
-              <a:t>No single source of truth for project status</a:t>
-            </a:r>
-            <a:endParaRPr lang="en-US" sz="1150" dirty="0"/>
-          </a:p>
-        </p:txBody>
-      </p:sp>
-      <p:sp>
-        <p:nvSpPr>
-          <p:cNvPr id="10" name="Shape 7"/>
-          <p:cNvSpPr/>
-          <p:nvPr/>
-        </p:nvSpPr>
-        <p:spPr>
-          <a:xfrm>
-            <a:off x="868680" y="3017520"/>
-            <a:ext cx="457200" cy="457200"/>
-          </a:xfrm>
-          <a:prstGeom prst="ellipse">
-            <a:avLst/>
-          </a:prstGeom>
-          <a:solidFill>
-            <a:srgbClr val="DC2626"/>
-          </a:solidFill>
-          <a:ln/>
-        </p:spPr>
-      </p:sp>
-      <p:pic>
-        <p:nvPicPr>
-          <p:cNvPr id="11" name="Image 1" descr="preencoded.png">    </p:cNvPr>
-          <p:cNvPicPr>
-            <a:picLocks noChangeAspect="1"/>
-          </p:cNvPicPr>
-          <p:nvPr/>
-        </p:nvPicPr>
-        <p:blipFill>
-          <a:blip r:embed="rId2"/>
-          <a:stretch>
-            <a:fillRect/>
-          </a:stretch>
-        </p:blipFill>
-        <p:spPr>
-          <a:xfrm>
-            <a:off x="987552" y="3136392"/>
-            <a:ext cx="219456" cy="219456"/>
-          </a:xfrm>
-          <a:prstGeom prst="rect">
-            <a:avLst/>
-          </a:prstGeom>
-        </p:spPr>
-      </p:pic>
-      <p:sp>
-        <p:nvSpPr>
-          <p:cNvPr id="12" name="Text 8"/>
-          <p:cNvSpPr/>
-          <p:nvPr/>
-        </p:nvSpPr>
-        <p:spPr>
-          <a:xfrm>
-            <a:off x="1490472" y="2990088"/>
-            <a:ext cx="4133088" cy="274320"/>
-          </a:xfrm>
-          <a:prstGeom prst="rect">
-            <a:avLst/>
-          </a:prstGeom>
-          <a:noFill/>
-          <a:ln/>
-        </p:spPr>
-        <p:txBody>
-          <a:bodyPr wrap="square" lIns="0" tIns="0" rIns="0" bIns="0" rtlCol="0" anchor="ctr"/>
-          <a:lstStyle/>
-          <a:p>
-            <a:pPr indent="0" marL="0">
-              <a:buNone/>
-            </a:pPr>
-            <a:r>
-              <a:rPr lang="en-US" sz="1500" b="1" dirty="0">
-                <a:solidFill>
-                  <a:srgbClr val="171B23"/>
-                </a:solidFill>
-                <a:latin typeface="Calibri" pitchFamily="34" charset="0"/>
-                <a:ea typeface="Calibri" pitchFamily="34" charset="-122"/>
-                <a:cs typeface="Calibri" pitchFamily="34" charset="-120"/>
-              </a:rPr>
-              <a:t>Tasks assigned with no follow-through</a:t>
-            </a:r>
-            <a:endParaRPr lang="en-US" sz="1500" dirty="0"/>
-          </a:p>
-        </p:txBody>
-      </p:sp>
-      <p:sp>
-        <p:nvSpPr>
-          <p:cNvPr id="13" name="Text 9"/>
-          <p:cNvSpPr/>
-          <p:nvPr/>
-        </p:nvSpPr>
-        <p:spPr>
-          <a:xfrm>
-            <a:off x="1490472" y="3255264"/>
-            <a:ext cx="4133088" cy="457200"/>
-          </a:xfrm>
-          <a:prstGeom prst="rect">
-            <a:avLst/>
-          </a:prstGeom>
-          <a:noFill/>
-          <a:ln/>
-        </p:spPr>
-        <p:txBody>
-          <a:bodyPr wrap="square" lIns="0" tIns="0" rIns="0" bIns="0" rtlCol="0" anchor="t"/>
-          <a:lstStyle/>
-          <a:p>
-            <a:pPr indent="0" marL="0">
-              <a:buNone/>
-            </a:pPr>
-            <a:r>
-              <a:rPr lang="en-US" sz="1150" dirty="0">
-                <a:solidFill>
-                  <a:srgbClr val="5B6472"/>
-                </a:solidFill>
-                <a:latin typeface="Calibri" pitchFamily="34" charset="0"/>
-                <a:ea typeface="Calibri" pitchFamily="34" charset="-122"/>
-                <a:cs typeface="Calibri" pitchFamily="34" charset="-120"/>
-              </a:rPr>
-              <a:t>Assignment ends at a message — no defined next step</a:t>
-            </a:r>
-            <a:endParaRPr lang="en-US" sz="1150" dirty="0"/>
-          </a:p>
-        </p:txBody>
-      </p:sp>
-      <p:sp>
-        <p:nvSpPr>
-          <p:cNvPr id="14" name="Shape 10"/>
-          <p:cNvSpPr/>
-          <p:nvPr/>
-        </p:nvSpPr>
-        <p:spPr>
-          <a:xfrm>
-            <a:off x="868680" y="3886200"/>
-            <a:ext cx="457200" cy="457200"/>
-          </a:xfrm>
-          <a:prstGeom prst="ellipse">
-            <a:avLst/>
-          </a:prstGeom>
-          <a:solidFill>
-            <a:srgbClr val="DC2626"/>
-          </a:solidFill>
-          <a:ln/>
-        </p:spPr>
-      </p:sp>
-      <p:pic>
-        <p:nvPicPr>
-          <p:cNvPr id="15" name="Image 2" descr="preencoded.png">    </p:cNvPr>
+          <p:cNvPr id="7" name="Image 0" descr="preencoded.png"/>
           <p:cNvPicPr>
             <a:picLocks noChangeAspect="1"/>
           </p:cNvPicPr>
@@ -5435,7 +5131,7 @@
         </p:blipFill>
         <p:spPr>
           <a:xfrm>
-            <a:off x="987552" y="4005072"/>
+            <a:off x="987552" y="2267712"/>
             <a:ext cx="219456" cy="219456"/>
           </a:xfrm>
           <a:prstGeom prst="rect">
@@ -5445,13 +5141,13 @@
       </p:pic>
       <p:sp>
         <p:nvSpPr>
-          <p:cNvPr id="16" name="Text 11"/>
-          <p:cNvSpPr/>
-          <p:nvPr/>
-        </p:nvSpPr>
-        <p:spPr>
-          <a:xfrm>
-            <a:off x="1490472" y="3858768"/>
+          <p:cNvPr id="8" name="Text 5"/>
+          <p:cNvSpPr/>
+          <p:nvPr/>
+        </p:nvSpPr>
+        <p:spPr>
+          <a:xfrm>
+            <a:off x="1490472" y="2121408"/>
             <a:ext cx="4133088" cy="274320"/>
           </a:xfrm>
           <a:prstGeom prst="rect">
@@ -5464,7 +5160,7 @@
           <a:bodyPr wrap="square" lIns="0" tIns="0" rIns="0" bIns="0" rtlCol="0" anchor="ctr"/>
           <a:lstStyle/>
           <a:p>
-            <a:pPr indent="0" marL="0">
+            <a:pPr marL="0" indent="0">
               <a:buNone/>
             </a:pPr>
             <a:r>
@@ -5476,7 +5172,7 @@
                 <a:ea typeface="Calibri" pitchFamily="34" charset="-122"/>
                 <a:cs typeface="Calibri" pitchFamily="34" charset="-120"/>
               </a:rPr>
-              <a:t>Notifications are dead-ends</a:t>
+              <a:t>Tools scattered across chat, sheets, and docs</a:t>
             </a:r>
             <a:endParaRPr lang="en-US" sz="1500" dirty="0"/>
           </a:p>
@@ -5484,13 +5180,13 @@
       </p:sp>
       <p:sp>
         <p:nvSpPr>
-          <p:cNvPr id="17" name="Text 12"/>
-          <p:cNvSpPr/>
-          <p:nvPr/>
-        </p:nvSpPr>
-        <p:spPr>
-          <a:xfrm>
-            <a:off x="1490472" y="4123944"/>
+          <p:cNvPr id="9" name="Text 6"/>
+          <p:cNvSpPr/>
+          <p:nvPr/>
+        </p:nvSpPr>
+        <p:spPr>
+          <a:xfrm>
+            <a:off x="1490472" y="2386584"/>
             <a:ext cx="4133088" cy="457200"/>
           </a:xfrm>
           <a:prstGeom prst="rect">
@@ -5503,7 +5199,7 @@
           <a:bodyPr wrap="square" lIns="0" tIns="0" rIns="0" bIns="0" rtlCol="0" anchor="t"/>
           <a:lstStyle/>
           <a:p>
-            <a:pPr indent="0" marL="0">
+            <a:pPr marL="0" indent="0">
               <a:buNone/>
             </a:pPr>
             <a:r>
@@ -5515,7 +5211,7 @@
                 <a:ea typeface="Calibri" pitchFamily="34" charset="-122"/>
                 <a:cs typeface="Calibri" pitchFamily="34" charset="-120"/>
               </a:rPr>
-              <a:t>An alert with nowhere to click and nothing to act on</a:t>
+              <a:t>No single source of truth for project status</a:t>
             </a:r>
             <a:endParaRPr lang="en-US" sz="1150" dirty="0"/>
           </a:p>
@@ -5523,13 +5219,13 @@
       </p:sp>
       <p:sp>
         <p:nvSpPr>
-          <p:cNvPr id="18" name="Shape 13"/>
-          <p:cNvSpPr/>
-          <p:nvPr/>
-        </p:nvSpPr>
-        <p:spPr>
-          <a:xfrm>
-            <a:off x="868680" y="4754880"/>
+          <p:cNvPr id="10" name="Shape 7"/>
+          <p:cNvSpPr/>
+          <p:nvPr/>
+        </p:nvSpPr>
+        <p:spPr>
+          <a:xfrm>
+            <a:off x="868680" y="3017520"/>
             <a:ext cx="457200" cy="457200"/>
           </a:xfrm>
           <a:prstGeom prst="ellipse">
@@ -5543,7 +5239,434 @@
       </p:sp>
       <p:pic>
         <p:nvPicPr>
-          <p:cNvPr id="19" name="Image 3" descr="preencoded.png">    </p:cNvPr>
+          <p:cNvPr id="11" name="Image 1" descr="preencoded.png"/>
+          <p:cNvPicPr>
+            <a:picLocks noChangeAspect="1"/>
+          </p:cNvPicPr>
+          <p:nvPr/>
+        </p:nvPicPr>
+        <p:blipFill>
+          <a:blip r:embed="rId3"/>
+          <a:stretch>
+            <a:fillRect/>
+          </a:stretch>
+        </p:blipFill>
+        <p:spPr>
+          <a:xfrm>
+            <a:off x="987552" y="3136392"/>
+            <a:ext cx="219456" cy="219456"/>
+          </a:xfrm>
+          <a:prstGeom prst="rect">
+            <a:avLst/>
+          </a:prstGeom>
+        </p:spPr>
+      </p:pic>
+      <p:sp>
+        <p:nvSpPr>
+          <p:cNvPr id="12" name="Text 8"/>
+          <p:cNvSpPr/>
+          <p:nvPr/>
+        </p:nvSpPr>
+        <p:spPr>
+          <a:xfrm>
+            <a:off x="1490472" y="2990088"/>
+            <a:ext cx="4133088" cy="274320"/>
+          </a:xfrm>
+          <a:prstGeom prst="rect">
+            <a:avLst/>
+          </a:prstGeom>
+          <a:noFill/>
+          <a:ln/>
+        </p:spPr>
+        <p:txBody>
+          <a:bodyPr wrap="square" lIns="0" tIns="0" rIns="0" bIns="0" rtlCol="0" anchor="ctr"/>
+          <a:lstStyle/>
+          <a:p>
+            <a:pPr marL="0" indent="0">
+              <a:buNone/>
+            </a:pPr>
+            <a:r>
+              <a:rPr lang="en-US" sz="1500" b="1" dirty="0">
+                <a:solidFill>
+                  <a:srgbClr val="171B23"/>
+                </a:solidFill>
+                <a:latin typeface="Calibri" pitchFamily="34" charset="0"/>
+                <a:ea typeface="Calibri" pitchFamily="34" charset="-122"/>
+                <a:cs typeface="Calibri" pitchFamily="34" charset="-120"/>
+              </a:rPr>
+              <a:t>Tasks assigned with no follow-through</a:t>
+            </a:r>
+            <a:endParaRPr lang="en-US" sz="1500" dirty="0"/>
+          </a:p>
+        </p:txBody>
+      </p:sp>
+      <p:sp>
+        <p:nvSpPr>
+          <p:cNvPr id="13" name="Text 9"/>
+          <p:cNvSpPr/>
+          <p:nvPr/>
+        </p:nvSpPr>
+        <p:spPr>
+          <a:xfrm>
+            <a:off x="1490472" y="3255264"/>
+            <a:ext cx="4133088" cy="457200"/>
+          </a:xfrm>
+          <a:prstGeom prst="rect">
+            <a:avLst/>
+          </a:prstGeom>
+          <a:noFill/>
+          <a:ln/>
+        </p:spPr>
+        <p:txBody>
+          <a:bodyPr wrap="square" lIns="0" tIns="0" rIns="0" bIns="0" rtlCol="0" anchor="t"/>
+          <a:lstStyle/>
+          <a:p>
+            <a:pPr marL="0" indent="0">
+              <a:buNone/>
+            </a:pPr>
+            <a:r>
+              <a:rPr lang="en-US" sz="1150" dirty="0">
+                <a:solidFill>
+                  <a:srgbClr val="5B6472"/>
+                </a:solidFill>
+                <a:latin typeface="Calibri" pitchFamily="34" charset="0"/>
+                <a:ea typeface="Calibri" pitchFamily="34" charset="-122"/>
+                <a:cs typeface="Calibri" pitchFamily="34" charset="-120"/>
+              </a:rPr>
+              <a:t>Assignment ends at a message — no defined next step</a:t>
+            </a:r>
+            <a:endParaRPr lang="en-US" sz="1150" dirty="0"/>
+          </a:p>
+        </p:txBody>
+      </p:sp>
+      <p:sp>
+        <p:nvSpPr>
+          <p:cNvPr id="14" name="Shape 10"/>
+          <p:cNvSpPr/>
+          <p:nvPr/>
+        </p:nvSpPr>
+        <p:spPr>
+          <a:xfrm>
+            <a:off x="868680" y="3886200"/>
+            <a:ext cx="457200" cy="457200"/>
+          </a:xfrm>
+          <a:prstGeom prst="ellipse">
+            <a:avLst/>
+          </a:prstGeom>
+          <a:solidFill>
+            <a:srgbClr val="DC2626"/>
+          </a:solidFill>
+          <a:ln/>
+        </p:spPr>
+      </p:sp>
+      <p:pic>
+        <p:nvPicPr>
+          <p:cNvPr id="15" name="Image 2" descr="preencoded.png"/>
+          <p:cNvPicPr>
+            <a:picLocks noChangeAspect="1"/>
+          </p:cNvPicPr>
+          <p:nvPr/>
+        </p:nvPicPr>
+        <p:blipFill>
+          <a:blip r:embed="rId3"/>
+          <a:stretch>
+            <a:fillRect/>
+          </a:stretch>
+        </p:blipFill>
+        <p:spPr>
+          <a:xfrm>
+            <a:off x="987552" y="4005072"/>
+            <a:ext cx="219456" cy="219456"/>
+          </a:xfrm>
+          <a:prstGeom prst="rect">
+            <a:avLst/>
+          </a:prstGeom>
+        </p:spPr>
+      </p:pic>
+      <p:sp>
+        <p:nvSpPr>
+          <p:cNvPr id="16" name="Text 11"/>
+          <p:cNvSpPr/>
+          <p:nvPr/>
+        </p:nvSpPr>
+        <p:spPr>
+          <a:xfrm>
+            <a:off x="1490472" y="3858768"/>
+            <a:ext cx="4133088" cy="274320"/>
+          </a:xfrm>
+          <a:prstGeom prst="rect">
+            <a:avLst/>
+          </a:prstGeom>
+          <a:noFill/>
+          <a:ln/>
+        </p:spPr>
+        <p:txBody>
+          <a:bodyPr wrap="square" lIns="0" tIns="0" rIns="0" bIns="0" rtlCol="0" anchor="ctr"/>
+          <a:lstStyle/>
+          <a:p>
+            <a:pPr marL="0" indent="0">
+              <a:buNone/>
+            </a:pPr>
+            <a:r>
+              <a:rPr lang="en-US" sz="1500" b="1" dirty="0">
+                <a:solidFill>
+                  <a:srgbClr val="171B23"/>
+                </a:solidFill>
+                <a:latin typeface="Calibri" pitchFamily="34" charset="0"/>
+                <a:ea typeface="Calibri" pitchFamily="34" charset="-122"/>
+                <a:cs typeface="Calibri" pitchFamily="34" charset="-120"/>
+              </a:rPr>
+              <a:t>Notifications are dead-ends</a:t>
+            </a:r>
+            <a:endParaRPr lang="en-US" sz="1500" dirty="0"/>
+          </a:p>
+        </p:txBody>
+      </p:sp>
+      <p:sp>
+        <p:nvSpPr>
+          <p:cNvPr id="17" name="Text 12"/>
+          <p:cNvSpPr/>
+          <p:nvPr/>
+        </p:nvSpPr>
+        <p:spPr>
+          <a:xfrm>
+            <a:off x="1490472" y="4123944"/>
+            <a:ext cx="4133088" cy="457200"/>
+          </a:xfrm>
+          <a:prstGeom prst="rect">
+            <a:avLst/>
+          </a:prstGeom>
+          <a:noFill/>
+          <a:ln/>
+        </p:spPr>
+        <p:txBody>
+          <a:bodyPr wrap="square" lIns="0" tIns="0" rIns="0" bIns="0" rtlCol="0" anchor="t"/>
+          <a:lstStyle/>
+          <a:p>
+            <a:pPr marL="0" indent="0">
+              <a:buNone/>
+            </a:pPr>
+            <a:r>
+              <a:rPr lang="en-US" sz="1150" dirty="0">
+                <a:solidFill>
+                  <a:srgbClr val="5B6472"/>
+                </a:solidFill>
+                <a:latin typeface="Calibri" pitchFamily="34" charset="0"/>
+                <a:ea typeface="Calibri" pitchFamily="34" charset="-122"/>
+                <a:cs typeface="Calibri" pitchFamily="34" charset="-120"/>
+              </a:rPr>
+              <a:t>An alert with nowhere to click and nothing to act on</a:t>
+            </a:r>
+            <a:endParaRPr lang="en-US" sz="1150" dirty="0"/>
+          </a:p>
+        </p:txBody>
+      </p:sp>
+      <p:sp>
+        <p:nvSpPr>
+          <p:cNvPr id="18" name="Shape 13"/>
+          <p:cNvSpPr/>
+          <p:nvPr/>
+        </p:nvSpPr>
+        <p:spPr>
+          <a:xfrm>
+            <a:off x="868680" y="4754880"/>
+            <a:ext cx="457200" cy="457200"/>
+          </a:xfrm>
+          <a:prstGeom prst="ellipse">
+            <a:avLst/>
+          </a:prstGeom>
+          <a:solidFill>
+            <a:srgbClr val="DC2626"/>
+          </a:solidFill>
+          <a:ln/>
+        </p:spPr>
+      </p:sp>
+      <p:pic>
+        <p:nvPicPr>
+          <p:cNvPr id="19" name="Image 3" descr="preencoded.png"/>
+          <p:cNvPicPr>
+            <a:picLocks noChangeAspect="1"/>
+          </p:cNvPicPr>
+          <p:nvPr/>
+        </p:nvPicPr>
+        <p:blipFill>
+          <a:blip r:embed="rId3"/>
+          <a:stretch>
+            <a:fillRect/>
+          </a:stretch>
+        </p:blipFill>
+        <p:spPr>
+          <a:xfrm>
+            <a:off x="987552" y="4873752"/>
+            <a:ext cx="219456" cy="219456"/>
+          </a:xfrm>
+          <a:prstGeom prst="rect">
+            <a:avLst/>
+          </a:prstGeom>
+        </p:spPr>
+      </p:pic>
+      <p:sp>
+        <p:nvSpPr>
+          <p:cNvPr id="20" name="Text 14"/>
+          <p:cNvSpPr/>
+          <p:nvPr/>
+        </p:nvSpPr>
+        <p:spPr>
+          <a:xfrm>
+            <a:off x="1490472" y="4727448"/>
+            <a:ext cx="4133088" cy="274320"/>
+          </a:xfrm>
+          <a:prstGeom prst="rect">
+            <a:avLst/>
+          </a:prstGeom>
+          <a:noFill/>
+          <a:ln/>
+        </p:spPr>
+        <p:txBody>
+          <a:bodyPr wrap="square" lIns="0" tIns="0" rIns="0" bIns="0" rtlCol="0" anchor="ctr"/>
+          <a:lstStyle/>
+          <a:p>
+            <a:pPr marL="0" indent="0">
+              <a:buNone/>
+            </a:pPr>
+            <a:r>
+              <a:rPr lang="en-US" sz="1500" b="1" dirty="0">
+                <a:solidFill>
+                  <a:srgbClr val="171B23"/>
+                </a:solidFill>
+                <a:latin typeface="Calibri" pitchFamily="34" charset="0"/>
+                <a:ea typeface="Calibri" pitchFamily="34" charset="-122"/>
+                <a:cs typeface="Calibri" pitchFamily="34" charset="-120"/>
+              </a:rPr>
+              <a:t>No audit trail</a:t>
+            </a:r>
+            <a:endParaRPr lang="en-US" sz="1500" dirty="0"/>
+          </a:p>
+        </p:txBody>
+      </p:sp>
+      <p:sp>
+        <p:nvSpPr>
+          <p:cNvPr id="21" name="Text 15"/>
+          <p:cNvSpPr/>
+          <p:nvPr/>
+        </p:nvSpPr>
+        <p:spPr>
+          <a:xfrm>
+            <a:off x="1490472" y="4992624"/>
+            <a:ext cx="4133088" cy="457200"/>
+          </a:xfrm>
+          <a:prstGeom prst="rect">
+            <a:avLst/>
+          </a:prstGeom>
+          <a:noFill/>
+          <a:ln/>
+        </p:spPr>
+        <p:txBody>
+          <a:bodyPr wrap="square" lIns="0" tIns="0" rIns="0" bIns="0" rtlCol="0" anchor="t"/>
+          <a:lstStyle/>
+          <a:p>
+            <a:pPr marL="0" indent="0">
+              <a:buNone/>
+            </a:pPr>
+            <a:r>
+              <a:rPr lang="en-US" sz="1150" dirty="0">
+                <a:solidFill>
+                  <a:srgbClr val="5B6472"/>
+                </a:solidFill>
+                <a:latin typeface="Calibri" pitchFamily="34" charset="0"/>
+                <a:ea typeface="Calibri" pitchFamily="34" charset="-122"/>
+                <a:cs typeface="Calibri" pitchFamily="34" charset="-120"/>
+              </a:rPr>
+              <a:t>Who changed what, and when, is impossible to reconstruct</a:t>
+            </a:r>
+            <a:endParaRPr lang="en-US" sz="1150" dirty="0"/>
+          </a:p>
+        </p:txBody>
+      </p:sp>
+      <p:sp>
+        <p:nvSpPr>
+          <p:cNvPr id="22" name="Shape 16"/>
+          <p:cNvSpPr/>
+          <p:nvPr/>
+        </p:nvSpPr>
+        <p:spPr>
+          <a:xfrm>
+            <a:off x="6217920" y="1417320"/>
+            <a:ext cx="5394960" cy="4754880"/>
+          </a:xfrm>
+          <a:prstGeom prst="roundRect">
+            <a:avLst>
+              <a:gd name="adj" fmla="val 2308"/>
+            </a:avLst>
+          </a:prstGeom>
+          <a:solidFill>
+            <a:srgbClr val="EEF0FF"/>
+          </a:solidFill>
+          <a:ln/>
+        </p:spPr>
+      </p:sp>
+      <p:sp>
+        <p:nvSpPr>
+          <p:cNvPr id="23" name="Text 17"/>
+          <p:cNvSpPr/>
+          <p:nvPr/>
+        </p:nvSpPr>
+        <p:spPr>
+          <a:xfrm>
+            <a:off x="6537960" y="1645920"/>
+            <a:ext cx="4754880" cy="320040"/>
+          </a:xfrm>
+          <a:prstGeom prst="rect">
+            <a:avLst/>
+          </a:prstGeom>
+          <a:noFill/>
+          <a:ln/>
+        </p:spPr>
+        <p:txBody>
+          <a:bodyPr wrap="square" lIns="0" tIns="0" rIns="0" bIns="0" rtlCol="0" anchor="ctr"/>
+          <a:lstStyle/>
+          <a:p>
+            <a:pPr marL="0" indent="0">
+              <a:buNone/>
+            </a:pPr>
+            <a:r>
+              <a:rPr lang="en-US" sz="1500" b="1" dirty="0">
+                <a:solidFill>
+                  <a:srgbClr val="171B23"/>
+                </a:solidFill>
+                <a:latin typeface="Calibri" pitchFamily="34" charset="0"/>
+                <a:ea typeface="Calibri" pitchFamily="34" charset="-122"/>
+                <a:cs typeface="Calibri" pitchFamily="34" charset="-120"/>
+              </a:rPr>
+              <a:t>Why NexusFlow</a:t>
+            </a:r>
+            <a:endParaRPr lang="en-US" sz="1500" dirty="0"/>
+          </a:p>
+        </p:txBody>
+      </p:sp>
+      <p:sp>
+        <p:nvSpPr>
+          <p:cNvPr id="24" name="Shape 18"/>
+          <p:cNvSpPr/>
+          <p:nvPr/>
+        </p:nvSpPr>
+        <p:spPr>
+          <a:xfrm>
+            <a:off x="6537960" y="2148840"/>
+            <a:ext cx="457200" cy="457200"/>
+          </a:xfrm>
+          <a:prstGeom prst="ellipse">
+            <a:avLst/>
+          </a:prstGeom>
+          <a:solidFill>
+            <a:srgbClr val="4F46E5"/>
+          </a:solidFill>
+          <a:ln/>
+        </p:spPr>
+      </p:sp>
+      <p:pic>
+        <p:nvPicPr>
+          <p:cNvPr id="25" name="Image 4" descr="preencoded.png"/>
           <p:cNvPicPr>
             <a:picLocks noChangeAspect="1"/>
           </p:cNvPicPr>
@@ -5557,7 +5680,7 @@
         </p:blipFill>
         <p:spPr>
           <a:xfrm>
-            <a:off x="987552" y="4873752"/>
+            <a:off x="6656832" y="2267712"/>
             <a:ext cx="219456" cy="219456"/>
           </a:xfrm>
           <a:prstGeom prst="rect">
@@ -5567,13 +5690,13 @@
       </p:pic>
       <p:sp>
         <p:nvSpPr>
-          <p:cNvPr id="20" name="Text 14"/>
-          <p:cNvSpPr/>
-          <p:nvPr/>
-        </p:nvSpPr>
-        <p:spPr>
-          <a:xfrm>
-            <a:off x="1490472" y="4727448"/>
+          <p:cNvPr id="26" name="Text 19"/>
+          <p:cNvSpPr/>
+          <p:nvPr/>
+        </p:nvSpPr>
+        <p:spPr>
+          <a:xfrm>
+            <a:off x="7159752" y="2121408"/>
             <a:ext cx="4133088" cy="274320"/>
           </a:xfrm>
           <a:prstGeom prst="rect">
@@ -5586,7 +5709,7 @@
           <a:bodyPr wrap="square" lIns="0" tIns="0" rIns="0" bIns="0" rtlCol="0" anchor="ctr"/>
           <a:lstStyle/>
           <a:p>
-            <a:pPr indent="0" marL="0">
+            <a:pPr marL="0" indent="0">
               <a:buNone/>
             </a:pPr>
             <a:r>
@@ -5598,7 +5721,7 @@
                 <a:ea typeface="Calibri" pitchFamily="34" charset="-122"/>
                 <a:cs typeface="Calibri" pitchFamily="34" charset="-120"/>
               </a:rPr>
-              <a:t>No audit trail</a:t>
+              <a:t>One workspace, one workflow</a:t>
             </a:r>
             <a:endParaRPr lang="en-US" sz="1500" dirty="0"/>
           </a:p>
@@ -5606,13 +5729,13 @@
       </p:sp>
       <p:sp>
         <p:nvSpPr>
-          <p:cNvPr id="21" name="Text 15"/>
-          <p:cNvSpPr/>
-          <p:nvPr/>
-        </p:nvSpPr>
-        <p:spPr>
-          <a:xfrm>
-            <a:off x="1490472" y="4992624"/>
+          <p:cNvPr id="27" name="Text 20"/>
+          <p:cNvSpPr/>
+          <p:nvPr/>
+        </p:nvSpPr>
+        <p:spPr>
+          <a:xfrm>
+            <a:off x="7159752" y="2386584"/>
             <a:ext cx="4133088" cy="457200"/>
           </a:xfrm>
           <a:prstGeom prst="rect">
@@ -5625,7 +5748,7 @@
           <a:bodyPr wrap="square" lIns="0" tIns="0" rIns="0" bIns="0" rtlCol="0" anchor="t"/>
           <a:lstStyle/>
           <a:p>
-            <a:pPr indent="0" marL="0">
+            <a:pPr marL="0" indent="0">
               <a:buNone/>
             </a:pPr>
             <a:r>
@@ -5637,7 +5760,7 @@
                 <a:ea typeface="Calibri" pitchFamily="34" charset="-122"/>
                 <a:cs typeface="Calibri" pitchFamily="34" charset="-120"/>
               </a:rPr>
-              <a:t>Who changed what, and when, is impossible to reconstruct</a:t>
+              <a:t>Projects, tasks, and discussion in a single system</a:t>
             </a:r>
             <a:endParaRPr lang="en-US" sz="1150" dirty="0"/>
           </a:p>
@@ -5645,74 +5768,13 @@
       </p:sp>
       <p:sp>
         <p:nvSpPr>
-          <p:cNvPr id="22" name="Shape 16"/>
-          <p:cNvSpPr/>
-          <p:nvPr/>
-        </p:nvSpPr>
-        <p:spPr>
-          <a:xfrm>
-            <a:off x="6217920" y="1417320"/>
-            <a:ext cx="5394960" cy="4754880"/>
-          </a:xfrm>
-          <a:prstGeom prst="roundRect">
-            <a:avLst>
-              <a:gd name="adj" fmla="val 2308"/>
-            </a:avLst>
-          </a:prstGeom>
-          <a:solidFill>
-            <a:srgbClr val="EEF0FF"/>
-          </a:solidFill>
-          <a:ln/>
-        </p:spPr>
-      </p:sp>
-      <p:sp>
-        <p:nvSpPr>
-          <p:cNvPr id="23" name="Text 17"/>
-          <p:cNvSpPr/>
-          <p:nvPr/>
-        </p:nvSpPr>
-        <p:spPr>
-          <a:xfrm>
-            <a:off x="6537960" y="1645920"/>
-            <a:ext cx="4754880" cy="320040"/>
-          </a:xfrm>
-          <a:prstGeom prst="rect">
-            <a:avLst/>
-          </a:prstGeom>
-          <a:noFill/>
-          <a:ln/>
-        </p:spPr>
-        <p:txBody>
-          <a:bodyPr wrap="square" lIns="0" tIns="0" rIns="0" bIns="0" rtlCol="0" anchor="ctr"/>
-          <a:lstStyle/>
-          <a:p>
-            <a:pPr indent="0" marL="0">
-              <a:buNone/>
-            </a:pPr>
-            <a:r>
-              <a:rPr lang="en-US" sz="1500" b="1" dirty="0">
-                <a:solidFill>
-                  <a:srgbClr val="171B23"/>
-                </a:solidFill>
-                <a:latin typeface="Calibri" pitchFamily="34" charset="0"/>
-                <a:ea typeface="Calibri" pitchFamily="34" charset="-122"/>
-                <a:cs typeface="Calibri" pitchFamily="34" charset="-120"/>
-              </a:rPr>
-              <a:t>Why NexusFlow</a:t>
-            </a:r>
-            <a:endParaRPr lang="en-US" sz="1500" dirty="0"/>
-          </a:p>
-        </p:txBody>
-      </p:sp>
-      <p:sp>
-        <p:nvSpPr>
-          <p:cNvPr id="24" name="Shape 18"/>
-          <p:cNvSpPr/>
-          <p:nvPr/>
-        </p:nvSpPr>
-        <p:spPr>
-          <a:xfrm>
-            <a:off x="6537960" y="2148840"/>
+          <p:cNvPr id="28" name="Shape 21"/>
+          <p:cNvSpPr/>
+          <p:nvPr/>
+        </p:nvSpPr>
+        <p:spPr>
+          <a:xfrm>
+            <a:off x="6537960" y="3017520"/>
             <a:ext cx="457200" cy="457200"/>
           </a:xfrm>
           <a:prstGeom prst="ellipse">
@@ -5726,21 +5788,21 @@
       </p:sp>
       <p:pic>
         <p:nvPicPr>
-          <p:cNvPr id="25" name="Image 4" descr="preencoded.png">    </p:cNvPr>
+          <p:cNvPr id="29" name="Image 5" descr="preencoded.png"/>
           <p:cNvPicPr>
             <a:picLocks noChangeAspect="1"/>
           </p:cNvPicPr>
           <p:nvPr/>
         </p:nvPicPr>
         <p:blipFill>
-          <a:blip r:embed="rId5"/>
+          <a:blip r:embed="rId4"/>
           <a:stretch>
             <a:fillRect/>
           </a:stretch>
         </p:blipFill>
         <p:spPr>
           <a:xfrm>
-            <a:off x="6656832" y="2267712"/>
+            <a:off x="6656832" y="3136392"/>
             <a:ext cx="219456" cy="219456"/>
           </a:xfrm>
           <a:prstGeom prst="rect">
@@ -5750,13 +5812,13 @@
       </p:pic>
       <p:sp>
         <p:nvSpPr>
-          <p:cNvPr id="26" name="Text 19"/>
-          <p:cNvSpPr/>
-          <p:nvPr/>
-        </p:nvSpPr>
-        <p:spPr>
-          <a:xfrm>
-            <a:off x="7159752" y="2121408"/>
+          <p:cNvPr id="30" name="Text 22"/>
+          <p:cNvSpPr/>
+          <p:nvPr/>
+        </p:nvSpPr>
+        <p:spPr>
+          <a:xfrm>
+            <a:off x="7159752" y="2990088"/>
             <a:ext cx="4133088" cy="274320"/>
           </a:xfrm>
           <a:prstGeom prst="rect">
@@ -5769,7 +5831,7 @@
           <a:bodyPr wrap="square" lIns="0" tIns="0" rIns="0" bIns="0" rtlCol="0" anchor="ctr"/>
           <a:lstStyle/>
           <a:p>
-            <a:pPr indent="0" marL="0">
+            <a:pPr marL="0" indent="0">
               <a:buNone/>
             </a:pPr>
             <a:r>
@@ -5781,7 +5843,7 @@
                 <a:ea typeface="Calibri" pitchFamily="34" charset="-122"/>
                 <a:cs typeface="Calibri" pitchFamily="34" charset="-120"/>
               </a:rPr>
-              <a:t>One workspace, one workflow</a:t>
+              <a:t>Every notification is actionable</a:t>
             </a:r>
             <a:endParaRPr lang="en-US" sz="1500" dirty="0"/>
           </a:p>
@@ -5789,13 +5851,13 @@
       </p:sp>
       <p:sp>
         <p:nvSpPr>
-          <p:cNvPr id="27" name="Text 20"/>
-          <p:cNvSpPr/>
-          <p:nvPr/>
-        </p:nvSpPr>
-        <p:spPr>
-          <a:xfrm>
-            <a:off x="7159752" y="2386584"/>
+          <p:cNvPr id="31" name="Text 23"/>
+          <p:cNvSpPr/>
+          <p:nvPr/>
+        </p:nvSpPr>
+        <p:spPr>
+          <a:xfrm>
+            <a:off x="7159752" y="3255264"/>
             <a:ext cx="4133088" cy="457200"/>
           </a:xfrm>
           <a:prstGeom prst="rect">
@@ -5808,7 +5870,7 @@
           <a:bodyPr wrap="square" lIns="0" tIns="0" rIns="0" bIns="0" rtlCol="0" anchor="t"/>
           <a:lstStyle/>
           <a:p>
-            <a:pPr indent="0" marL="0">
+            <a:pPr marL="0" indent="0">
               <a:buNone/>
             </a:pPr>
             <a:r>
@@ -5820,7 +5882,7 @@
                 <a:ea typeface="Calibri" pitchFamily="34" charset="-122"/>
                 <a:cs typeface="Calibri" pitchFamily="34" charset="-120"/>
               </a:rPr>
-              <a:t>Projects, tasks, and discussion in a single system</a:t>
+              <a:t>Clicking one opens the exact task it's about</a:t>
             </a:r>
             <a:endParaRPr lang="en-US" sz="1150" dirty="0"/>
           </a:p>
@@ -5828,13 +5890,13 @@
       </p:sp>
       <p:sp>
         <p:nvSpPr>
-          <p:cNvPr id="28" name="Shape 21"/>
-          <p:cNvSpPr/>
-          <p:nvPr/>
-        </p:nvSpPr>
-        <p:spPr>
-          <a:xfrm>
-            <a:off x="6537960" y="3017520"/>
+          <p:cNvPr id="32" name="Shape 24"/>
+          <p:cNvSpPr/>
+          <p:nvPr/>
+        </p:nvSpPr>
+        <p:spPr>
+          <a:xfrm>
+            <a:off x="6537960" y="3886200"/>
             <a:ext cx="457200" cy="457200"/>
           </a:xfrm>
           <a:prstGeom prst="ellipse">
@@ -5848,21 +5910,21 @@
       </p:sp>
       <p:pic>
         <p:nvPicPr>
-          <p:cNvPr id="29" name="Image 5" descr="preencoded.png">    </p:cNvPr>
+          <p:cNvPr id="33" name="Image 6" descr="preencoded.png"/>
           <p:cNvPicPr>
             <a:picLocks noChangeAspect="1"/>
           </p:cNvPicPr>
           <p:nvPr/>
         </p:nvPicPr>
         <p:blipFill>
-          <a:blip r:embed="rId6"/>
+          <a:blip r:embed="rId4"/>
           <a:stretch>
             <a:fillRect/>
           </a:stretch>
         </p:blipFill>
         <p:spPr>
           <a:xfrm>
-            <a:off x="6656832" y="3136392"/>
+            <a:off x="6656832" y="4005072"/>
             <a:ext cx="219456" cy="219456"/>
           </a:xfrm>
           <a:prstGeom prst="rect">
@@ -5872,13 +5934,13 @@
       </p:pic>
       <p:sp>
         <p:nvSpPr>
-          <p:cNvPr id="30" name="Text 22"/>
-          <p:cNvSpPr/>
-          <p:nvPr/>
-        </p:nvSpPr>
-        <p:spPr>
-          <a:xfrm>
-            <a:off x="7159752" y="2990088"/>
+          <p:cNvPr id="34" name="Text 25"/>
+          <p:cNvSpPr/>
+          <p:nvPr/>
+        </p:nvSpPr>
+        <p:spPr>
+          <a:xfrm>
+            <a:off x="7159752" y="3858768"/>
             <a:ext cx="4133088" cy="274320"/>
           </a:xfrm>
           <a:prstGeom prst="rect">
@@ -5891,7 +5953,7 @@
           <a:bodyPr wrap="square" lIns="0" tIns="0" rIns="0" bIns="0" rtlCol="0" anchor="ctr"/>
           <a:lstStyle/>
           <a:p>
-            <a:pPr indent="0" marL="0">
+            <a:pPr marL="0" indent="0">
               <a:buNone/>
             </a:pPr>
             <a:r>
@@ -5903,7 +5965,7 @@
                 <a:ea typeface="Calibri" pitchFamily="34" charset="-122"/>
                 <a:cs typeface="Calibri" pitchFamily="34" charset="-120"/>
               </a:rPr>
-              <a:t>Every notification is actionable</a:t>
+              <a:t>A defined task lifecycle</a:t>
             </a:r>
             <a:endParaRPr lang="en-US" sz="1500" dirty="0"/>
           </a:p>
@@ -5911,13 +5973,13 @@
       </p:sp>
       <p:sp>
         <p:nvSpPr>
-          <p:cNvPr id="31" name="Text 23"/>
-          <p:cNvSpPr/>
-          <p:nvPr/>
-        </p:nvSpPr>
-        <p:spPr>
-          <a:xfrm>
-            <a:off x="7159752" y="3255264"/>
+          <p:cNvPr id="35" name="Text 26"/>
+          <p:cNvSpPr/>
+          <p:nvPr/>
+        </p:nvSpPr>
+        <p:spPr>
+          <a:xfrm>
+            <a:off x="7159752" y="4123944"/>
             <a:ext cx="4133088" cy="457200"/>
           </a:xfrm>
           <a:prstGeom prst="rect">
@@ -5930,7 +5992,7 @@
           <a:bodyPr wrap="square" lIns="0" tIns="0" rIns="0" bIns="0" rtlCol="0" anchor="t"/>
           <a:lstStyle/>
           <a:p>
-            <a:pPr indent="0" marL="0">
+            <a:pPr marL="0" indent="0">
               <a:buNone/>
             </a:pPr>
             <a:r>
@@ -5942,7 +6004,7 @@
                 <a:ea typeface="Calibri" pitchFamily="34" charset="-122"/>
                 <a:cs typeface="Calibri" pitchFamily="34" charset="-120"/>
               </a:rPr>
-              <a:t>Clicking one opens the exact task it's about</a:t>
+              <a:t>Assign → Accept → Clarify → Update → Complete</a:t>
             </a:r>
             <a:endParaRPr lang="en-US" sz="1150" dirty="0"/>
           </a:p>
@@ -5950,13 +6012,13 @@
       </p:sp>
       <p:sp>
         <p:nvSpPr>
-          <p:cNvPr id="32" name="Shape 24"/>
-          <p:cNvSpPr/>
-          <p:nvPr/>
-        </p:nvSpPr>
-        <p:spPr>
-          <a:xfrm>
-            <a:off x="6537960" y="3886200"/>
+          <p:cNvPr id="36" name="Shape 27"/>
+          <p:cNvSpPr/>
+          <p:nvPr/>
+        </p:nvSpPr>
+        <p:spPr>
+          <a:xfrm>
+            <a:off x="6537960" y="4754880"/>
             <a:ext cx="457200" cy="457200"/>
           </a:xfrm>
           <a:prstGeom prst="ellipse">
@@ -5970,142 +6032,20 @@
       </p:sp>
       <p:pic>
         <p:nvPicPr>
-          <p:cNvPr id="33" name="Image 6" descr="preencoded.png">    </p:cNvPr>
+          <p:cNvPr id="37" name="Image 7" descr="preencoded.png"/>
           <p:cNvPicPr>
             <a:picLocks noChangeAspect="1"/>
           </p:cNvPicPr>
           <p:nvPr/>
         </p:nvPicPr>
         <p:blipFill>
-          <a:blip r:embed="rId7"/>
+          <a:blip r:embed="rId4"/>
           <a:stretch>
             <a:fillRect/>
           </a:stretch>
         </p:blipFill>
         <p:spPr>
           <a:xfrm>
-            <a:off x="6656832" y="4005072"/>
-            <a:ext cx="219456" cy="219456"/>
-          </a:xfrm>
-          <a:prstGeom prst="rect">
-            <a:avLst/>
-          </a:prstGeom>
-        </p:spPr>
-      </p:pic>
-      <p:sp>
-        <p:nvSpPr>
-          <p:cNvPr id="34" name="Text 25"/>
-          <p:cNvSpPr/>
-          <p:nvPr/>
-        </p:nvSpPr>
-        <p:spPr>
-          <a:xfrm>
-            <a:off x="7159752" y="3858768"/>
-            <a:ext cx="4133088" cy="274320"/>
-          </a:xfrm>
-          <a:prstGeom prst="rect">
-            <a:avLst/>
-          </a:prstGeom>
-          <a:noFill/>
-          <a:ln/>
-        </p:spPr>
-        <p:txBody>
-          <a:bodyPr wrap="square" lIns="0" tIns="0" rIns="0" bIns="0" rtlCol="0" anchor="ctr"/>
-          <a:lstStyle/>
-          <a:p>
-            <a:pPr indent="0" marL="0">
-              <a:buNone/>
-            </a:pPr>
-            <a:r>
-              <a:rPr lang="en-US" sz="1500" b="1" dirty="0">
-                <a:solidFill>
-                  <a:srgbClr val="171B23"/>
-                </a:solidFill>
-                <a:latin typeface="Calibri" pitchFamily="34" charset="0"/>
-                <a:ea typeface="Calibri" pitchFamily="34" charset="-122"/>
-                <a:cs typeface="Calibri" pitchFamily="34" charset="-120"/>
-              </a:rPr>
-              <a:t>A defined task lifecycle</a:t>
-            </a:r>
-            <a:endParaRPr lang="en-US" sz="1500" dirty="0"/>
-          </a:p>
-        </p:txBody>
-      </p:sp>
-      <p:sp>
-        <p:nvSpPr>
-          <p:cNvPr id="35" name="Text 26"/>
-          <p:cNvSpPr/>
-          <p:nvPr/>
-        </p:nvSpPr>
-        <p:spPr>
-          <a:xfrm>
-            <a:off x="7159752" y="4123944"/>
-            <a:ext cx="4133088" cy="457200"/>
-          </a:xfrm>
-          <a:prstGeom prst="rect">
-            <a:avLst/>
-          </a:prstGeom>
-          <a:noFill/>
-          <a:ln/>
-        </p:spPr>
-        <p:txBody>
-          <a:bodyPr wrap="square" lIns="0" tIns="0" rIns="0" bIns="0" rtlCol="0" anchor="t"/>
-          <a:lstStyle/>
-          <a:p>
-            <a:pPr indent="0" marL="0">
-              <a:buNone/>
-            </a:pPr>
-            <a:r>
-              <a:rPr lang="en-US" sz="1150" dirty="0">
-                <a:solidFill>
-                  <a:srgbClr val="5B6472"/>
-                </a:solidFill>
-                <a:latin typeface="Calibri" pitchFamily="34" charset="0"/>
-                <a:ea typeface="Calibri" pitchFamily="34" charset="-122"/>
-                <a:cs typeface="Calibri" pitchFamily="34" charset="-120"/>
-              </a:rPr>
-              <a:t>Assign → Accept → Clarify → Update → Complete</a:t>
-            </a:r>
-            <a:endParaRPr lang="en-US" sz="1150" dirty="0"/>
-          </a:p>
-        </p:txBody>
-      </p:sp>
-      <p:sp>
-        <p:nvSpPr>
-          <p:cNvPr id="36" name="Shape 27"/>
-          <p:cNvSpPr/>
-          <p:nvPr/>
-        </p:nvSpPr>
-        <p:spPr>
-          <a:xfrm>
-            <a:off x="6537960" y="4754880"/>
-            <a:ext cx="457200" cy="457200"/>
-          </a:xfrm>
-          <a:prstGeom prst="ellipse">
-            <a:avLst/>
-          </a:prstGeom>
-          <a:solidFill>
-            <a:srgbClr val="4F46E5"/>
-          </a:solidFill>
-          <a:ln/>
-        </p:spPr>
-      </p:sp>
-      <p:pic>
-        <p:nvPicPr>
-          <p:cNvPr id="37" name="Image 7" descr="preencoded.png">    </p:cNvPr>
-          <p:cNvPicPr>
-            <a:picLocks noChangeAspect="1"/>
-          </p:cNvPicPr>
-          <p:nvPr/>
-        </p:nvPicPr>
-        <p:blipFill>
-          <a:blip r:embed="rId8"/>
-          <a:stretch>
-            <a:fillRect/>
-          </a:stretch>
-        </p:blipFill>
-        <p:spPr>
-          <a:xfrm>
             <a:off x="6656832" y="4873752"/>
             <a:ext cx="219456" cy="219456"/>
           </a:xfrm>
@@ -6135,7 +6075,7 @@
           <a:bodyPr wrap="square" lIns="0" tIns="0" rIns="0" bIns="0" rtlCol="0" anchor="ctr"/>
           <a:lstStyle/>
           <a:p>
-            <a:pPr indent="0" marL="0">
+            <a:pPr marL="0" indent="0">
               <a:buNone/>
             </a:pPr>
             <a:r>
@@ -6174,7 +6114,7 @@
           <a:bodyPr wrap="square" lIns="0" tIns="0" rIns="0" bIns="0" rtlCol="0" anchor="t"/>
           <a:lstStyle/>
           <a:p>
-            <a:pPr indent="0" marL="0">
+            <a:pPr marL="0" indent="0">
               <a:buNone/>
             </a:pPr>
             <a:r>
@@ -6213,7 +6153,7 @@
           <a:bodyPr wrap="square" lIns="0" tIns="0" rIns="0" bIns="0" rtlCol="0" anchor="ctr"/>
           <a:lstStyle/>
           <a:p>
-            <a:pPr indent="0" marL="0">
+            <a:pPr marL="0" indent="0">
               <a:buNone/>
             </a:pPr>
             <a:r>
@@ -6252,7 +6192,7 @@
           <a:bodyPr wrap="square" lIns="0" tIns="0" rIns="0" bIns="0" rtlCol="0" anchor="ctr"/>
           <a:lstStyle/>
           <a:p>
-            <a:pPr algn="r" indent="0" marL="0">
+            <a:pPr marL="0" indent="0" algn="r">
               <a:buNone/>
             </a:pPr>
             <a:r>
@@ -6286,6 +6226,7 @@
         <a:solidFill>
           <a:srgbClr val="FFFFFF"/>
         </a:solidFill>
+        <a:effectLst/>
       </p:bgPr>
     </p:bg>
     <p:spTree>
@@ -6323,11 +6264,11 @@
           <a:bodyPr wrap="square" lIns="0" tIns="0" rIns="0" bIns="0" rtlCol="0" anchor="ctr"/>
           <a:lstStyle/>
           <a:p>
-            <a:pPr indent="0" marL="0">
-              <a:buNone/>
-            </a:pPr>
-            <a:r>
-              <a:rPr lang="en-US" sz="1200" b="1" spc="200" kern="0" dirty="0">
+            <a:pPr marL="0" indent="0">
+              <a:buNone/>
+            </a:pPr>
+            <a:r>
+              <a:rPr lang="en-US" sz="1200" b="1" kern="0" spc="200" dirty="0">
                 <a:solidFill>
                   <a:srgbClr val="4F46E5"/>
                 </a:solidFill>
@@ -6362,7 +6303,7 @@
           <a:bodyPr wrap="square" lIns="0" tIns="0" rIns="0" bIns="0" rtlCol="0" anchor="ctr"/>
           <a:lstStyle/>
           <a:p>
-            <a:pPr indent="0" marL="0">
+            <a:pPr marL="0" indent="0">
               <a:buNone/>
             </a:pPr>
             <a:r>
@@ -6429,14 +6370,14 @@
       </p:sp>
       <p:pic>
         <p:nvPicPr>
-          <p:cNvPr id="6" name="Image 0" descr="preencoded.png">    </p:cNvPr>
+          <p:cNvPr id="6" name="Image 0" descr="preencoded.png"/>
           <p:cNvPicPr>
             <a:picLocks noChangeAspect="1"/>
           </p:cNvPicPr>
           <p:nvPr/>
         </p:nvPicPr>
         <p:blipFill>
-          <a:blip r:embed="rId1"/>
+          <a:blip r:embed="rId3"/>
           <a:stretch>
             <a:fillRect/>
           </a:stretch>
@@ -6472,7 +6413,7 @@
           <a:bodyPr wrap="square" lIns="0" tIns="0" rIns="0" bIns="0" rtlCol="0" anchor="ctr"/>
           <a:lstStyle/>
           <a:p>
-            <a:pPr indent="0" marL="0">
+            <a:pPr marL="0" indent="0">
               <a:buNone/>
             </a:pPr>
             <a:r>
@@ -6511,7 +6452,7 @@
           <a:bodyPr wrap="square" lIns="0" tIns="0" rIns="0" bIns="0" rtlCol="0" anchor="ctr"/>
           <a:lstStyle/>
           <a:p>
-            <a:pPr indent="0" marL="0">
+            <a:pPr marL="0" indent="0">
               <a:buNone/>
             </a:pPr>
             <a:r>
@@ -6578,14 +6519,14 @@
       </p:sp>
       <p:pic>
         <p:nvPicPr>
-          <p:cNvPr id="11" name="Image 1" descr="preencoded.png">    </p:cNvPr>
+          <p:cNvPr id="11" name="Image 1" descr="preencoded.png"/>
           <p:cNvPicPr>
             <a:picLocks noChangeAspect="1"/>
           </p:cNvPicPr>
           <p:nvPr/>
         </p:nvPicPr>
         <p:blipFill>
-          <a:blip r:embed="rId2"/>
+          <a:blip r:embed="rId4"/>
           <a:stretch>
             <a:fillRect/>
           </a:stretch>
@@ -6621,7 +6562,7 @@
           <a:bodyPr wrap="square" lIns="0" tIns="0" rIns="0" bIns="0" rtlCol="0" anchor="ctr"/>
           <a:lstStyle/>
           <a:p>
-            <a:pPr indent="0" marL="0">
+            <a:pPr marL="0" indent="0">
               <a:buNone/>
             </a:pPr>
             <a:r>
@@ -6660,7 +6601,7 @@
           <a:bodyPr wrap="square" lIns="0" tIns="0" rIns="0" bIns="0" rtlCol="0" anchor="ctr"/>
           <a:lstStyle/>
           <a:p>
-            <a:pPr indent="0" marL="0">
+            <a:pPr marL="0" indent="0">
               <a:buNone/>
             </a:pPr>
             <a:r>
@@ -6727,14 +6668,14 @@
       </p:sp>
       <p:pic>
         <p:nvPicPr>
-          <p:cNvPr id="16" name="Image 2" descr="preencoded.png">    </p:cNvPr>
+          <p:cNvPr id="16" name="Image 2" descr="preencoded.png"/>
           <p:cNvPicPr>
             <a:picLocks noChangeAspect="1"/>
           </p:cNvPicPr>
           <p:nvPr/>
         </p:nvPicPr>
         <p:blipFill>
-          <a:blip r:embed="rId3"/>
+          <a:blip r:embed="rId5"/>
           <a:stretch>
             <a:fillRect/>
           </a:stretch>
@@ -6770,7 +6711,7 @@
           <a:bodyPr wrap="square" lIns="0" tIns="0" rIns="0" bIns="0" rtlCol="0" anchor="ctr"/>
           <a:lstStyle/>
           <a:p>
-            <a:pPr indent="0" marL="0">
+            <a:pPr marL="0" indent="0">
               <a:buNone/>
             </a:pPr>
             <a:r>
@@ -6809,7 +6750,7 @@
           <a:bodyPr wrap="square" lIns="0" tIns="0" rIns="0" bIns="0" rtlCol="0" anchor="ctr"/>
           <a:lstStyle/>
           <a:p>
-            <a:pPr indent="0" marL="0">
+            <a:pPr marL="0" indent="0">
               <a:buNone/>
             </a:pPr>
             <a:r>
@@ -6876,14 +6817,14 @@
       </p:sp>
       <p:pic>
         <p:nvPicPr>
-          <p:cNvPr id="21" name="Image 3" descr="preencoded.png">    </p:cNvPr>
+          <p:cNvPr id="21" name="Image 3" descr="preencoded.png"/>
           <p:cNvPicPr>
             <a:picLocks noChangeAspect="1"/>
           </p:cNvPicPr>
           <p:nvPr/>
         </p:nvPicPr>
         <p:blipFill>
-          <a:blip r:embed="rId4"/>
+          <a:blip r:embed="rId6"/>
           <a:stretch>
             <a:fillRect/>
           </a:stretch>
@@ -6919,7 +6860,7 @@
           <a:bodyPr wrap="square" lIns="0" tIns="0" rIns="0" bIns="0" rtlCol="0" anchor="ctr"/>
           <a:lstStyle/>
           <a:p>
-            <a:pPr indent="0" marL="0">
+            <a:pPr marL="0" indent="0">
               <a:buNone/>
             </a:pPr>
             <a:r>
@@ -6958,7 +6899,7 @@
           <a:bodyPr wrap="square" lIns="0" tIns="0" rIns="0" bIns="0" rtlCol="0" anchor="ctr"/>
           <a:lstStyle/>
           <a:p>
-            <a:pPr indent="0" marL="0">
+            <a:pPr marL="0" indent="0">
               <a:buNone/>
             </a:pPr>
             <a:r>
@@ -7025,14 +6966,14 @@
       </p:sp>
       <p:pic>
         <p:nvPicPr>
-          <p:cNvPr id="26" name="Image 4" descr="preencoded.png">    </p:cNvPr>
+          <p:cNvPr id="26" name="Image 4" descr="preencoded.png"/>
           <p:cNvPicPr>
             <a:picLocks noChangeAspect="1"/>
           </p:cNvPicPr>
           <p:nvPr/>
         </p:nvPicPr>
         <p:blipFill>
-          <a:blip r:embed="rId5"/>
+          <a:blip r:embed="rId7"/>
           <a:stretch>
             <a:fillRect/>
           </a:stretch>
@@ -7068,7 +7009,7 @@
           <a:bodyPr wrap="square" lIns="0" tIns="0" rIns="0" bIns="0" rtlCol="0" anchor="ctr"/>
           <a:lstStyle/>
           <a:p>
-            <a:pPr indent="0" marL="0">
+            <a:pPr marL="0" indent="0">
               <a:buNone/>
             </a:pPr>
             <a:r>
@@ -7107,7 +7048,7 @@
           <a:bodyPr wrap="square" lIns="0" tIns="0" rIns="0" bIns="0" rtlCol="0" anchor="ctr"/>
           <a:lstStyle/>
           <a:p>
-            <a:pPr indent="0" marL="0">
+            <a:pPr marL="0" indent="0">
               <a:buNone/>
             </a:pPr>
             <a:r>
@@ -7146,7 +7087,7 @@
           <a:bodyPr wrap="square" lIns="0" tIns="0" rIns="0" bIns="0" rtlCol="0" anchor="ctr"/>
           <a:lstStyle/>
           <a:p>
-            <a:pPr indent="0" marL="0">
+            <a:pPr marL="0" indent="0">
               <a:buNone/>
             </a:pPr>
             <a:r>
@@ -7185,7 +7126,7 @@
           <a:bodyPr wrap="square" lIns="0" tIns="0" rIns="0" bIns="0" rtlCol="0" anchor="ctr"/>
           <a:lstStyle/>
           <a:p>
-            <a:pPr algn="r" indent="0" marL="0">
+            <a:pPr marL="0" indent="0" algn="r">
               <a:buNone/>
             </a:pPr>
             <a:r>
@@ -7219,6 +7160,7 @@
         <a:solidFill>
           <a:srgbClr val="FFFFFF"/>
         </a:solidFill>
+        <a:effectLst/>
       </p:bgPr>
     </p:bg>
     <p:spTree>
@@ -7256,11 +7198,11 @@
           <a:bodyPr wrap="square" lIns="0" tIns="0" rIns="0" bIns="0" rtlCol="0" anchor="ctr"/>
           <a:lstStyle/>
           <a:p>
-            <a:pPr indent="0" marL="0">
-              <a:buNone/>
-            </a:pPr>
-            <a:r>
-              <a:rPr lang="en-US" sz="1200" b="1" spc="200" kern="0" dirty="0">
+            <a:pPr marL="0" indent="0">
+              <a:buNone/>
+            </a:pPr>
+            <a:r>
+              <a:rPr lang="en-US" sz="1200" b="1" kern="0" spc="200" dirty="0">
                 <a:solidFill>
                   <a:srgbClr val="4F46E5"/>
                 </a:solidFill>
@@ -7295,7 +7237,7 @@
           <a:bodyPr wrap="square" lIns="0" tIns="0" rIns="0" bIns="0" rtlCol="0" anchor="ctr"/>
           <a:lstStyle/>
           <a:p>
-            <a:pPr indent="0" marL="0">
+            <a:pPr marL="0" indent="0">
               <a:buNone/>
             </a:pPr>
             <a:r>
@@ -7362,14 +7304,14 @@
       </p:sp>
       <p:pic>
         <p:nvPicPr>
-          <p:cNvPr id="6" name="Image 0" descr="preencoded.png">    </p:cNvPr>
+          <p:cNvPr id="6" name="Image 0" descr="preencoded.png"/>
           <p:cNvPicPr>
             <a:picLocks noChangeAspect="1"/>
           </p:cNvPicPr>
           <p:nvPr/>
         </p:nvPicPr>
         <p:blipFill>
-          <a:blip r:embed="rId1"/>
+          <a:blip r:embed="rId3"/>
           <a:stretch>
             <a:fillRect/>
           </a:stretch>
@@ -7405,7 +7347,7 @@
           <a:bodyPr wrap="square" lIns="0" tIns="0" rIns="0" bIns="0" rtlCol="0" anchor="ctr"/>
           <a:lstStyle/>
           <a:p>
-            <a:pPr indent="0" marL="0">
+            <a:pPr marL="0" indent="0">
               <a:buNone/>
             </a:pPr>
             <a:r>
@@ -7557,14 +7499,14 @@
       </p:sp>
       <p:pic>
         <p:nvPicPr>
-          <p:cNvPr id="11" name="Image 1" descr="preencoded.png">    </p:cNvPr>
+          <p:cNvPr id="11" name="Image 1" descr="preencoded.png"/>
           <p:cNvPicPr>
             <a:picLocks noChangeAspect="1"/>
           </p:cNvPicPr>
           <p:nvPr/>
         </p:nvPicPr>
         <p:blipFill>
-          <a:blip r:embed="rId2"/>
+          <a:blip r:embed="rId4"/>
           <a:stretch>
             <a:fillRect/>
           </a:stretch>
@@ -7600,7 +7542,7 @@
           <a:bodyPr wrap="square" lIns="0" tIns="0" rIns="0" bIns="0" rtlCol="0" anchor="ctr"/>
           <a:lstStyle/>
           <a:p>
-            <a:pPr indent="0" marL="0">
+            <a:pPr marL="0" indent="0">
               <a:buNone/>
             </a:pPr>
             <a:r>
@@ -7752,14 +7694,14 @@
       </p:sp>
       <p:pic>
         <p:nvPicPr>
-          <p:cNvPr id="16" name="Image 2" descr="preencoded.png">    </p:cNvPr>
+          <p:cNvPr id="16" name="Image 2" descr="preencoded.png"/>
           <p:cNvPicPr>
             <a:picLocks noChangeAspect="1"/>
           </p:cNvPicPr>
           <p:nvPr/>
         </p:nvPicPr>
         <p:blipFill>
-          <a:blip r:embed="rId3"/>
+          <a:blip r:embed="rId5"/>
           <a:stretch>
             <a:fillRect/>
           </a:stretch>
@@ -7795,7 +7737,7 @@
           <a:bodyPr wrap="square" lIns="0" tIns="0" rIns="0" bIns="0" rtlCol="0" anchor="ctr"/>
           <a:lstStyle/>
           <a:p>
-            <a:pPr indent="0" marL="0">
+            <a:pPr marL="0" indent="0">
               <a:buNone/>
             </a:pPr>
             <a:r>
@@ -7926,14 +7868,14 @@
       </p:sp>
       <p:pic>
         <p:nvPicPr>
-          <p:cNvPr id="21" name="Image 3" descr="preencoded.png">    </p:cNvPr>
+          <p:cNvPr id="21" name="Image 3" descr="preencoded.png"/>
           <p:cNvPicPr>
             <a:picLocks noChangeAspect="1"/>
           </p:cNvPicPr>
           <p:nvPr/>
         </p:nvPicPr>
         <p:blipFill>
-          <a:blip r:embed="rId4"/>
+          <a:blip r:embed="rId6"/>
           <a:stretch>
             <a:fillRect/>
           </a:stretch>
@@ -7969,7 +7911,7 @@
           <a:bodyPr wrap="square" lIns="0" tIns="0" rIns="0" bIns="0" rtlCol="0" anchor="ctr"/>
           <a:lstStyle/>
           <a:p>
-            <a:pPr indent="0" marL="0">
+            <a:pPr marL="0" indent="0">
               <a:buNone/>
             </a:pPr>
             <a:r>
@@ -8100,14 +8042,14 @@
       </p:sp>
       <p:pic>
         <p:nvPicPr>
-          <p:cNvPr id="26" name="Image 4" descr="preencoded.png">    </p:cNvPr>
+          <p:cNvPr id="26" name="Image 4" descr="preencoded.png"/>
           <p:cNvPicPr>
             <a:picLocks noChangeAspect="1"/>
           </p:cNvPicPr>
           <p:nvPr/>
         </p:nvPicPr>
         <p:blipFill>
-          <a:blip r:embed="rId5"/>
+          <a:blip r:embed="rId7"/>
           <a:stretch>
             <a:fillRect/>
           </a:stretch>
@@ -8143,7 +8085,7 @@
           <a:bodyPr wrap="square" lIns="0" tIns="0" rIns="0" bIns="0" rtlCol="0" anchor="ctr"/>
           <a:lstStyle/>
           <a:p>
-            <a:pPr indent="0" marL="0">
+            <a:pPr marL="0" indent="0">
               <a:buNone/>
             </a:pPr>
             <a:r>
@@ -8274,14 +8216,14 @@
       </p:sp>
       <p:pic>
         <p:nvPicPr>
-          <p:cNvPr id="31" name="Image 5" descr="preencoded.png">    </p:cNvPr>
+          <p:cNvPr id="31" name="Image 5" descr="preencoded.png"/>
           <p:cNvPicPr>
             <a:picLocks noChangeAspect="1"/>
           </p:cNvPicPr>
           <p:nvPr/>
         </p:nvPicPr>
         <p:blipFill>
-          <a:blip r:embed="rId6"/>
+          <a:blip r:embed="rId8"/>
           <a:stretch>
             <a:fillRect/>
           </a:stretch>
@@ -8317,7 +8259,7 @@
           <a:bodyPr wrap="square" lIns="0" tIns="0" rIns="0" bIns="0" rtlCol="0" anchor="ctr"/>
           <a:lstStyle/>
           <a:p>
-            <a:pPr indent="0" marL="0">
+            <a:pPr marL="0" indent="0">
               <a:buNone/>
             </a:pPr>
             <a:r>
@@ -8441,7 +8383,7 @@
           <a:bodyPr wrap="square" lIns="0" tIns="0" rIns="0" bIns="0" rtlCol="0" anchor="ctr"/>
           <a:lstStyle/>
           <a:p>
-            <a:pPr indent="0" marL="0">
+            <a:pPr marL="0" indent="0">
               <a:buNone/>
             </a:pPr>
             <a:r>
@@ -8480,7 +8422,7 @@
           <a:bodyPr wrap="square" lIns="0" tIns="0" rIns="0" bIns="0" rtlCol="0" anchor="ctr"/>
           <a:lstStyle/>
           <a:p>
-            <a:pPr algn="r" indent="0" marL="0">
+            <a:pPr marL="0" indent="0" algn="r">
               <a:buNone/>
             </a:pPr>
             <a:r>
@@ -8514,6 +8456,7 @@
         <a:solidFill>
           <a:srgbClr val="FFFFFF"/>
         </a:solidFill>
+        <a:effectLst/>
       </p:bgPr>
     </p:bg>
     <p:spTree>
@@ -8551,11 +8494,11 @@
           <a:bodyPr wrap="square" lIns="0" tIns="0" rIns="0" bIns="0" rtlCol="0" anchor="ctr"/>
           <a:lstStyle/>
           <a:p>
-            <a:pPr indent="0" marL="0">
-              <a:buNone/>
-            </a:pPr>
-            <a:r>
-              <a:rPr lang="en-US" sz="1200" b="1" spc="200" kern="0" dirty="0">
+            <a:pPr marL="0" indent="0">
+              <a:buNone/>
+            </a:pPr>
+            <a:r>
+              <a:rPr lang="en-US" sz="1200" b="1" kern="0" spc="200" dirty="0">
                 <a:solidFill>
                   <a:srgbClr val="4F46E5"/>
                 </a:solidFill>
@@ -8590,7 +8533,7 @@
           <a:bodyPr wrap="square" lIns="0" tIns="0" rIns="0" bIns="0" rtlCol="0" anchor="ctr"/>
           <a:lstStyle/>
           <a:p>
-            <a:pPr indent="0" marL="0">
+            <a:pPr marL="0" indent="0">
               <a:buNone/>
             </a:pPr>
             <a:r>
@@ -8651,7 +8594,7 @@
           <a:bodyPr wrap="square" lIns="0" tIns="0" rIns="0" bIns="0" rtlCol="0" anchor="ctr"/>
           <a:lstStyle/>
           <a:p>
-            <a:pPr indent="0" marL="0">
+            <a:pPr marL="0" indent="0">
               <a:buNone/>
             </a:pPr>
             <a:r>
@@ -8690,7 +8633,7 @@
           <a:bodyPr wrap="square" lIns="0" tIns="0" rIns="0" bIns="0" rtlCol="0" anchor="ctr"/>
           <a:lstStyle/>
           <a:p>
-            <a:pPr indent="0" marL="0">
+            <a:pPr marL="0" indent="0">
               <a:buNone/>
             </a:pPr>
             <a:r>
@@ -8710,255 +8653,7 @@
       </p:sp>
       <p:pic>
         <p:nvPicPr>
-          <p:cNvPr id="7" name="Image 0" descr="preencoded.png">    </p:cNvPr>
-          <p:cNvPicPr>
-            <a:picLocks noChangeAspect="1"/>
-          </p:cNvPicPr>
-          <p:nvPr/>
-        </p:nvPicPr>
-        <p:blipFill>
-          <a:blip r:embed="rId1"/>
-          <a:stretch>
-            <a:fillRect/>
-          </a:stretch>
-        </p:blipFill>
-        <p:spPr>
-          <a:xfrm>
-            <a:off x="4718304" y="2331720"/>
-            <a:ext cx="256032" cy="256032"/>
-          </a:xfrm>
-          <a:prstGeom prst="rect">
-            <a:avLst/>
-          </a:prstGeom>
-        </p:spPr>
-      </p:pic>
-      <p:sp>
-        <p:nvSpPr>
-          <p:cNvPr id="8" name="Shape 5"/>
-          <p:cNvSpPr/>
-          <p:nvPr/>
-        </p:nvSpPr>
-        <p:spPr>
-          <a:xfrm>
-            <a:off x="548640" y="2496312"/>
-            <a:ext cx="8595360" cy="841248"/>
-          </a:xfrm>
-          <a:prstGeom prst="roundRect">
-            <a:avLst>
-              <a:gd name="adj" fmla="val 8696"/>
-            </a:avLst>
-          </a:prstGeom>
-          <a:solidFill>
-            <a:srgbClr val="4F46E5"/>
-          </a:solidFill>
-          <a:ln/>
-        </p:spPr>
-      </p:sp>
-      <p:sp>
-        <p:nvSpPr>
-          <p:cNvPr id="9" name="Text 6"/>
-          <p:cNvSpPr/>
-          <p:nvPr/>
-        </p:nvSpPr>
-        <p:spPr>
-          <a:xfrm>
-            <a:off x="822960" y="2587752"/>
-            <a:ext cx="2377440" cy="658368"/>
-          </a:xfrm>
-          <a:prstGeom prst="rect">
-            <a:avLst/>
-          </a:prstGeom>
-          <a:noFill/>
-          <a:ln/>
-        </p:spPr>
-        <p:txBody>
-          <a:bodyPr wrap="square" lIns="0" tIns="0" rIns="0" bIns="0" rtlCol="0" anchor="ctr"/>
-          <a:lstStyle/>
-          <a:p>
-            <a:pPr indent="0" marL="0">
-              <a:buNone/>
-            </a:pPr>
-            <a:r>
-              <a:rPr lang="en-US" sz="1600" b="1" dirty="0">
-                <a:solidFill>
-                  <a:srgbClr val="FFFFFF"/>
-                </a:solidFill>
-                <a:latin typeface="Cambria" pitchFamily="34" charset="0"/>
-                <a:ea typeface="Cambria" pitchFamily="34" charset="-122"/>
-                <a:cs typeface="Cambria" pitchFamily="34" charset="-120"/>
-              </a:rPr>
-              <a:t>API</a:t>
-            </a:r>
-            <a:endParaRPr lang="en-US" sz="1600" dirty="0"/>
-          </a:p>
-        </p:txBody>
-      </p:sp>
-      <p:sp>
-        <p:nvSpPr>
-          <p:cNvPr id="10" name="Text 7"/>
-          <p:cNvSpPr/>
-          <p:nvPr/>
-        </p:nvSpPr>
-        <p:spPr>
-          <a:xfrm>
-            <a:off x="3291840" y="2587752"/>
-            <a:ext cx="5577840" cy="658368"/>
-          </a:xfrm>
-          <a:prstGeom prst="rect">
-            <a:avLst/>
-          </a:prstGeom>
-          <a:noFill/>
-          <a:ln/>
-        </p:spPr>
-        <p:txBody>
-          <a:bodyPr wrap="square" lIns="0" tIns="0" rIns="0" bIns="0" rtlCol="0" anchor="ctr"/>
-          <a:lstStyle/>
-          <a:p>
-            <a:pPr indent="0" marL="0">
-              <a:buNone/>
-            </a:pPr>
-            <a:r>
-              <a:rPr lang="en-US" sz="1150" dirty="0">
-                <a:solidFill>
-                  <a:srgbClr val="E4E2FB"/>
-                </a:solidFill>
-                <a:latin typeface="Calibri" pitchFamily="34" charset="0"/>
-                <a:ea typeface="Calibri" pitchFamily="34" charset="-122"/>
-                <a:cs typeface="Calibri" pitchFamily="34" charset="-120"/>
-              </a:rPr>
-              <a:t>ASP.NET Core Controllers · JWT Middleware · Validation Filter</a:t>
-            </a:r>
-            <a:endParaRPr lang="en-US" sz="1150" dirty="0"/>
-          </a:p>
-        </p:txBody>
-      </p:sp>
-      <p:pic>
-        <p:nvPicPr>
-          <p:cNvPr id="11" name="Image 1" descr="preencoded.png">    </p:cNvPr>
-          <p:cNvPicPr>
-            <a:picLocks noChangeAspect="1"/>
-          </p:cNvPicPr>
-          <p:nvPr/>
-        </p:nvPicPr>
-        <p:blipFill>
-          <a:blip r:embed="rId2"/>
-          <a:stretch>
-            <a:fillRect/>
-          </a:stretch>
-        </p:blipFill>
-        <p:spPr>
-          <a:xfrm>
-            <a:off x="4718304" y="3319272"/>
-            <a:ext cx="256032" cy="256032"/>
-          </a:xfrm>
-          <a:prstGeom prst="rect">
-            <a:avLst/>
-          </a:prstGeom>
-        </p:spPr>
-      </p:pic>
-      <p:sp>
-        <p:nvSpPr>
-          <p:cNvPr id="12" name="Shape 8"/>
-          <p:cNvSpPr/>
-          <p:nvPr/>
-        </p:nvSpPr>
-        <p:spPr>
-          <a:xfrm>
-            <a:off x="548640" y="3483864"/>
-            <a:ext cx="8595360" cy="841248"/>
-          </a:xfrm>
-          <a:prstGeom prst="roundRect">
-            <a:avLst>
-              <a:gd name="adj" fmla="val 8696"/>
-            </a:avLst>
-          </a:prstGeom>
-          <a:solidFill>
-            <a:srgbClr val="4338CA"/>
-          </a:solidFill>
-          <a:ln/>
-        </p:spPr>
-      </p:sp>
-      <p:sp>
-        <p:nvSpPr>
-          <p:cNvPr id="13" name="Text 9"/>
-          <p:cNvSpPr/>
-          <p:nvPr/>
-        </p:nvSpPr>
-        <p:spPr>
-          <a:xfrm>
-            <a:off x="822960" y="3575304"/>
-            <a:ext cx="2377440" cy="658368"/>
-          </a:xfrm>
-          <a:prstGeom prst="rect">
-            <a:avLst/>
-          </a:prstGeom>
-          <a:noFill/>
-          <a:ln/>
-        </p:spPr>
-        <p:txBody>
-          <a:bodyPr wrap="square" lIns="0" tIns="0" rIns="0" bIns="0" rtlCol="0" anchor="ctr"/>
-          <a:lstStyle/>
-          <a:p>
-            <a:pPr indent="0" marL="0">
-              <a:buNone/>
-            </a:pPr>
-            <a:r>
-              <a:rPr lang="en-US" sz="1600" b="1" dirty="0">
-                <a:solidFill>
-                  <a:srgbClr val="FFFFFF"/>
-                </a:solidFill>
-                <a:latin typeface="Cambria" pitchFamily="34" charset="0"/>
-                <a:ea typeface="Cambria" pitchFamily="34" charset="-122"/>
-                <a:cs typeface="Cambria" pitchFamily="34" charset="-120"/>
-              </a:rPr>
-              <a:t>Application</a:t>
-            </a:r>
-            <a:endParaRPr lang="en-US" sz="1600" dirty="0"/>
-          </a:p>
-        </p:txBody>
-      </p:sp>
-      <p:sp>
-        <p:nvSpPr>
-          <p:cNvPr id="14" name="Text 10"/>
-          <p:cNvSpPr/>
-          <p:nvPr/>
-        </p:nvSpPr>
-        <p:spPr>
-          <a:xfrm>
-            <a:off x="3291840" y="3575304"/>
-            <a:ext cx="5577840" cy="658368"/>
-          </a:xfrm>
-          <a:prstGeom prst="rect">
-            <a:avLst/>
-          </a:prstGeom>
-          <a:noFill/>
-          <a:ln/>
-        </p:spPr>
-        <p:txBody>
-          <a:bodyPr wrap="square" lIns="0" tIns="0" rIns="0" bIns="0" rtlCol="0" anchor="ctr"/>
-          <a:lstStyle/>
-          <a:p>
-            <a:pPr indent="0" marL="0">
-              <a:buNone/>
-            </a:pPr>
-            <a:r>
-              <a:rPr lang="en-US" sz="1150" dirty="0">
-                <a:solidFill>
-                  <a:srgbClr val="E4E2FB"/>
-                </a:solidFill>
-                <a:latin typeface="Calibri" pitchFamily="34" charset="0"/>
-                <a:ea typeface="Calibri" pitchFamily="34" charset="-122"/>
-                <a:cs typeface="Calibri" pitchFamily="34" charset="-120"/>
-              </a:rPr>
-              <a:t>Services · DTOs · AutoMapper · FluentValidation</a:t>
-            </a:r>
-            <a:endParaRPr lang="en-US" sz="1150" dirty="0"/>
-          </a:p>
-        </p:txBody>
-      </p:sp>
-      <p:pic>
-        <p:nvPicPr>
-          <p:cNvPr id="15" name="Image 2" descr="preencoded.png">    </p:cNvPr>
+          <p:cNvPr id="7" name="Image 0" descr="preencoded.png"/>
           <p:cNvPicPr>
             <a:picLocks noChangeAspect="1"/>
           </p:cNvPicPr>
@@ -8972,7 +8667,7 @@
         </p:blipFill>
         <p:spPr>
           <a:xfrm>
-            <a:off x="4718304" y="4306824"/>
+            <a:off x="4718304" y="2331720"/>
             <a:ext cx="256032" cy="256032"/>
           </a:xfrm>
           <a:prstGeom prst="rect">
@@ -8982,13 +8677,13 @@
       </p:pic>
       <p:sp>
         <p:nvSpPr>
-          <p:cNvPr id="16" name="Shape 11"/>
-          <p:cNvSpPr/>
-          <p:nvPr/>
-        </p:nvSpPr>
-        <p:spPr>
-          <a:xfrm>
-            <a:off x="548640" y="4471416"/>
+          <p:cNvPr id="8" name="Shape 5"/>
+          <p:cNvSpPr/>
+          <p:nvPr/>
+        </p:nvSpPr>
+        <p:spPr>
+          <a:xfrm>
+            <a:off x="548640" y="2496312"/>
             <a:ext cx="8595360" cy="841248"/>
           </a:xfrm>
           <a:prstGeom prst="roundRect">
@@ -8997,20 +8692,20 @@
             </a:avLst>
           </a:prstGeom>
           <a:solidFill>
-            <a:srgbClr val="3730A3"/>
+            <a:srgbClr val="4F46E5"/>
           </a:solidFill>
           <a:ln/>
         </p:spPr>
       </p:sp>
       <p:sp>
         <p:nvSpPr>
-          <p:cNvPr id="17" name="Text 12"/>
-          <p:cNvSpPr/>
-          <p:nvPr/>
-        </p:nvSpPr>
-        <p:spPr>
-          <a:xfrm>
-            <a:off x="822960" y="4562856"/>
+          <p:cNvPr id="9" name="Text 6"/>
+          <p:cNvSpPr/>
+          <p:nvPr/>
+        </p:nvSpPr>
+        <p:spPr>
+          <a:xfrm>
+            <a:off x="822960" y="2587752"/>
             <a:ext cx="2377440" cy="658368"/>
           </a:xfrm>
           <a:prstGeom prst="rect">
@@ -9023,7 +8718,7 @@
           <a:bodyPr wrap="square" lIns="0" tIns="0" rIns="0" bIns="0" rtlCol="0" anchor="ctr"/>
           <a:lstStyle/>
           <a:p>
-            <a:pPr indent="0" marL="0">
+            <a:pPr marL="0" indent="0">
               <a:buNone/>
             </a:pPr>
             <a:r>
@@ -9035,6 +8730,254 @@
                 <a:ea typeface="Cambria" pitchFamily="34" charset="-122"/>
                 <a:cs typeface="Cambria" pitchFamily="34" charset="-120"/>
               </a:rPr>
+              <a:t>API</a:t>
+            </a:r>
+            <a:endParaRPr lang="en-US" sz="1600" dirty="0"/>
+          </a:p>
+        </p:txBody>
+      </p:sp>
+      <p:sp>
+        <p:nvSpPr>
+          <p:cNvPr id="10" name="Text 7"/>
+          <p:cNvSpPr/>
+          <p:nvPr/>
+        </p:nvSpPr>
+        <p:spPr>
+          <a:xfrm>
+            <a:off x="3291840" y="2587752"/>
+            <a:ext cx="5577840" cy="658368"/>
+          </a:xfrm>
+          <a:prstGeom prst="rect">
+            <a:avLst/>
+          </a:prstGeom>
+          <a:noFill/>
+          <a:ln/>
+        </p:spPr>
+        <p:txBody>
+          <a:bodyPr wrap="square" lIns="0" tIns="0" rIns="0" bIns="0" rtlCol="0" anchor="ctr"/>
+          <a:lstStyle/>
+          <a:p>
+            <a:pPr marL="0" indent="0">
+              <a:buNone/>
+            </a:pPr>
+            <a:r>
+              <a:rPr lang="en-US" sz="1150" dirty="0">
+                <a:solidFill>
+                  <a:srgbClr val="E4E2FB"/>
+                </a:solidFill>
+                <a:latin typeface="Calibri" pitchFamily="34" charset="0"/>
+                <a:ea typeface="Calibri" pitchFamily="34" charset="-122"/>
+                <a:cs typeface="Calibri" pitchFamily="34" charset="-120"/>
+              </a:rPr>
+              <a:t>ASP.NET Core Controllers · JWT Middleware · Validation Filter</a:t>
+            </a:r>
+            <a:endParaRPr lang="en-US" sz="1150" dirty="0"/>
+          </a:p>
+        </p:txBody>
+      </p:sp>
+      <p:pic>
+        <p:nvPicPr>
+          <p:cNvPr id="11" name="Image 1" descr="preencoded.png"/>
+          <p:cNvPicPr>
+            <a:picLocks noChangeAspect="1"/>
+          </p:cNvPicPr>
+          <p:nvPr/>
+        </p:nvPicPr>
+        <p:blipFill>
+          <a:blip r:embed="rId3"/>
+          <a:stretch>
+            <a:fillRect/>
+          </a:stretch>
+        </p:blipFill>
+        <p:spPr>
+          <a:xfrm>
+            <a:off x="4718304" y="3319272"/>
+            <a:ext cx="256032" cy="256032"/>
+          </a:xfrm>
+          <a:prstGeom prst="rect">
+            <a:avLst/>
+          </a:prstGeom>
+        </p:spPr>
+      </p:pic>
+      <p:sp>
+        <p:nvSpPr>
+          <p:cNvPr id="12" name="Shape 8"/>
+          <p:cNvSpPr/>
+          <p:nvPr/>
+        </p:nvSpPr>
+        <p:spPr>
+          <a:xfrm>
+            <a:off x="548640" y="3483864"/>
+            <a:ext cx="8595360" cy="841248"/>
+          </a:xfrm>
+          <a:prstGeom prst="roundRect">
+            <a:avLst>
+              <a:gd name="adj" fmla="val 8696"/>
+            </a:avLst>
+          </a:prstGeom>
+          <a:solidFill>
+            <a:srgbClr val="4338CA"/>
+          </a:solidFill>
+          <a:ln/>
+        </p:spPr>
+      </p:sp>
+      <p:sp>
+        <p:nvSpPr>
+          <p:cNvPr id="13" name="Text 9"/>
+          <p:cNvSpPr/>
+          <p:nvPr/>
+        </p:nvSpPr>
+        <p:spPr>
+          <a:xfrm>
+            <a:off x="822960" y="3575304"/>
+            <a:ext cx="2377440" cy="658368"/>
+          </a:xfrm>
+          <a:prstGeom prst="rect">
+            <a:avLst/>
+          </a:prstGeom>
+          <a:noFill/>
+          <a:ln/>
+        </p:spPr>
+        <p:txBody>
+          <a:bodyPr wrap="square" lIns="0" tIns="0" rIns="0" bIns="0" rtlCol="0" anchor="ctr"/>
+          <a:lstStyle/>
+          <a:p>
+            <a:pPr marL="0" indent="0">
+              <a:buNone/>
+            </a:pPr>
+            <a:r>
+              <a:rPr lang="en-US" sz="1600" b="1" dirty="0">
+                <a:solidFill>
+                  <a:srgbClr val="FFFFFF"/>
+                </a:solidFill>
+                <a:latin typeface="Cambria" pitchFamily="34" charset="0"/>
+                <a:ea typeface="Cambria" pitchFamily="34" charset="-122"/>
+                <a:cs typeface="Cambria" pitchFamily="34" charset="-120"/>
+              </a:rPr>
+              <a:t>Application</a:t>
+            </a:r>
+            <a:endParaRPr lang="en-US" sz="1600" dirty="0"/>
+          </a:p>
+        </p:txBody>
+      </p:sp>
+      <p:sp>
+        <p:nvSpPr>
+          <p:cNvPr id="14" name="Text 10"/>
+          <p:cNvSpPr/>
+          <p:nvPr/>
+        </p:nvSpPr>
+        <p:spPr>
+          <a:xfrm>
+            <a:off x="3291840" y="3575304"/>
+            <a:ext cx="5577840" cy="658368"/>
+          </a:xfrm>
+          <a:prstGeom prst="rect">
+            <a:avLst/>
+          </a:prstGeom>
+          <a:noFill/>
+          <a:ln/>
+        </p:spPr>
+        <p:txBody>
+          <a:bodyPr wrap="square" lIns="0" tIns="0" rIns="0" bIns="0" rtlCol="0" anchor="ctr"/>
+          <a:lstStyle/>
+          <a:p>
+            <a:pPr marL="0" indent="0">
+              <a:buNone/>
+            </a:pPr>
+            <a:r>
+              <a:rPr lang="en-US" sz="1150" dirty="0">
+                <a:solidFill>
+                  <a:srgbClr val="E4E2FB"/>
+                </a:solidFill>
+                <a:latin typeface="Calibri" pitchFamily="34" charset="0"/>
+                <a:ea typeface="Calibri" pitchFamily="34" charset="-122"/>
+                <a:cs typeface="Calibri" pitchFamily="34" charset="-120"/>
+              </a:rPr>
+              <a:t>Services · DTOs · AutoMapper · FluentValidation</a:t>
+            </a:r>
+            <a:endParaRPr lang="en-US" sz="1150" dirty="0"/>
+          </a:p>
+        </p:txBody>
+      </p:sp>
+      <p:pic>
+        <p:nvPicPr>
+          <p:cNvPr id="15" name="Image 2" descr="preencoded.png"/>
+          <p:cNvPicPr>
+            <a:picLocks noChangeAspect="1"/>
+          </p:cNvPicPr>
+          <p:nvPr/>
+        </p:nvPicPr>
+        <p:blipFill>
+          <a:blip r:embed="rId3"/>
+          <a:stretch>
+            <a:fillRect/>
+          </a:stretch>
+        </p:blipFill>
+        <p:spPr>
+          <a:xfrm>
+            <a:off x="4718304" y="4306824"/>
+            <a:ext cx="256032" cy="256032"/>
+          </a:xfrm>
+          <a:prstGeom prst="rect">
+            <a:avLst/>
+          </a:prstGeom>
+        </p:spPr>
+      </p:pic>
+      <p:sp>
+        <p:nvSpPr>
+          <p:cNvPr id="16" name="Shape 11"/>
+          <p:cNvSpPr/>
+          <p:nvPr/>
+        </p:nvSpPr>
+        <p:spPr>
+          <a:xfrm>
+            <a:off x="548640" y="4471416"/>
+            <a:ext cx="8595360" cy="841248"/>
+          </a:xfrm>
+          <a:prstGeom prst="roundRect">
+            <a:avLst>
+              <a:gd name="adj" fmla="val 8696"/>
+            </a:avLst>
+          </a:prstGeom>
+          <a:solidFill>
+            <a:srgbClr val="3730A3"/>
+          </a:solidFill>
+          <a:ln/>
+        </p:spPr>
+      </p:sp>
+      <p:sp>
+        <p:nvSpPr>
+          <p:cNvPr id="17" name="Text 12"/>
+          <p:cNvSpPr/>
+          <p:nvPr/>
+        </p:nvSpPr>
+        <p:spPr>
+          <a:xfrm>
+            <a:off x="822960" y="4562856"/>
+            <a:ext cx="2377440" cy="658368"/>
+          </a:xfrm>
+          <a:prstGeom prst="rect">
+            <a:avLst/>
+          </a:prstGeom>
+          <a:noFill/>
+          <a:ln/>
+        </p:spPr>
+        <p:txBody>
+          <a:bodyPr wrap="square" lIns="0" tIns="0" rIns="0" bIns="0" rtlCol="0" anchor="ctr"/>
+          <a:lstStyle/>
+          <a:p>
+            <a:pPr marL="0" indent="0">
+              <a:buNone/>
+            </a:pPr>
+            <a:r>
+              <a:rPr lang="en-US" sz="1600" b="1" dirty="0">
+                <a:solidFill>
+                  <a:srgbClr val="FFFFFF"/>
+                </a:solidFill>
+                <a:latin typeface="Cambria" pitchFamily="34" charset="0"/>
+                <a:ea typeface="Cambria" pitchFamily="34" charset="-122"/>
+                <a:cs typeface="Cambria" pitchFamily="34" charset="-120"/>
+              </a:rPr>
               <a:t>Domain</a:t>
             </a:r>
             <a:endParaRPr lang="en-US" sz="1600" dirty="0"/>
@@ -9062,7 +9005,7 @@
           <a:bodyPr wrap="square" lIns="0" tIns="0" rIns="0" bIns="0" rtlCol="0" anchor="ctr"/>
           <a:lstStyle/>
           <a:p>
-            <a:pPr indent="0" marL="0">
+            <a:pPr marL="0" indent="0">
               <a:buNone/>
             </a:pPr>
             <a:r>
@@ -9082,7 +9025,173 @@
       </p:sp>
       <p:pic>
         <p:nvPicPr>
-          <p:cNvPr id="19" name="Image 3" descr="preencoded.png">    </p:cNvPr>
+          <p:cNvPr id="19" name="Image 3" descr="preencoded.png"/>
+          <p:cNvPicPr>
+            <a:picLocks noChangeAspect="1"/>
+          </p:cNvPicPr>
+          <p:nvPr/>
+        </p:nvPicPr>
+        <p:blipFill>
+          <a:blip r:embed="rId3"/>
+          <a:stretch>
+            <a:fillRect/>
+          </a:stretch>
+        </p:blipFill>
+        <p:spPr>
+          <a:xfrm>
+            <a:off x="4718304" y="5294376"/>
+            <a:ext cx="256032" cy="256032"/>
+          </a:xfrm>
+          <a:prstGeom prst="rect">
+            <a:avLst/>
+          </a:prstGeom>
+        </p:spPr>
+      </p:pic>
+      <p:sp>
+        <p:nvSpPr>
+          <p:cNvPr id="20" name="Shape 14"/>
+          <p:cNvSpPr/>
+          <p:nvPr/>
+        </p:nvSpPr>
+        <p:spPr>
+          <a:xfrm>
+            <a:off x="548640" y="5458968"/>
+            <a:ext cx="8595360" cy="841248"/>
+          </a:xfrm>
+          <a:prstGeom prst="roundRect">
+            <a:avLst>
+              <a:gd name="adj" fmla="val 8696"/>
+            </a:avLst>
+          </a:prstGeom>
+          <a:solidFill>
+            <a:srgbClr val="312E81"/>
+          </a:solidFill>
+          <a:ln/>
+        </p:spPr>
+      </p:sp>
+      <p:sp>
+        <p:nvSpPr>
+          <p:cNvPr id="21" name="Text 15"/>
+          <p:cNvSpPr/>
+          <p:nvPr/>
+        </p:nvSpPr>
+        <p:spPr>
+          <a:xfrm>
+            <a:off x="822960" y="5550408"/>
+            <a:ext cx="2377440" cy="658368"/>
+          </a:xfrm>
+          <a:prstGeom prst="rect">
+            <a:avLst/>
+          </a:prstGeom>
+          <a:noFill/>
+          <a:ln/>
+        </p:spPr>
+        <p:txBody>
+          <a:bodyPr wrap="square" lIns="0" tIns="0" rIns="0" bIns="0" rtlCol="0" anchor="ctr"/>
+          <a:lstStyle/>
+          <a:p>
+            <a:pPr marL="0" indent="0">
+              <a:buNone/>
+            </a:pPr>
+            <a:r>
+              <a:rPr lang="en-US" sz="1600" b="1" dirty="0">
+                <a:solidFill>
+                  <a:srgbClr val="FFFFFF"/>
+                </a:solidFill>
+                <a:latin typeface="Cambria" pitchFamily="34" charset="0"/>
+                <a:ea typeface="Cambria" pitchFamily="34" charset="-122"/>
+                <a:cs typeface="Cambria" pitchFamily="34" charset="-120"/>
+              </a:rPr>
+              <a:t>Infrastructure</a:t>
+            </a:r>
+            <a:endParaRPr lang="en-US" sz="1600" dirty="0"/>
+          </a:p>
+        </p:txBody>
+      </p:sp>
+      <p:sp>
+        <p:nvSpPr>
+          <p:cNvPr id="22" name="Text 16"/>
+          <p:cNvSpPr/>
+          <p:nvPr/>
+        </p:nvSpPr>
+        <p:spPr>
+          <a:xfrm>
+            <a:off x="3291840" y="5550408"/>
+            <a:ext cx="5577840" cy="658368"/>
+          </a:xfrm>
+          <a:prstGeom prst="rect">
+            <a:avLst/>
+          </a:prstGeom>
+          <a:noFill/>
+          <a:ln/>
+        </p:spPr>
+        <p:txBody>
+          <a:bodyPr wrap="square" lIns="0" tIns="0" rIns="0" bIns="0" rtlCol="0" anchor="ctr"/>
+          <a:lstStyle/>
+          <a:p>
+            <a:pPr marL="0" indent="0">
+              <a:buNone/>
+            </a:pPr>
+            <a:r>
+              <a:rPr lang="en-US" sz="1150" dirty="0">
+                <a:solidFill>
+                  <a:srgbClr val="E4E2FB"/>
+                </a:solidFill>
+                <a:latin typeface="Calibri" pitchFamily="34" charset="0"/>
+                <a:ea typeface="Calibri" pitchFamily="34" charset="-122"/>
+                <a:cs typeface="Calibri" pitchFamily="34" charset="-120"/>
+              </a:rPr>
+              <a:t>EF Core · Repository Pattern · Unit of Work · SQL Server</a:t>
+            </a:r>
+            <a:endParaRPr lang="en-US" sz="1150" dirty="0"/>
+          </a:p>
+        </p:txBody>
+      </p:sp>
+      <p:sp>
+        <p:nvSpPr>
+          <p:cNvPr id="23" name="Shape 17"/>
+          <p:cNvSpPr/>
+          <p:nvPr/>
+        </p:nvSpPr>
+        <p:spPr>
+          <a:xfrm>
+            <a:off x="9464040" y="1508760"/>
+            <a:ext cx="2194560" cy="2103120"/>
+          </a:xfrm>
+          <a:prstGeom prst="roundRect">
+            <a:avLst>
+              <a:gd name="adj" fmla="val 4348"/>
+            </a:avLst>
+          </a:prstGeom>
+          <a:solidFill>
+            <a:srgbClr val="EEF0FF"/>
+          </a:solidFill>
+          <a:ln/>
+        </p:spPr>
+      </p:sp>
+      <p:sp>
+        <p:nvSpPr>
+          <p:cNvPr id="24" name="Shape 18"/>
+          <p:cNvSpPr/>
+          <p:nvPr/>
+        </p:nvSpPr>
+        <p:spPr>
+          <a:xfrm>
+            <a:off x="9692640" y="1737360"/>
+            <a:ext cx="457200" cy="457200"/>
+          </a:xfrm>
+          <a:prstGeom prst="ellipse">
+            <a:avLst/>
+          </a:prstGeom>
+          <a:solidFill>
+            <a:srgbClr val="4F46E5"/>
+          </a:solidFill>
+          <a:ln/>
+        </p:spPr>
+      </p:sp>
+      <p:pic>
+        <p:nvPicPr>
+          <p:cNvPr id="25" name="Image 4" descr="preencoded.png"/>
           <p:cNvPicPr>
             <a:picLocks noChangeAspect="1"/>
           </p:cNvPicPr>
@@ -9096,8 +9205,8 @@
         </p:blipFill>
         <p:spPr>
           <a:xfrm>
-            <a:off x="4718304" y="5294376"/>
-            <a:ext cx="256032" cy="256032"/>
+            <a:off x="9811512" y="1856232"/>
+            <a:ext cx="219456" cy="219456"/>
           </a:xfrm>
           <a:prstGeom prst="rect">
             <a:avLst/>
@@ -9106,36 +9215,14 @@
       </p:pic>
       <p:sp>
         <p:nvSpPr>
-          <p:cNvPr id="20" name="Shape 14"/>
-          <p:cNvSpPr/>
-          <p:nvPr/>
-        </p:nvSpPr>
-        <p:spPr>
-          <a:xfrm>
-            <a:off x="548640" y="5458968"/>
-            <a:ext cx="8595360" cy="841248"/>
-          </a:xfrm>
-          <a:prstGeom prst="roundRect">
-            <a:avLst>
-              <a:gd name="adj" fmla="val 8696"/>
-            </a:avLst>
-          </a:prstGeom>
-          <a:solidFill>
-            <a:srgbClr val="312E81"/>
-          </a:solidFill>
-          <a:ln/>
-        </p:spPr>
-      </p:sp>
-      <p:sp>
-        <p:nvSpPr>
-          <p:cNvPr id="21" name="Text 15"/>
-          <p:cNvSpPr/>
-          <p:nvPr/>
-        </p:nvSpPr>
-        <p:spPr>
-          <a:xfrm>
-            <a:off x="822960" y="5550408"/>
-            <a:ext cx="2377440" cy="658368"/>
+          <p:cNvPr id="26" name="Text 19"/>
+          <p:cNvSpPr/>
+          <p:nvPr/>
+        </p:nvSpPr>
+        <p:spPr>
+          <a:xfrm>
+            <a:off x="9646920" y="2286000"/>
+            <a:ext cx="1828800" cy="274320"/>
           </a:xfrm>
           <a:prstGeom prst="rect">
             <a:avLst/>
@@ -9147,34 +9234,34 @@
           <a:bodyPr wrap="square" lIns="0" tIns="0" rIns="0" bIns="0" rtlCol="0" anchor="ctr"/>
           <a:lstStyle/>
           <a:p>
-            <a:pPr indent="0" marL="0">
-              <a:buNone/>
-            </a:pPr>
-            <a:r>
-              <a:rPr lang="en-US" sz="1600" b="1" dirty="0">
-                <a:solidFill>
-                  <a:srgbClr val="FFFFFF"/>
-                </a:solidFill>
-                <a:latin typeface="Cambria" pitchFamily="34" charset="0"/>
-                <a:ea typeface="Cambria" pitchFamily="34" charset="-122"/>
-                <a:cs typeface="Cambria" pitchFamily="34" charset="-120"/>
-              </a:rPr>
-              <a:t>Infrastructure</a:t>
-            </a:r>
-            <a:endParaRPr lang="en-US" sz="1600" dirty="0"/>
-          </a:p>
-        </p:txBody>
-      </p:sp>
-      <p:sp>
-        <p:nvSpPr>
-          <p:cNvPr id="22" name="Text 16"/>
-          <p:cNvSpPr/>
-          <p:nvPr/>
-        </p:nvSpPr>
-        <p:spPr>
-          <a:xfrm>
-            <a:off x="3291840" y="5550408"/>
-            <a:ext cx="5577840" cy="658368"/>
+            <a:pPr marL="0" indent="0">
+              <a:buNone/>
+            </a:pPr>
+            <a:r>
+              <a:rPr lang="en-US" sz="1200" b="1" dirty="0">
+                <a:solidFill>
+                  <a:srgbClr val="171B23"/>
+                </a:solidFill>
+                <a:latin typeface="Calibri" pitchFamily="34" charset="0"/>
+                <a:ea typeface="Calibri" pitchFamily="34" charset="-122"/>
+                <a:cs typeface="Calibri" pitchFamily="34" charset="-120"/>
+              </a:rPr>
+              <a:t>Repository Pattern</a:t>
+            </a:r>
+            <a:endParaRPr lang="en-US" sz="1200" dirty="0"/>
+          </a:p>
+        </p:txBody>
+      </p:sp>
+      <p:sp>
+        <p:nvSpPr>
+          <p:cNvPr id="27" name="Text 20"/>
+          <p:cNvSpPr/>
+          <p:nvPr/>
+        </p:nvSpPr>
+        <p:spPr>
+          <a:xfrm>
+            <a:off x="9646920" y="2578608"/>
+            <a:ext cx="1828800" cy="914400"/>
           </a:xfrm>
           <a:prstGeom prst="rect">
             <a:avLst/>
@@ -9186,33 +9273,33 @@
           <a:bodyPr wrap="square" lIns="0" tIns="0" rIns="0" bIns="0" rtlCol="0" anchor="ctr"/>
           <a:lstStyle/>
           <a:p>
-            <a:pPr indent="0" marL="0">
-              <a:buNone/>
-            </a:pPr>
-            <a:r>
-              <a:rPr lang="en-US" sz="1150" dirty="0">
-                <a:solidFill>
-                  <a:srgbClr val="E4E2FB"/>
-                </a:solidFill>
-                <a:latin typeface="Calibri" pitchFamily="34" charset="0"/>
-                <a:ea typeface="Calibri" pitchFamily="34" charset="-122"/>
-                <a:cs typeface="Calibri" pitchFamily="34" charset="-120"/>
-              </a:rPr>
-              <a:t>EF Core · Repository Pattern · Unit of Work · SQL Server</a:t>
-            </a:r>
-            <a:endParaRPr lang="en-US" sz="1150" dirty="0"/>
-          </a:p>
-        </p:txBody>
-      </p:sp>
-      <p:sp>
-        <p:nvSpPr>
-          <p:cNvPr id="23" name="Shape 17"/>
-          <p:cNvSpPr/>
-          <p:nvPr/>
-        </p:nvSpPr>
-        <p:spPr>
-          <a:xfrm>
-            <a:off x="9464040" y="1508760"/>
+            <a:pPr marL="0" indent="0">
+              <a:buNone/>
+            </a:pPr>
+            <a:r>
+              <a:rPr lang="en-US" sz="1000" dirty="0">
+                <a:solidFill>
+                  <a:srgbClr val="5B6472"/>
+                </a:solidFill>
+                <a:latin typeface="Calibri" pitchFamily="34" charset="0"/>
+                <a:ea typeface="Calibri" pitchFamily="34" charset="-122"/>
+                <a:cs typeface="Calibri" pitchFamily="34" charset="-120"/>
+              </a:rPr>
+              <a:t>Generic data access, decoupled from EF Core specifics</a:t>
+            </a:r>
+            <a:endParaRPr lang="en-US" sz="1000" dirty="0"/>
+          </a:p>
+        </p:txBody>
+      </p:sp>
+      <p:sp>
+        <p:nvSpPr>
+          <p:cNvPr id="28" name="Shape 21"/>
+          <p:cNvSpPr/>
+          <p:nvPr/>
+        </p:nvSpPr>
+        <p:spPr>
+          <a:xfrm>
+            <a:off x="9464040" y="3794760"/>
             <a:ext cx="2194560" cy="2103120"/>
           </a:xfrm>
           <a:prstGeom prst="roundRect">
@@ -9228,13 +9315,13 @@
       </p:sp>
       <p:sp>
         <p:nvSpPr>
-          <p:cNvPr id="24" name="Shape 18"/>
-          <p:cNvSpPr/>
-          <p:nvPr/>
-        </p:nvSpPr>
-        <p:spPr>
-          <a:xfrm>
-            <a:off x="9692640" y="1737360"/>
+          <p:cNvPr id="29" name="Shape 22"/>
+          <p:cNvSpPr/>
+          <p:nvPr/>
+        </p:nvSpPr>
+        <p:spPr>
+          <a:xfrm>
+            <a:off x="9692640" y="4023360"/>
             <a:ext cx="457200" cy="457200"/>
           </a:xfrm>
           <a:prstGeom prst="ellipse">
@@ -9248,7 +9335,7 @@
       </p:sp>
       <p:pic>
         <p:nvPicPr>
-          <p:cNvPr id="25" name="Image 4" descr="preencoded.png">    </p:cNvPr>
+          <p:cNvPr id="30" name="Image 5" descr="preencoded.png"/>
           <p:cNvPicPr>
             <a:picLocks noChangeAspect="1"/>
           </p:cNvPicPr>
@@ -9262,150 +9349,6 @@
         </p:blipFill>
         <p:spPr>
           <a:xfrm>
-            <a:off x="9811512" y="1856232"/>
-            <a:ext cx="219456" cy="219456"/>
-          </a:xfrm>
-          <a:prstGeom prst="rect">
-            <a:avLst/>
-          </a:prstGeom>
-        </p:spPr>
-      </p:pic>
-      <p:sp>
-        <p:nvSpPr>
-          <p:cNvPr id="26" name="Text 19"/>
-          <p:cNvSpPr/>
-          <p:nvPr/>
-        </p:nvSpPr>
-        <p:spPr>
-          <a:xfrm>
-            <a:off x="9646920" y="2286000"/>
-            <a:ext cx="1828800" cy="274320"/>
-          </a:xfrm>
-          <a:prstGeom prst="rect">
-            <a:avLst/>
-          </a:prstGeom>
-          <a:noFill/>
-          <a:ln/>
-        </p:spPr>
-        <p:txBody>
-          <a:bodyPr wrap="square" lIns="0" tIns="0" rIns="0" bIns="0" rtlCol="0" anchor="ctr"/>
-          <a:lstStyle/>
-          <a:p>
-            <a:pPr indent="0" marL="0">
-              <a:buNone/>
-            </a:pPr>
-            <a:r>
-              <a:rPr lang="en-US" sz="1200" b="1" dirty="0">
-                <a:solidFill>
-                  <a:srgbClr val="171B23"/>
-                </a:solidFill>
-                <a:latin typeface="Calibri" pitchFamily="34" charset="0"/>
-                <a:ea typeface="Calibri" pitchFamily="34" charset="-122"/>
-                <a:cs typeface="Calibri" pitchFamily="34" charset="-120"/>
-              </a:rPr>
-              <a:t>Repository Pattern</a:t>
-            </a:r>
-            <a:endParaRPr lang="en-US" sz="1200" dirty="0"/>
-          </a:p>
-        </p:txBody>
-      </p:sp>
-      <p:sp>
-        <p:nvSpPr>
-          <p:cNvPr id="27" name="Text 20"/>
-          <p:cNvSpPr/>
-          <p:nvPr/>
-        </p:nvSpPr>
-        <p:spPr>
-          <a:xfrm>
-            <a:off x="9646920" y="2578608"/>
-            <a:ext cx="1828800" cy="914400"/>
-          </a:xfrm>
-          <a:prstGeom prst="rect">
-            <a:avLst/>
-          </a:prstGeom>
-          <a:noFill/>
-          <a:ln/>
-        </p:spPr>
-        <p:txBody>
-          <a:bodyPr wrap="square" lIns="0" tIns="0" rIns="0" bIns="0" rtlCol="0" anchor="ctr"/>
-          <a:lstStyle/>
-          <a:p>
-            <a:pPr indent="0" marL="0">
-              <a:buNone/>
-            </a:pPr>
-            <a:r>
-              <a:rPr lang="en-US" sz="1000" dirty="0">
-                <a:solidFill>
-                  <a:srgbClr val="5B6472"/>
-                </a:solidFill>
-                <a:latin typeface="Calibri" pitchFamily="34" charset="0"/>
-                <a:ea typeface="Calibri" pitchFamily="34" charset="-122"/>
-                <a:cs typeface="Calibri" pitchFamily="34" charset="-120"/>
-              </a:rPr>
-              <a:t>Generic data access, decoupled from EF Core specifics</a:t>
-            </a:r>
-            <a:endParaRPr lang="en-US" sz="1000" dirty="0"/>
-          </a:p>
-        </p:txBody>
-      </p:sp>
-      <p:sp>
-        <p:nvSpPr>
-          <p:cNvPr id="28" name="Shape 21"/>
-          <p:cNvSpPr/>
-          <p:nvPr/>
-        </p:nvSpPr>
-        <p:spPr>
-          <a:xfrm>
-            <a:off x="9464040" y="3794760"/>
-            <a:ext cx="2194560" cy="2103120"/>
-          </a:xfrm>
-          <a:prstGeom prst="roundRect">
-            <a:avLst>
-              <a:gd name="adj" fmla="val 4348"/>
-            </a:avLst>
-          </a:prstGeom>
-          <a:solidFill>
-            <a:srgbClr val="EEF0FF"/>
-          </a:solidFill>
-          <a:ln/>
-        </p:spPr>
-      </p:sp>
-      <p:sp>
-        <p:nvSpPr>
-          <p:cNvPr id="29" name="Shape 22"/>
-          <p:cNvSpPr/>
-          <p:nvPr/>
-        </p:nvSpPr>
-        <p:spPr>
-          <a:xfrm>
-            <a:off x="9692640" y="4023360"/>
-            <a:ext cx="457200" cy="457200"/>
-          </a:xfrm>
-          <a:prstGeom prst="ellipse">
-            <a:avLst/>
-          </a:prstGeom>
-          <a:solidFill>
-            <a:srgbClr val="4F46E5"/>
-          </a:solidFill>
-          <a:ln/>
-        </p:spPr>
-      </p:sp>
-      <p:pic>
-        <p:nvPicPr>
-          <p:cNvPr id="30" name="Image 5" descr="preencoded.png">    </p:cNvPr>
-          <p:cNvPicPr>
-            <a:picLocks noChangeAspect="1"/>
-          </p:cNvPicPr>
-          <p:nvPr/>
-        </p:nvPicPr>
-        <p:blipFill>
-          <a:blip r:embed="rId6"/>
-          <a:stretch>
-            <a:fillRect/>
-          </a:stretch>
-        </p:blipFill>
-        <p:spPr>
-          <a:xfrm>
             <a:off x="9811512" y="4142232"/>
             <a:ext cx="219456" cy="219456"/>
           </a:xfrm>
@@ -9435,7 +9378,7 @@
           <a:bodyPr wrap="square" lIns="0" tIns="0" rIns="0" bIns="0" rtlCol="0" anchor="ctr"/>
           <a:lstStyle/>
           <a:p>
-            <a:pPr indent="0" marL="0">
+            <a:pPr marL="0" indent="0">
               <a:buNone/>
             </a:pPr>
             <a:r>
@@ -9474,7 +9417,7 @@
           <a:bodyPr wrap="square" lIns="0" tIns="0" rIns="0" bIns="0" rtlCol="0" anchor="ctr"/>
           <a:lstStyle/>
           <a:p>
-            <a:pPr indent="0" marL="0">
+            <a:pPr marL="0" indent="0">
               <a:buNone/>
             </a:pPr>
             <a:r>
@@ -9513,7 +9456,7 @@
           <a:bodyPr wrap="square" lIns="0" tIns="0" rIns="0" bIns="0" rtlCol="0" anchor="ctr"/>
           <a:lstStyle/>
           <a:p>
-            <a:pPr indent="0" marL="0">
+            <a:pPr marL="0" indent="0">
               <a:buNone/>
             </a:pPr>
             <a:r>
@@ -9552,7 +9495,7 @@
           <a:bodyPr wrap="square" lIns="0" tIns="0" rIns="0" bIns="0" rtlCol="0" anchor="ctr"/>
           <a:lstStyle/>
           <a:p>
-            <a:pPr algn="r" indent="0" marL="0">
+            <a:pPr marL="0" indent="0" algn="r">
               <a:buNone/>
             </a:pPr>
             <a:r>
@@ -9586,6 +9529,7 @@
         <a:solidFill>
           <a:srgbClr val="FFFFFF"/>
         </a:solidFill>
+        <a:effectLst/>
       </p:bgPr>
     </p:bg>
     <p:spTree>
@@ -9623,11 +9567,11 @@
           <a:bodyPr wrap="square" lIns="0" tIns="0" rIns="0" bIns="0" rtlCol="0" anchor="ctr"/>
           <a:lstStyle/>
           <a:p>
-            <a:pPr indent="0" marL="0">
-              <a:buNone/>
-            </a:pPr>
-            <a:r>
-              <a:rPr lang="en-US" sz="1200" b="1" spc="200" kern="0" dirty="0">
+            <a:pPr marL="0" indent="0">
+              <a:buNone/>
+            </a:pPr>
+            <a:r>
+              <a:rPr lang="en-US" sz="1200" b="1" kern="0" spc="200" dirty="0">
                 <a:solidFill>
                   <a:srgbClr val="4F46E5"/>
                 </a:solidFill>
@@ -9662,7 +9606,7 @@
           <a:bodyPr wrap="square" lIns="0" tIns="0" rIns="0" bIns="0" rtlCol="0" anchor="ctr"/>
           <a:lstStyle/>
           <a:p>
-            <a:pPr indent="0" marL="0">
+            <a:pPr marL="0" indent="0">
               <a:buNone/>
             </a:pPr>
             <a:r>
@@ -9729,14 +9673,14 @@
       </p:sp>
       <p:pic>
         <p:nvPicPr>
-          <p:cNvPr id="6" name="Image 0" descr="preencoded.png">    </p:cNvPr>
+          <p:cNvPr id="6" name="Image 0" descr="preencoded.png"/>
           <p:cNvPicPr>
             <a:picLocks noChangeAspect="1"/>
           </p:cNvPicPr>
           <p:nvPr/>
         </p:nvPicPr>
         <p:blipFill>
-          <a:blip r:embed="rId1"/>
+          <a:blip r:embed="rId3"/>
           <a:stretch>
             <a:fillRect/>
           </a:stretch>
@@ -9772,7 +9716,7 @@
           <a:bodyPr wrap="square" lIns="0" tIns="0" rIns="0" bIns="0" rtlCol="0" anchor="t"/>
           <a:lstStyle/>
           <a:p>
-            <a:pPr indent="0" marL="0">
+            <a:pPr marL="0" indent="0">
               <a:buNone/>
             </a:pPr>
             <a:r>
@@ -9811,7 +9755,7 @@
           <a:bodyPr wrap="square" lIns="0" tIns="0" rIns="0" bIns="0" rtlCol="0" anchor="t"/>
           <a:lstStyle/>
           <a:p>
-            <a:pPr indent="0" marL="0">
+            <a:pPr marL="0" indent="0">
               <a:buNone/>
             </a:pPr>
             <a:r>
@@ -9878,14 +9822,14 @@
       </p:sp>
       <p:pic>
         <p:nvPicPr>
-          <p:cNvPr id="11" name="Image 1" descr="preencoded.png">    </p:cNvPr>
+          <p:cNvPr id="11" name="Image 1" descr="preencoded.png"/>
           <p:cNvPicPr>
             <a:picLocks noChangeAspect="1"/>
           </p:cNvPicPr>
           <p:nvPr/>
         </p:nvPicPr>
         <p:blipFill>
-          <a:blip r:embed="rId2"/>
+          <a:blip r:embed="rId4"/>
           <a:stretch>
             <a:fillRect/>
           </a:stretch>
@@ -9921,7 +9865,7 @@
           <a:bodyPr wrap="square" lIns="0" tIns="0" rIns="0" bIns="0" rtlCol="0" anchor="t"/>
           <a:lstStyle/>
           <a:p>
-            <a:pPr indent="0" marL="0">
+            <a:pPr marL="0" indent="0">
               <a:buNone/>
             </a:pPr>
             <a:r>
@@ -9960,7 +9904,7 @@
           <a:bodyPr wrap="square" lIns="0" tIns="0" rIns="0" bIns="0" rtlCol="0" anchor="t"/>
           <a:lstStyle/>
           <a:p>
-            <a:pPr indent="0" marL="0">
+            <a:pPr marL="0" indent="0">
               <a:buNone/>
             </a:pPr>
             <a:r>
@@ -10027,14 +9971,14 @@
       </p:sp>
       <p:pic>
         <p:nvPicPr>
-          <p:cNvPr id="16" name="Image 2" descr="preencoded.png">    </p:cNvPr>
+          <p:cNvPr id="16" name="Image 2" descr="preencoded.png"/>
           <p:cNvPicPr>
             <a:picLocks noChangeAspect="1"/>
           </p:cNvPicPr>
           <p:nvPr/>
         </p:nvPicPr>
         <p:blipFill>
-          <a:blip r:embed="rId3"/>
+          <a:blip r:embed="rId5"/>
           <a:stretch>
             <a:fillRect/>
           </a:stretch>
@@ -10070,7 +10014,7 @@
           <a:bodyPr wrap="square" lIns="0" tIns="0" rIns="0" bIns="0" rtlCol="0" anchor="t"/>
           <a:lstStyle/>
           <a:p>
-            <a:pPr indent="0" marL="0">
+            <a:pPr marL="0" indent="0">
               <a:buNone/>
             </a:pPr>
             <a:r>
@@ -10109,7 +10053,7 @@
           <a:bodyPr wrap="square" lIns="0" tIns="0" rIns="0" bIns="0" rtlCol="0" anchor="t"/>
           <a:lstStyle/>
           <a:p>
-            <a:pPr indent="0" marL="0">
+            <a:pPr marL="0" indent="0">
               <a:buNone/>
             </a:pPr>
             <a:r>
@@ -10176,14 +10120,14 @@
       </p:sp>
       <p:pic>
         <p:nvPicPr>
-          <p:cNvPr id="21" name="Image 3" descr="preencoded.png">    </p:cNvPr>
+          <p:cNvPr id="21" name="Image 3" descr="preencoded.png"/>
           <p:cNvPicPr>
             <a:picLocks noChangeAspect="1"/>
           </p:cNvPicPr>
           <p:nvPr/>
         </p:nvPicPr>
         <p:blipFill>
-          <a:blip r:embed="rId4"/>
+          <a:blip r:embed="rId6"/>
           <a:stretch>
             <a:fillRect/>
           </a:stretch>
@@ -10219,7 +10163,7 @@
           <a:bodyPr wrap="square" lIns="0" tIns="0" rIns="0" bIns="0" rtlCol="0" anchor="t"/>
           <a:lstStyle/>
           <a:p>
-            <a:pPr indent="0" marL="0">
+            <a:pPr marL="0" indent="0">
               <a:buNone/>
             </a:pPr>
             <a:r>
@@ -10258,7 +10202,7 @@
           <a:bodyPr wrap="square" lIns="0" tIns="0" rIns="0" bIns="0" rtlCol="0" anchor="t"/>
           <a:lstStyle/>
           <a:p>
-            <a:pPr indent="0" marL="0">
+            <a:pPr marL="0" indent="0">
               <a:buNone/>
             </a:pPr>
             <a:r>
@@ -10325,14 +10269,14 @@
       </p:sp>
       <p:pic>
         <p:nvPicPr>
-          <p:cNvPr id="26" name="Image 4" descr="preencoded.png">    </p:cNvPr>
+          <p:cNvPr id="26" name="Image 4" descr="preencoded.png"/>
           <p:cNvPicPr>
             <a:picLocks noChangeAspect="1"/>
           </p:cNvPicPr>
           <p:nvPr/>
         </p:nvPicPr>
         <p:blipFill>
-          <a:blip r:embed="rId5"/>
+          <a:blip r:embed="rId7"/>
           <a:stretch>
             <a:fillRect/>
           </a:stretch>
@@ -10368,7 +10312,7 @@
           <a:bodyPr wrap="square" lIns="0" tIns="0" rIns="0" bIns="0" rtlCol="0" anchor="t"/>
           <a:lstStyle/>
           <a:p>
-            <a:pPr indent="0" marL="0">
+            <a:pPr marL="0" indent="0">
               <a:buNone/>
             </a:pPr>
             <a:r>
@@ -10407,7 +10351,7 @@
           <a:bodyPr wrap="square" lIns="0" tIns="0" rIns="0" bIns="0" rtlCol="0" anchor="t"/>
           <a:lstStyle/>
           <a:p>
-            <a:pPr indent="0" marL="0">
+            <a:pPr marL="0" indent="0">
               <a:buNone/>
             </a:pPr>
             <a:r>
@@ -10474,14 +10418,14 @@
       </p:sp>
       <p:pic>
         <p:nvPicPr>
-          <p:cNvPr id="31" name="Image 5" descr="preencoded.png">    </p:cNvPr>
+          <p:cNvPr id="31" name="Image 5" descr="preencoded.png"/>
           <p:cNvPicPr>
             <a:picLocks noChangeAspect="1"/>
           </p:cNvPicPr>
           <p:nvPr/>
         </p:nvPicPr>
         <p:blipFill>
-          <a:blip r:embed="rId6"/>
+          <a:blip r:embed="rId8"/>
           <a:stretch>
             <a:fillRect/>
           </a:stretch>
@@ -10517,7 +10461,7 @@
           <a:bodyPr wrap="square" lIns="0" tIns="0" rIns="0" bIns="0" rtlCol="0" anchor="t"/>
           <a:lstStyle/>
           <a:p>
-            <a:pPr indent="0" marL="0">
+            <a:pPr marL="0" indent="0">
               <a:buNone/>
             </a:pPr>
             <a:r>
@@ -10556,7 +10500,7 @@
           <a:bodyPr wrap="square" lIns="0" tIns="0" rIns="0" bIns="0" rtlCol="0" anchor="t"/>
           <a:lstStyle/>
           <a:p>
-            <a:pPr indent="0" marL="0">
+            <a:pPr marL="0" indent="0">
               <a:buNone/>
             </a:pPr>
             <a:r>
@@ -10623,14 +10567,14 @@
       </p:sp>
       <p:pic>
         <p:nvPicPr>
-          <p:cNvPr id="36" name="Image 6" descr="preencoded.png">    </p:cNvPr>
+          <p:cNvPr id="36" name="Image 6" descr="preencoded.png"/>
           <p:cNvPicPr>
             <a:picLocks noChangeAspect="1"/>
           </p:cNvPicPr>
           <p:nvPr/>
         </p:nvPicPr>
         <p:blipFill>
-          <a:blip r:embed="rId7"/>
+          <a:blip r:embed="rId9"/>
           <a:stretch>
             <a:fillRect/>
           </a:stretch>
@@ -10666,7 +10610,7 @@
           <a:bodyPr wrap="square" lIns="0" tIns="0" rIns="0" bIns="0" rtlCol="0" anchor="t"/>
           <a:lstStyle/>
           <a:p>
-            <a:pPr indent="0" marL="0">
+            <a:pPr marL="0" indent="0">
               <a:buNone/>
             </a:pPr>
             <a:r>
@@ -10705,7 +10649,7 @@
           <a:bodyPr wrap="square" lIns="0" tIns="0" rIns="0" bIns="0" rtlCol="0" anchor="t"/>
           <a:lstStyle/>
           <a:p>
-            <a:pPr indent="0" marL="0">
+            <a:pPr marL="0" indent="0">
               <a:buNone/>
             </a:pPr>
             <a:r>
@@ -10744,7 +10688,7 @@
           <a:bodyPr wrap="square" lIns="0" tIns="0" rIns="0" bIns="0" rtlCol="0" anchor="ctr"/>
           <a:lstStyle/>
           <a:p>
-            <a:pPr indent="0" marL="0">
+            <a:pPr marL="0" indent="0">
               <a:buNone/>
             </a:pPr>
             <a:r>
@@ -10783,7 +10727,7 @@
           <a:bodyPr wrap="square" lIns="0" tIns="0" rIns="0" bIns="0" rtlCol="0" anchor="ctr"/>
           <a:lstStyle/>
           <a:p>
-            <a:pPr algn="r" indent="0" marL="0">
+            <a:pPr marL="0" indent="0" algn="r">
               <a:buNone/>
             </a:pPr>
             <a:r>
@@ -10817,6 +10761,7 @@
         <a:solidFill>
           <a:srgbClr val="1E1B4B"/>
         </a:solidFill>
+        <a:effectLst/>
       </p:bgPr>
     </p:bg>
     <p:spTree>
@@ -10854,11 +10799,11 @@
           <a:bodyPr wrap="square" lIns="0" tIns="0" rIns="0" bIns="0" rtlCol="0" anchor="ctr"/>
           <a:lstStyle/>
           <a:p>
-            <a:pPr indent="0" marL="0">
-              <a:buNone/>
-            </a:pPr>
-            <a:r>
-              <a:rPr lang="en-US" sz="1200" b="1" spc="200" kern="0" dirty="0">
+            <a:pPr marL="0" indent="0">
+              <a:buNone/>
+            </a:pPr>
+            <a:r>
+              <a:rPr lang="en-US" sz="1200" b="1" kern="0" spc="200" dirty="0">
                 <a:solidFill>
                   <a:srgbClr val="9089E8"/>
                 </a:solidFill>
@@ -10893,7 +10838,7 @@
           <a:bodyPr wrap="square" lIns="0" tIns="0" rIns="0" bIns="0" rtlCol="0" anchor="ctr"/>
           <a:lstStyle/>
           <a:p>
-            <a:pPr indent="0" marL="0">
+            <a:pPr marL="0" indent="0">
               <a:buNone/>
             </a:pPr>
             <a:r>
@@ -10940,14 +10885,14 @@
       </p:sp>
       <p:pic>
         <p:nvPicPr>
-          <p:cNvPr id="5" name="Image 0" descr="preencoded.png">    </p:cNvPr>
+          <p:cNvPr id="5" name="Image 0" descr="preencoded.png"/>
           <p:cNvPicPr>
             <a:picLocks noChangeAspect="1"/>
           </p:cNvPicPr>
           <p:nvPr/>
         </p:nvPicPr>
         <p:blipFill>
-          <a:blip r:embed="rId1"/>
+          <a:blip r:embed="rId3"/>
           <a:stretch>
             <a:fillRect/>
           </a:stretch>
@@ -10983,7 +10928,7 @@
           <a:bodyPr wrap="square" lIns="0" tIns="0" rIns="0" bIns="0" rtlCol="0" anchor="t"/>
           <a:lstStyle/>
           <a:p>
-            <a:pPr algn="ctr" indent="0" marL="0">
+            <a:pPr marL="0" indent="0" algn="ctr">
               <a:buNone/>
             </a:pPr>
             <a:r>
@@ -11003,14 +10948,14 @@
       </p:sp>
       <p:pic>
         <p:nvPicPr>
-          <p:cNvPr id="7" name="Image 1" descr="preencoded.png">    </p:cNvPr>
+          <p:cNvPr id="7" name="Image 1" descr="preencoded.png"/>
           <p:cNvPicPr>
             <a:picLocks noChangeAspect="1"/>
           </p:cNvPicPr>
           <p:nvPr/>
         </p:nvPicPr>
         <p:blipFill>
-          <a:blip r:embed="rId2"/>
+          <a:blip r:embed="rId4"/>
           <a:stretch>
             <a:fillRect/>
           </a:stretch>
@@ -11054,14 +10999,14 @@
       </p:sp>
       <p:pic>
         <p:nvPicPr>
-          <p:cNvPr id="9" name="Image 2" descr="preencoded.png">    </p:cNvPr>
+          <p:cNvPr id="9" name="Image 2" descr="preencoded.png"/>
           <p:cNvPicPr>
             <a:picLocks noChangeAspect="1"/>
           </p:cNvPicPr>
           <p:nvPr/>
         </p:nvPicPr>
         <p:blipFill>
-          <a:blip r:embed="rId3"/>
+          <a:blip r:embed="rId5"/>
           <a:stretch>
             <a:fillRect/>
           </a:stretch>
@@ -11097,7 +11042,7 @@
           <a:bodyPr wrap="square" lIns="0" tIns="0" rIns="0" bIns="0" rtlCol="0" anchor="t"/>
           <a:lstStyle/>
           <a:p>
-            <a:pPr algn="ctr" indent="0" marL="0">
+            <a:pPr marL="0" indent="0" algn="ctr">
               <a:buNone/>
             </a:pPr>
             <a:r>
@@ -11117,7 +11062,7 @@
       </p:sp>
       <p:pic>
         <p:nvPicPr>
-          <p:cNvPr id="11" name="Image 3" descr="preencoded.png">    </p:cNvPr>
+          <p:cNvPr id="11" name="Image 3" descr="preencoded.png"/>
           <p:cNvPicPr>
             <a:picLocks noChangeAspect="1"/>
           </p:cNvPicPr>
@@ -11168,14 +11113,14 @@
       </p:sp>
       <p:pic>
         <p:nvPicPr>
-          <p:cNvPr id="13" name="Image 4" descr="preencoded.png">    </p:cNvPr>
+          <p:cNvPr id="13" name="Image 4" descr="preencoded.png"/>
           <p:cNvPicPr>
             <a:picLocks noChangeAspect="1"/>
           </p:cNvPicPr>
           <p:nvPr/>
         </p:nvPicPr>
         <p:blipFill>
-          <a:blip r:embed="rId5"/>
+          <a:blip r:embed="rId6"/>
           <a:stretch>
             <a:fillRect/>
           </a:stretch>
@@ -11211,7 +11156,7 @@
           <a:bodyPr wrap="square" lIns="0" tIns="0" rIns="0" bIns="0" rtlCol="0" anchor="t"/>
           <a:lstStyle/>
           <a:p>
-            <a:pPr algn="ctr" indent="0" marL="0">
+            <a:pPr marL="0" indent="0" algn="ctr">
               <a:buNone/>
             </a:pPr>
             <a:r>
@@ -11231,14 +11176,14 @@
       </p:sp>
       <p:pic>
         <p:nvPicPr>
-          <p:cNvPr id="15" name="Image 5" descr="preencoded.png">    </p:cNvPr>
+          <p:cNvPr id="15" name="Image 5" descr="preencoded.png"/>
           <p:cNvPicPr>
             <a:picLocks noChangeAspect="1"/>
           </p:cNvPicPr>
           <p:nvPr/>
         </p:nvPicPr>
         <p:blipFill>
-          <a:blip r:embed="rId6"/>
+          <a:blip r:embed="rId4"/>
           <a:stretch>
             <a:fillRect/>
           </a:stretch>
@@ -11282,7 +11227,7 @@
       </p:sp>
       <p:pic>
         <p:nvPicPr>
-          <p:cNvPr id="17" name="Image 6" descr="preencoded.png">    </p:cNvPr>
+          <p:cNvPr id="17" name="Image 6" descr="preencoded.png"/>
           <p:cNvPicPr>
             <a:picLocks noChangeAspect="1"/>
           </p:cNvPicPr>
@@ -11325,7 +11270,7 @@
           <a:bodyPr wrap="square" lIns="0" tIns="0" rIns="0" bIns="0" rtlCol="0" anchor="t"/>
           <a:lstStyle/>
           <a:p>
-            <a:pPr algn="ctr" indent="0" marL="0">
+            <a:pPr marL="0" indent="0" algn="ctr">
               <a:buNone/>
             </a:pPr>
             <a:r>
@@ -11345,14 +11290,14 @@
       </p:sp>
       <p:pic>
         <p:nvPicPr>
-          <p:cNvPr id="19" name="Image 7" descr="preencoded.png">    </p:cNvPr>
+          <p:cNvPr id="19" name="Image 7" descr="preencoded.png"/>
           <p:cNvPicPr>
             <a:picLocks noChangeAspect="1"/>
           </p:cNvPicPr>
           <p:nvPr/>
         </p:nvPicPr>
         <p:blipFill>
-          <a:blip r:embed="rId8"/>
+          <a:blip r:embed="rId4"/>
           <a:stretch>
             <a:fillRect/>
           </a:stretch>
@@ -11396,14 +11341,14 @@
       </p:sp>
       <p:pic>
         <p:nvPicPr>
-          <p:cNvPr id="21" name="Image 8" descr="preencoded.png">    </p:cNvPr>
+          <p:cNvPr id="21" name="Image 8" descr="preencoded.png"/>
           <p:cNvPicPr>
             <a:picLocks noChangeAspect="1"/>
           </p:cNvPicPr>
           <p:nvPr/>
         </p:nvPicPr>
         <p:blipFill>
-          <a:blip r:embed="rId9"/>
+          <a:blip r:embed="rId8"/>
           <a:stretch>
             <a:fillRect/>
           </a:stretch>
@@ -11439,7 +11384,7 @@
           <a:bodyPr wrap="square" lIns="0" tIns="0" rIns="0" bIns="0" rtlCol="0" anchor="t"/>
           <a:lstStyle/>
           <a:p>
-            <a:pPr algn="ctr" indent="0" marL="0">
+            <a:pPr marL="0" indent="0" algn="ctr">
               <a:buNone/>
             </a:pPr>
             <a:r>
@@ -11459,14 +11404,14 @@
       </p:sp>
       <p:pic>
         <p:nvPicPr>
-          <p:cNvPr id="23" name="Image 9" descr="preencoded.png">    </p:cNvPr>
+          <p:cNvPr id="23" name="Image 9" descr="preencoded.png"/>
           <p:cNvPicPr>
             <a:picLocks noChangeAspect="1"/>
           </p:cNvPicPr>
           <p:nvPr/>
         </p:nvPicPr>
         <p:blipFill>
-          <a:blip r:embed="rId10"/>
+          <a:blip r:embed="rId4"/>
           <a:stretch>
             <a:fillRect/>
           </a:stretch>
@@ -11510,14 +11455,14 @@
       </p:sp>
       <p:pic>
         <p:nvPicPr>
-          <p:cNvPr id="25" name="Image 10" descr="preencoded.png">    </p:cNvPr>
+          <p:cNvPr id="25" name="Image 10" descr="preencoded.png"/>
           <p:cNvPicPr>
             <a:picLocks noChangeAspect="1"/>
           </p:cNvPicPr>
           <p:nvPr/>
         </p:nvPicPr>
         <p:blipFill>
-          <a:blip r:embed="rId11"/>
+          <a:blip r:embed="rId9"/>
           <a:stretch>
             <a:fillRect/>
           </a:stretch>
@@ -11553,7 +11498,7 @@
           <a:bodyPr wrap="square" lIns="0" tIns="0" rIns="0" bIns="0" rtlCol="0" anchor="t"/>
           <a:lstStyle/>
           <a:p>
-            <a:pPr algn="ctr" indent="0" marL="0">
+            <a:pPr marL="0" indent="0" algn="ctr">
               <a:buNone/>
             </a:pPr>
             <a:r>
@@ -11573,14 +11518,14 @@
       </p:sp>
       <p:pic>
         <p:nvPicPr>
-          <p:cNvPr id="27" name="Image 11" descr="preencoded.png">    </p:cNvPr>
+          <p:cNvPr id="27" name="Image 11" descr="preencoded.png"/>
           <p:cNvPicPr>
             <a:picLocks noChangeAspect="1"/>
           </p:cNvPicPr>
           <p:nvPr/>
         </p:nvPicPr>
         <p:blipFill>
-          <a:blip r:embed="rId12"/>
+          <a:blip r:embed="rId10"/>
           <a:stretch>
             <a:fillRect/>
           </a:stretch>
@@ -11624,14 +11569,14 @@
       </p:sp>
       <p:pic>
         <p:nvPicPr>
-          <p:cNvPr id="29" name="Image 12" descr="preencoded.png">    </p:cNvPr>
+          <p:cNvPr id="29" name="Image 12" descr="preencoded.png"/>
           <p:cNvPicPr>
             <a:picLocks noChangeAspect="1"/>
           </p:cNvPicPr>
           <p:nvPr/>
         </p:nvPicPr>
         <p:blipFill>
-          <a:blip r:embed="rId13"/>
+          <a:blip r:embed="rId11"/>
           <a:stretch>
             <a:fillRect/>
           </a:stretch>
@@ -11667,7 +11612,7 @@
           <a:bodyPr wrap="square" lIns="0" tIns="0" rIns="0" bIns="0" rtlCol="0" anchor="t"/>
           <a:lstStyle/>
           <a:p>
-            <a:pPr algn="ctr" indent="0" marL="0">
+            <a:pPr marL="0" indent="0" algn="ctr">
               <a:buNone/>
             </a:pPr>
             <a:r>
@@ -11687,14 +11632,14 @@
       </p:sp>
       <p:pic>
         <p:nvPicPr>
-          <p:cNvPr id="31" name="Image 13" descr="preencoded.png">    </p:cNvPr>
+          <p:cNvPr id="31" name="Image 13" descr="preencoded.png"/>
           <p:cNvPicPr>
             <a:picLocks noChangeAspect="1"/>
           </p:cNvPicPr>
           <p:nvPr/>
         </p:nvPicPr>
         <p:blipFill>
-          <a:blip r:embed="rId14"/>
+          <a:blip r:embed="rId4"/>
           <a:stretch>
             <a:fillRect/>
           </a:stretch>
@@ -11738,14 +11683,14 @@
       </p:sp>
       <p:pic>
         <p:nvPicPr>
-          <p:cNvPr id="33" name="Image 14" descr="preencoded.png">    </p:cNvPr>
+          <p:cNvPr id="33" name="Image 14" descr="preencoded.png"/>
           <p:cNvPicPr>
             <a:picLocks noChangeAspect="1"/>
           </p:cNvPicPr>
           <p:nvPr/>
         </p:nvPicPr>
         <p:blipFill>
-          <a:blip r:embed="rId15"/>
+          <a:blip r:embed="rId12"/>
           <a:stretch>
             <a:fillRect/>
           </a:stretch>
@@ -11781,7 +11726,7 @@
           <a:bodyPr wrap="square" lIns="0" tIns="0" rIns="0" bIns="0" rtlCol="0" anchor="t"/>
           <a:lstStyle/>
           <a:p>
-            <a:pPr algn="ctr" indent="0" marL="0">
+            <a:pPr marL="0" indent="0" algn="ctr">
               <a:buNone/>
             </a:pPr>
             <a:r>
@@ -11801,14 +11746,14 @@
       </p:sp>
       <p:pic>
         <p:nvPicPr>
-          <p:cNvPr id="35" name="Image 15" descr="preencoded.png">    </p:cNvPr>
+          <p:cNvPr id="35" name="Image 15" descr="preencoded.png"/>
           <p:cNvPicPr>
             <a:picLocks noChangeAspect="1"/>
           </p:cNvPicPr>
           <p:nvPr/>
         </p:nvPicPr>
         <p:blipFill>
-          <a:blip r:embed="rId16"/>
+          <a:blip r:embed="rId4"/>
           <a:stretch>
             <a:fillRect/>
           </a:stretch>
@@ -11852,14 +11797,14 @@
       </p:sp>
       <p:pic>
         <p:nvPicPr>
-          <p:cNvPr id="37" name="Image 16" descr="preencoded.png">    </p:cNvPr>
+          <p:cNvPr id="37" name="Image 16" descr="preencoded.png"/>
           <p:cNvPicPr>
             <a:picLocks noChangeAspect="1"/>
           </p:cNvPicPr>
           <p:nvPr/>
         </p:nvPicPr>
         <p:blipFill>
-          <a:blip r:embed="rId17"/>
+          <a:blip r:embed="rId13"/>
           <a:stretch>
             <a:fillRect/>
           </a:stretch>
@@ -11895,7 +11840,7 @@
           <a:bodyPr wrap="square" lIns="0" tIns="0" rIns="0" bIns="0" rtlCol="0" anchor="t"/>
           <a:lstStyle/>
           <a:p>
-            <a:pPr algn="ctr" indent="0" marL="0">
+            <a:pPr marL="0" indent="0" algn="ctr">
               <a:buNone/>
             </a:pPr>
             <a:r>
@@ -11915,14 +11860,14 @@
       </p:sp>
       <p:pic>
         <p:nvPicPr>
-          <p:cNvPr id="39" name="Image 17" descr="preencoded.png">    </p:cNvPr>
+          <p:cNvPr id="39" name="Image 17" descr="preencoded.png"/>
           <p:cNvPicPr>
             <a:picLocks noChangeAspect="1"/>
           </p:cNvPicPr>
           <p:nvPr/>
         </p:nvPicPr>
         <p:blipFill>
-          <a:blip r:embed="rId18"/>
+          <a:blip r:embed="rId4"/>
           <a:stretch>
             <a:fillRect/>
           </a:stretch>
@@ -11966,14 +11911,14 @@
       </p:sp>
       <p:pic>
         <p:nvPicPr>
-          <p:cNvPr id="41" name="Image 18" descr="preencoded.png">    </p:cNvPr>
+          <p:cNvPr id="41" name="Image 18" descr="preencoded.png"/>
           <p:cNvPicPr>
             <a:picLocks noChangeAspect="1"/>
           </p:cNvPicPr>
           <p:nvPr/>
         </p:nvPicPr>
         <p:blipFill>
-          <a:blip r:embed="rId19"/>
+          <a:blip r:embed="rId14"/>
           <a:stretch>
             <a:fillRect/>
           </a:stretch>
@@ -12009,7 +11954,7 @@
           <a:bodyPr wrap="square" lIns="0" tIns="0" rIns="0" bIns="0" rtlCol="0" anchor="t"/>
           <a:lstStyle/>
           <a:p>
-            <a:pPr algn="ctr" indent="0" marL="0">
+            <a:pPr marL="0" indent="0" algn="ctr">
               <a:buNone/>
             </a:pPr>
             <a:r>
@@ -12029,14 +11974,14 @@
       </p:sp>
       <p:pic>
         <p:nvPicPr>
-          <p:cNvPr id="43" name="Image 19" descr="preencoded.png">    </p:cNvPr>
+          <p:cNvPr id="43" name="Image 19" descr="preencoded.png"/>
           <p:cNvPicPr>
             <a:picLocks noChangeAspect="1"/>
           </p:cNvPicPr>
           <p:nvPr/>
         </p:nvPicPr>
         <p:blipFill>
-          <a:blip r:embed="rId20"/>
+          <a:blip r:embed="rId4"/>
           <a:stretch>
             <a:fillRect/>
           </a:stretch>
@@ -12080,14 +12025,14 @@
       </p:sp>
       <p:pic>
         <p:nvPicPr>
-          <p:cNvPr id="45" name="Image 20" descr="preencoded.png">    </p:cNvPr>
+          <p:cNvPr id="45" name="Image 20" descr="preencoded.png"/>
           <p:cNvPicPr>
             <a:picLocks noChangeAspect="1"/>
           </p:cNvPicPr>
           <p:nvPr/>
         </p:nvPicPr>
         <p:blipFill>
-          <a:blip r:embed="rId21"/>
+          <a:blip r:embed="rId15"/>
           <a:stretch>
             <a:fillRect/>
           </a:stretch>
@@ -12123,7 +12068,7 @@
           <a:bodyPr wrap="square" lIns="0" tIns="0" rIns="0" bIns="0" rtlCol="0" anchor="t"/>
           <a:lstStyle/>
           <a:p>
-            <a:pPr algn="ctr" indent="0" marL="0">
+            <a:pPr marL="0" indent="0" algn="ctr">
               <a:buNone/>
             </a:pPr>
             <a:r>
@@ -12157,6 +12102,7 @@
         <a:solidFill>
           <a:srgbClr val="FFFFFF"/>
         </a:solidFill>
+        <a:effectLst/>
       </p:bgPr>
     </p:bg>
     <p:spTree>
@@ -12194,11 +12140,11 @@
           <a:bodyPr wrap="square" lIns="0" tIns="0" rIns="0" bIns="0" rtlCol="0" anchor="ctr"/>
           <a:lstStyle/>
           <a:p>
-            <a:pPr indent="0" marL="0">
-              <a:buNone/>
-            </a:pPr>
-            <a:r>
-              <a:rPr lang="en-US" sz="1200" b="1" spc="200" kern="0" dirty="0">
+            <a:pPr marL="0" indent="0">
+              <a:buNone/>
+            </a:pPr>
+            <a:r>
+              <a:rPr lang="en-US" sz="1200" b="1" kern="0" spc="200" dirty="0">
                 <a:solidFill>
                   <a:srgbClr val="4F46E5"/>
                 </a:solidFill>
@@ -12233,7 +12179,7 @@
           <a:bodyPr wrap="square" lIns="0" tIns="0" rIns="0" bIns="0" rtlCol="0" anchor="ctr"/>
           <a:lstStyle/>
           <a:p>
-            <a:pPr indent="0" marL="0">
+            <a:pPr marL="0" indent="0">
               <a:buNone/>
             </a:pPr>
             <a:r>
@@ -12273,297 +12219,7 @@
       </p:sp>
       <p:pic>
         <p:nvPicPr>
-          <p:cNvPr id="5" name="Image 0" descr="preencoded.png">    </p:cNvPr>
-          <p:cNvPicPr>
-            <a:picLocks noChangeAspect="1"/>
-          </p:cNvPicPr>
-          <p:nvPr/>
-        </p:nvPicPr>
-        <p:blipFill>
-          <a:blip r:embed="rId1"/>
-          <a:stretch>
-            <a:fillRect/>
-          </a:stretch>
-        </p:blipFill>
-        <p:spPr>
-          <a:xfrm>
-            <a:off x="679399" y="1730959"/>
-            <a:ext cx="241402" cy="241402"/>
-          </a:xfrm>
-          <a:prstGeom prst="rect">
-            <a:avLst/>
-          </a:prstGeom>
-        </p:spPr>
-      </p:pic>
-      <p:sp>
-        <p:nvSpPr>
-          <p:cNvPr id="6" name="Text 3"/>
-          <p:cNvSpPr/>
-          <p:nvPr/>
-        </p:nvSpPr>
-        <p:spPr>
-          <a:xfrm>
-            <a:off x="1234440" y="1581912"/>
-            <a:ext cx="4937760" cy="548640"/>
-          </a:xfrm>
-          <a:prstGeom prst="rect">
-            <a:avLst/>
-          </a:prstGeom>
-          <a:noFill/>
-          <a:ln/>
-        </p:spPr>
-        <p:txBody>
-          <a:bodyPr wrap="square" lIns="0" tIns="0" rIns="0" bIns="0" rtlCol="0" anchor="ctr"/>
-          <a:lstStyle/>
-          <a:p>
-            <a:pPr indent="0" marL="0">
-              <a:buNone/>
-            </a:pPr>
-            <a:r>
-              <a:rPr lang="en-US" sz="1450" b="1" dirty="0">
-                <a:solidFill>
-                  <a:srgbClr val="171B23"/>
-                </a:solidFill>
-                <a:latin typeface="Calibri" pitchFamily="34" charset="0"/>
-                <a:ea typeface="Calibri" pitchFamily="34" charset="-122"/>
-                <a:cs typeface="Calibri" pitchFamily="34" charset="-120"/>
-              </a:rPr>
-              <a:t>Deep-Linked Notifications</a:t>
-            </a:r>
-            <a:endParaRPr lang="en-US" sz="1450" dirty="0"/>
-          </a:p>
-        </p:txBody>
-      </p:sp>
-      <p:sp>
-        <p:nvSpPr>
-          <p:cNvPr id="7" name="Text 4"/>
-          <p:cNvSpPr/>
-          <p:nvPr/>
-        </p:nvSpPr>
-        <p:spPr>
-          <a:xfrm>
-            <a:off x="6263640" y="1581912"/>
-            <a:ext cx="5394960" cy="548640"/>
-          </a:xfrm>
-          <a:prstGeom prst="rect">
-            <a:avLst/>
-          </a:prstGeom>
-          <a:noFill/>
-          <a:ln/>
-        </p:spPr>
-        <p:txBody>
-          <a:bodyPr wrap="square" lIns="0" tIns="0" rIns="0" bIns="0" rtlCol="0" anchor="ctr"/>
-          <a:lstStyle/>
-          <a:p>
-            <a:pPr indent="0" marL="0">
-              <a:buNone/>
-            </a:pPr>
-            <a:r>
-              <a:rPr lang="en-US" sz="1200" dirty="0">
-                <a:solidFill>
-                  <a:srgbClr val="5B6472"/>
-                </a:solidFill>
-                <a:latin typeface="Calibri" pitchFamily="34" charset="0"/>
-                <a:ea typeface="Calibri" pitchFamily="34" charset="-122"/>
-                <a:cs typeface="Calibri" pitchFamily="34" charset="-120"/>
-              </a:rPr>
-              <a:t>Clicking a notification opens the exact task, not just a message</a:t>
-            </a:r>
-            <a:endParaRPr lang="en-US" sz="1200" dirty="0"/>
-          </a:p>
-        </p:txBody>
-      </p:sp>
-      <p:sp>
-        <p:nvSpPr>
-          <p:cNvPr id="8" name="Shape 5"/>
-          <p:cNvSpPr/>
-          <p:nvPr/>
-        </p:nvSpPr>
-        <p:spPr>
-          <a:xfrm>
-            <a:off x="548640" y="2258568"/>
-            <a:ext cx="11064240" cy="0"/>
-          </a:xfrm>
-          <a:prstGeom prst="line">
-            <a:avLst/>
-          </a:prstGeom>
-          <a:noFill/>
-          <a:ln w="12700">
-            <a:solidFill>
-              <a:srgbClr val="E3E8EF"/>
-            </a:solidFill>
-            <a:prstDash val="solid"/>
-          </a:ln>
-        </p:spPr>
-      </p:sp>
-      <p:sp>
-        <p:nvSpPr>
-          <p:cNvPr id="9" name="Shape 6"/>
-          <p:cNvSpPr/>
-          <p:nvPr/>
-        </p:nvSpPr>
-        <p:spPr>
-          <a:xfrm>
-            <a:off x="548640" y="2468880"/>
-            <a:ext cx="502920" cy="502920"/>
-          </a:xfrm>
-          <a:prstGeom prst="ellipse">
-            <a:avLst/>
-          </a:prstGeom>
-          <a:solidFill>
-            <a:srgbClr val="4F46E5"/>
-          </a:solidFill>
-          <a:ln/>
-        </p:spPr>
-      </p:sp>
-      <p:pic>
-        <p:nvPicPr>
-          <p:cNvPr id="10" name="Image 1" descr="preencoded.png">    </p:cNvPr>
-          <p:cNvPicPr>
-            <a:picLocks noChangeAspect="1"/>
-          </p:cNvPicPr>
-          <p:nvPr/>
-        </p:nvPicPr>
-        <p:blipFill>
-          <a:blip r:embed="rId2"/>
-          <a:stretch>
-            <a:fillRect/>
-          </a:stretch>
-        </p:blipFill>
-        <p:spPr>
-          <a:xfrm>
-            <a:off x="679399" y="2599639"/>
-            <a:ext cx="241402" cy="241402"/>
-          </a:xfrm>
-          <a:prstGeom prst="rect">
-            <a:avLst/>
-          </a:prstGeom>
-        </p:spPr>
-      </p:pic>
-      <p:sp>
-        <p:nvSpPr>
-          <p:cNvPr id="11" name="Text 7"/>
-          <p:cNvSpPr/>
-          <p:nvPr/>
-        </p:nvSpPr>
-        <p:spPr>
-          <a:xfrm>
-            <a:off x="1234440" y="2450592"/>
-            <a:ext cx="4937760" cy="548640"/>
-          </a:xfrm>
-          <a:prstGeom prst="rect">
-            <a:avLst/>
-          </a:prstGeom>
-          <a:noFill/>
-          <a:ln/>
-        </p:spPr>
-        <p:txBody>
-          <a:bodyPr wrap="square" lIns="0" tIns="0" rIns="0" bIns="0" rtlCol="0" anchor="ctr"/>
-          <a:lstStyle/>
-          <a:p>
-            <a:pPr indent="0" marL="0">
-              <a:buNone/>
-            </a:pPr>
-            <a:r>
-              <a:rPr lang="en-US" sz="1450" b="1" dirty="0">
-                <a:solidFill>
-                  <a:srgbClr val="171B23"/>
-                </a:solidFill>
-                <a:latin typeface="Calibri" pitchFamily="34" charset="0"/>
-                <a:ea typeface="Calibri" pitchFamily="34" charset="-122"/>
-                <a:cs typeface="Calibri" pitchFamily="34" charset="-120"/>
-              </a:rPr>
-              <a:t>Accept / Clarify / Respond</a:t>
-            </a:r>
-            <a:endParaRPr lang="en-US" sz="1450" dirty="0"/>
-          </a:p>
-        </p:txBody>
-      </p:sp>
-      <p:sp>
-        <p:nvSpPr>
-          <p:cNvPr id="12" name="Text 8"/>
-          <p:cNvSpPr/>
-          <p:nvPr/>
-        </p:nvSpPr>
-        <p:spPr>
-          <a:xfrm>
-            <a:off x="6263640" y="2450592"/>
-            <a:ext cx="5394960" cy="548640"/>
-          </a:xfrm>
-          <a:prstGeom prst="rect">
-            <a:avLst/>
-          </a:prstGeom>
-          <a:noFill/>
-          <a:ln/>
-        </p:spPr>
-        <p:txBody>
-          <a:bodyPr wrap="square" lIns="0" tIns="0" rIns="0" bIns="0" rtlCol="0" anchor="ctr"/>
-          <a:lstStyle/>
-          <a:p>
-            <a:pPr indent="0" marL="0">
-              <a:buNone/>
-            </a:pPr>
-            <a:r>
-              <a:rPr lang="en-US" sz="1200" dirty="0">
-                <a:solidFill>
-                  <a:srgbClr val="5B6472"/>
-                </a:solidFill>
-                <a:latin typeface="Calibri" pitchFamily="34" charset="0"/>
-                <a:ea typeface="Calibri" pitchFamily="34" charset="-122"/>
-                <a:cs typeface="Calibri" pitchFamily="34" charset="-120"/>
-              </a:rPr>
-              <a:t>Ownership-checked actions — only an assignee can accept or ask a question</a:t>
-            </a:r>
-            <a:endParaRPr lang="en-US" sz="1200" dirty="0"/>
-          </a:p>
-        </p:txBody>
-      </p:sp>
-      <p:sp>
-        <p:nvSpPr>
-          <p:cNvPr id="13" name="Shape 9"/>
-          <p:cNvSpPr/>
-          <p:nvPr/>
-        </p:nvSpPr>
-        <p:spPr>
-          <a:xfrm>
-            <a:off x="548640" y="3127248"/>
-            <a:ext cx="11064240" cy="0"/>
-          </a:xfrm>
-          <a:prstGeom prst="line">
-            <a:avLst/>
-          </a:prstGeom>
-          <a:noFill/>
-          <a:ln w="12700">
-            <a:solidFill>
-              <a:srgbClr val="E3E8EF"/>
-            </a:solidFill>
-            <a:prstDash val="solid"/>
-          </a:ln>
-        </p:spPr>
-      </p:sp>
-      <p:sp>
-        <p:nvSpPr>
-          <p:cNvPr id="14" name="Shape 10"/>
-          <p:cNvSpPr/>
-          <p:nvPr/>
-        </p:nvSpPr>
-        <p:spPr>
-          <a:xfrm>
-            <a:off x="548640" y="3337560"/>
-            <a:ext cx="502920" cy="502920"/>
-          </a:xfrm>
-          <a:prstGeom prst="ellipse">
-            <a:avLst/>
-          </a:prstGeom>
-          <a:solidFill>
-            <a:srgbClr val="4F46E5"/>
-          </a:solidFill>
-          <a:ln/>
-        </p:spPr>
-      </p:sp>
-      <p:pic>
-        <p:nvPicPr>
-          <p:cNvPr id="15" name="Image 2" descr="preencoded.png">    </p:cNvPr>
+          <p:cNvPr id="5" name="Image 0" descr="preencoded.png"/>
           <p:cNvPicPr>
             <a:picLocks noChangeAspect="1"/>
           </p:cNvPicPr>
@@ -12577,7 +12233,7 @@
         </p:blipFill>
         <p:spPr>
           <a:xfrm>
-            <a:off x="679399" y="3468319"/>
+            <a:off x="679399" y="1730959"/>
             <a:ext cx="241402" cy="241402"/>
           </a:xfrm>
           <a:prstGeom prst="rect">
@@ -12587,13 +12243,13 @@
       </p:pic>
       <p:sp>
         <p:nvSpPr>
-          <p:cNvPr id="16" name="Text 11"/>
-          <p:cNvSpPr/>
-          <p:nvPr/>
-        </p:nvSpPr>
-        <p:spPr>
-          <a:xfrm>
-            <a:off x="1234440" y="3319272"/>
+          <p:cNvPr id="6" name="Text 3"/>
+          <p:cNvSpPr/>
+          <p:nvPr/>
+        </p:nvSpPr>
+        <p:spPr>
+          <a:xfrm>
+            <a:off x="1234440" y="1581912"/>
             <a:ext cx="4937760" cy="548640"/>
           </a:xfrm>
           <a:prstGeom prst="rect">
@@ -12606,7 +12262,7 @@
           <a:bodyPr wrap="square" lIns="0" tIns="0" rIns="0" bIns="0" rtlCol="0" anchor="ctr"/>
           <a:lstStyle/>
           <a:p>
-            <a:pPr indent="0" marL="0">
+            <a:pPr marL="0" indent="0">
               <a:buNone/>
             </a:pPr>
             <a:r>
@@ -12618,7 +12274,7 @@
                 <a:ea typeface="Calibri" pitchFamily="34" charset="-122"/>
                 <a:cs typeface="Calibri" pitchFamily="34" charset="-120"/>
               </a:rPr>
-              <a:t>Real Activity Timeline</a:t>
+              <a:t>Deep-Linked Notifications</a:t>
             </a:r>
             <a:endParaRPr lang="en-US" sz="1450" dirty="0"/>
           </a:p>
@@ -12626,13 +12282,13 @@
       </p:sp>
       <p:sp>
         <p:nvSpPr>
-          <p:cNvPr id="17" name="Text 12"/>
-          <p:cNvSpPr/>
-          <p:nvPr/>
-        </p:nvSpPr>
-        <p:spPr>
-          <a:xfrm>
-            <a:off x="6263640" y="3319272"/>
+          <p:cNvPr id="7" name="Text 4"/>
+          <p:cNvSpPr/>
+          <p:nvPr/>
+        </p:nvSpPr>
+        <p:spPr>
+          <a:xfrm>
+            <a:off x="6263640" y="1581912"/>
             <a:ext cx="5394960" cy="548640"/>
           </a:xfrm>
           <a:prstGeom prst="rect">
@@ -12645,7 +12301,7 @@
           <a:bodyPr wrap="square" lIns="0" tIns="0" rIns="0" bIns="0" rtlCol="0" anchor="ctr"/>
           <a:lstStyle/>
           <a:p>
-            <a:pPr indent="0" marL="0">
+            <a:pPr marL="0" indent="0">
               <a:buNone/>
             </a:pPr>
             <a:r>
@@ -12657,7 +12313,7 @@
                 <a:ea typeface="Calibri" pitchFamily="34" charset="-122"/>
                 <a:cs typeface="Calibri" pitchFamily="34" charset="-120"/>
               </a:rPr>
-              <a:t>Every status change and action is logged and visible per task</a:t>
+              <a:t>Clicking a notification opens the exact task, not just a message</a:t>
             </a:r>
             <a:endParaRPr lang="en-US" sz="1200" dirty="0"/>
           </a:p>
@@ -12665,13 +12321,13 @@
       </p:sp>
       <p:sp>
         <p:nvSpPr>
-          <p:cNvPr id="18" name="Shape 13"/>
-          <p:cNvSpPr/>
-          <p:nvPr/>
-        </p:nvSpPr>
-        <p:spPr>
-          <a:xfrm>
-            <a:off x="548640" y="3995928"/>
+          <p:cNvPr id="8" name="Shape 5"/>
+          <p:cNvSpPr/>
+          <p:nvPr/>
+        </p:nvSpPr>
+        <p:spPr>
+          <a:xfrm>
+            <a:off x="548640" y="2258568"/>
             <a:ext cx="11064240" cy="0"/>
           </a:xfrm>
           <a:prstGeom prst="line">
@@ -12688,13 +12344,13 @@
       </p:sp>
       <p:sp>
         <p:nvSpPr>
-          <p:cNvPr id="19" name="Shape 14"/>
-          <p:cNvSpPr/>
-          <p:nvPr/>
-        </p:nvSpPr>
-        <p:spPr>
-          <a:xfrm>
-            <a:off x="548640" y="4206240"/>
+          <p:cNvPr id="9" name="Shape 6"/>
+          <p:cNvSpPr/>
+          <p:nvPr/>
+        </p:nvSpPr>
+        <p:spPr>
+          <a:xfrm>
+            <a:off x="548640" y="2468880"/>
             <a:ext cx="502920" cy="502920"/>
           </a:xfrm>
           <a:prstGeom prst="ellipse">
@@ -12708,7 +12364,7 @@
       </p:sp>
       <p:pic>
         <p:nvPicPr>
-          <p:cNvPr id="20" name="Image 3" descr="preencoded.png">    </p:cNvPr>
+          <p:cNvPr id="10" name="Image 1" descr="preencoded.png"/>
           <p:cNvPicPr>
             <a:picLocks noChangeAspect="1"/>
           </p:cNvPicPr>
@@ -12722,7 +12378,7 @@
         </p:blipFill>
         <p:spPr>
           <a:xfrm>
-            <a:off x="679399" y="4336999"/>
+            <a:off x="679399" y="2599639"/>
             <a:ext cx="241402" cy="241402"/>
           </a:xfrm>
           <a:prstGeom prst="rect">
@@ -12732,13 +12388,13 @@
       </p:pic>
       <p:sp>
         <p:nvSpPr>
-          <p:cNvPr id="21" name="Text 15"/>
-          <p:cNvSpPr/>
-          <p:nvPr/>
-        </p:nvSpPr>
-        <p:spPr>
-          <a:xfrm>
-            <a:off x="1234440" y="4187952"/>
+          <p:cNvPr id="11" name="Text 7"/>
+          <p:cNvSpPr/>
+          <p:nvPr/>
+        </p:nvSpPr>
+        <p:spPr>
+          <a:xfrm>
+            <a:off x="1234440" y="2450592"/>
             <a:ext cx="4937760" cy="548640"/>
           </a:xfrm>
           <a:prstGeom prst="rect">
@@ -12751,7 +12407,7 @@
           <a:bodyPr wrap="square" lIns="0" tIns="0" rIns="0" bIns="0" rtlCol="0" anchor="ctr"/>
           <a:lstStyle/>
           <a:p>
-            <a:pPr indent="0" marL="0">
+            <a:pPr marL="0" indent="0">
               <a:buNone/>
             </a:pPr>
             <a:r>
@@ -12763,7 +12419,7 @@
                 <a:ea typeface="Calibri" pitchFamily="34" charset="-122"/>
                 <a:cs typeface="Calibri" pitchFamily="34" charset="-120"/>
               </a:rPr>
-              <a:t>Live Dashboard</a:t>
+              <a:t>Accept / Clarify / Respond</a:t>
             </a:r>
             <a:endParaRPr lang="en-US" sz="1450" dirty="0"/>
           </a:p>
@@ -12771,13 +12427,13 @@
       </p:sp>
       <p:sp>
         <p:nvSpPr>
-          <p:cNvPr id="22" name="Text 16"/>
-          <p:cNvSpPr/>
-          <p:nvPr/>
-        </p:nvSpPr>
-        <p:spPr>
-          <a:xfrm>
-            <a:off x="6263640" y="4187952"/>
+          <p:cNvPr id="12" name="Text 8"/>
+          <p:cNvSpPr/>
+          <p:nvPr/>
+        </p:nvSpPr>
+        <p:spPr>
+          <a:xfrm>
+            <a:off x="6263640" y="2450592"/>
             <a:ext cx="5394960" cy="548640"/>
           </a:xfrm>
           <a:prstGeom prst="rect">
@@ -12790,7 +12446,7 @@
           <a:bodyPr wrap="square" lIns="0" tIns="0" rIns="0" bIns="0" rtlCol="0" anchor="ctr"/>
           <a:lstStyle/>
           <a:p>
-            <a:pPr indent="0" marL="0">
+            <a:pPr marL="0" indent="0">
               <a:buNone/>
             </a:pPr>
             <a:r>
@@ -12802,7 +12458,7 @@
                 <a:ea typeface="Calibri" pitchFamily="34" charset="-122"/>
                 <a:cs typeface="Calibri" pitchFamily="34" charset="-120"/>
               </a:rPr>
-              <a:t>Task-status and project-split charts driven by real data</a:t>
+              <a:t>Ownership-checked actions — only an assignee can accept or ask a question</a:t>
             </a:r>
             <a:endParaRPr lang="en-US" sz="1200" dirty="0"/>
           </a:p>
@@ -12810,13 +12466,13 @@
       </p:sp>
       <p:sp>
         <p:nvSpPr>
-          <p:cNvPr id="23" name="Shape 17"/>
-          <p:cNvSpPr/>
-          <p:nvPr/>
-        </p:nvSpPr>
-        <p:spPr>
-          <a:xfrm>
-            <a:off x="548640" y="4864608"/>
+          <p:cNvPr id="13" name="Shape 9"/>
+          <p:cNvSpPr/>
+          <p:nvPr/>
+        </p:nvSpPr>
+        <p:spPr>
+          <a:xfrm>
+            <a:off x="548640" y="3127248"/>
             <a:ext cx="11064240" cy="0"/>
           </a:xfrm>
           <a:prstGeom prst="line">
@@ -12833,13 +12489,13 @@
       </p:sp>
       <p:sp>
         <p:nvSpPr>
-          <p:cNvPr id="24" name="Shape 18"/>
-          <p:cNvSpPr/>
-          <p:nvPr/>
-        </p:nvSpPr>
-        <p:spPr>
-          <a:xfrm>
-            <a:off x="548640" y="5074920"/>
+          <p:cNvPr id="14" name="Shape 10"/>
+          <p:cNvSpPr/>
+          <p:nvPr/>
+        </p:nvSpPr>
+        <p:spPr>
+          <a:xfrm>
+            <a:off x="548640" y="3337560"/>
             <a:ext cx="502920" cy="502920"/>
           </a:xfrm>
           <a:prstGeom prst="ellipse">
@@ -12853,7 +12509,7 @@
       </p:sp>
       <p:pic>
         <p:nvPicPr>
-          <p:cNvPr id="25" name="Image 4" descr="preencoded.png">    </p:cNvPr>
+          <p:cNvPr id="15" name="Image 2" descr="preencoded.png"/>
           <p:cNvPicPr>
             <a:picLocks noChangeAspect="1"/>
           </p:cNvPicPr>
@@ -12867,7 +12523,7 @@
         </p:blipFill>
         <p:spPr>
           <a:xfrm>
-            <a:off x="679399" y="5205679"/>
+            <a:off x="679399" y="3468319"/>
             <a:ext cx="241402" cy="241402"/>
           </a:xfrm>
           <a:prstGeom prst="rect">
@@ -12877,13 +12533,13 @@
       </p:pic>
       <p:sp>
         <p:nvSpPr>
-          <p:cNvPr id="26" name="Text 19"/>
-          <p:cNvSpPr/>
-          <p:nvPr/>
-        </p:nvSpPr>
-        <p:spPr>
-          <a:xfrm>
-            <a:off x="1234440" y="5056632"/>
+          <p:cNvPr id="16" name="Text 11"/>
+          <p:cNvSpPr/>
+          <p:nvPr/>
+        </p:nvSpPr>
+        <p:spPr>
+          <a:xfrm>
+            <a:off x="1234440" y="3319272"/>
             <a:ext cx="4937760" cy="548640"/>
           </a:xfrm>
           <a:prstGeom prst="rect">
@@ -12896,7 +12552,7 @@
           <a:bodyPr wrap="square" lIns="0" tIns="0" rIns="0" bIns="0" rtlCol="0" anchor="ctr"/>
           <a:lstStyle/>
           <a:p>
-            <a:pPr indent="0" marL="0">
+            <a:pPr marL="0" indent="0">
               <a:buNone/>
             </a:pPr>
             <a:r>
@@ -12908,7 +12564,7 @@
                 <a:ea typeface="Calibri" pitchFamily="34" charset="-122"/>
                 <a:cs typeface="Calibri" pitchFamily="34" charset="-120"/>
               </a:rPr>
-              <a:t>Project Progress Tracking</a:t>
+              <a:t>Real Activity Timeline</a:t>
             </a:r>
             <a:endParaRPr lang="en-US" sz="1450" dirty="0"/>
           </a:p>
@@ -12916,13 +12572,13 @@
       </p:sp>
       <p:sp>
         <p:nvSpPr>
-          <p:cNvPr id="27" name="Text 20"/>
-          <p:cNvSpPr/>
-          <p:nvPr/>
-        </p:nvSpPr>
-        <p:spPr>
-          <a:xfrm>
-            <a:off x="6263640" y="5056632"/>
+          <p:cNvPr id="17" name="Text 12"/>
+          <p:cNvSpPr/>
+          <p:nvPr/>
+        </p:nvSpPr>
+        <p:spPr>
+          <a:xfrm>
+            <a:off x="6263640" y="3319272"/>
             <a:ext cx="5394960" cy="548640"/>
           </a:xfrm>
           <a:prstGeom prst="rect">
@@ -12935,7 +12591,7 @@
           <a:bodyPr wrap="square" lIns="0" tIns="0" rIns="0" bIns="0" rtlCol="0" anchor="ctr"/>
           <a:lstStyle/>
           <a:p>
-            <a:pPr indent="0" marL="0">
+            <a:pPr marL="0" indent="0">
               <a:buNone/>
             </a:pPr>
             <a:r>
@@ -12947,7 +12603,7 @@
                 <a:ea typeface="Calibri" pitchFamily="34" charset="-122"/>
                 <a:cs typeface="Calibri" pitchFamily="34" charset="-120"/>
               </a:rPr>
-              <a:t>Completion percentage computed from actual task counts</a:t>
+              <a:t>Every status change and action is logged and visible per task</a:t>
             </a:r>
             <a:endParaRPr lang="en-US" sz="1200" dirty="0"/>
           </a:p>
@@ -12955,13 +12611,13 @@
       </p:sp>
       <p:sp>
         <p:nvSpPr>
-          <p:cNvPr id="28" name="Shape 21"/>
-          <p:cNvSpPr/>
-          <p:nvPr/>
-        </p:nvSpPr>
-        <p:spPr>
-          <a:xfrm>
-            <a:off x="548640" y="5733288"/>
+          <p:cNvPr id="18" name="Shape 13"/>
+          <p:cNvSpPr/>
+          <p:nvPr/>
+        </p:nvSpPr>
+        <p:spPr>
+          <a:xfrm>
+            <a:off x="548640" y="3995928"/>
             <a:ext cx="11064240" cy="0"/>
           </a:xfrm>
           <a:prstGeom prst="line">
@@ -12978,6 +12634,296 @@
       </p:sp>
       <p:sp>
         <p:nvSpPr>
+          <p:cNvPr id="19" name="Shape 14"/>
+          <p:cNvSpPr/>
+          <p:nvPr/>
+        </p:nvSpPr>
+        <p:spPr>
+          <a:xfrm>
+            <a:off x="548640" y="4206240"/>
+            <a:ext cx="502920" cy="502920"/>
+          </a:xfrm>
+          <a:prstGeom prst="ellipse">
+            <a:avLst/>
+          </a:prstGeom>
+          <a:solidFill>
+            <a:srgbClr val="4F46E5"/>
+          </a:solidFill>
+          <a:ln/>
+        </p:spPr>
+      </p:sp>
+      <p:pic>
+        <p:nvPicPr>
+          <p:cNvPr id="20" name="Image 3" descr="preencoded.png"/>
+          <p:cNvPicPr>
+            <a:picLocks noChangeAspect="1"/>
+          </p:cNvPicPr>
+          <p:nvPr/>
+        </p:nvPicPr>
+        <p:blipFill>
+          <a:blip r:embed="rId6"/>
+          <a:stretch>
+            <a:fillRect/>
+          </a:stretch>
+        </p:blipFill>
+        <p:spPr>
+          <a:xfrm>
+            <a:off x="679399" y="4336999"/>
+            <a:ext cx="241402" cy="241402"/>
+          </a:xfrm>
+          <a:prstGeom prst="rect">
+            <a:avLst/>
+          </a:prstGeom>
+        </p:spPr>
+      </p:pic>
+      <p:sp>
+        <p:nvSpPr>
+          <p:cNvPr id="21" name="Text 15"/>
+          <p:cNvSpPr/>
+          <p:nvPr/>
+        </p:nvSpPr>
+        <p:spPr>
+          <a:xfrm>
+            <a:off x="1234440" y="4187952"/>
+            <a:ext cx="4937760" cy="548640"/>
+          </a:xfrm>
+          <a:prstGeom prst="rect">
+            <a:avLst/>
+          </a:prstGeom>
+          <a:noFill/>
+          <a:ln/>
+        </p:spPr>
+        <p:txBody>
+          <a:bodyPr wrap="square" lIns="0" tIns="0" rIns="0" bIns="0" rtlCol="0" anchor="ctr"/>
+          <a:lstStyle/>
+          <a:p>
+            <a:pPr marL="0" indent="0">
+              <a:buNone/>
+            </a:pPr>
+            <a:r>
+              <a:rPr lang="en-US" sz="1450" b="1" dirty="0">
+                <a:solidFill>
+                  <a:srgbClr val="171B23"/>
+                </a:solidFill>
+                <a:latin typeface="Calibri" pitchFamily="34" charset="0"/>
+                <a:ea typeface="Calibri" pitchFamily="34" charset="-122"/>
+                <a:cs typeface="Calibri" pitchFamily="34" charset="-120"/>
+              </a:rPr>
+              <a:t>Live Dashboard</a:t>
+            </a:r>
+            <a:endParaRPr lang="en-US" sz="1450" dirty="0"/>
+          </a:p>
+        </p:txBody>
+      </p:sp>
+      <p:sp>
+        <p:nvSpPr>
+          <p:cNvPr id="22" name="Text 16"/>
+          <p:cNvSpPr/>
+          <p:nvPr/>
+        </p:nvSpPr>
+        <p:spPr>
+          <a:xfrm>
+            <a:off x="6263640" y="4187952"/>
+            <a:ext cx="5394960" cy="548640"/>
+          </a:xfrm>
+          <a:prstGeom prst="rect">
+            <a:avLst/>
+          </a:prstGeom>
+          <a:noFill/>
+          <a:ln/>
+        </p:spPr>
+        <p:txBody>
+          <a:bodyPr wrap="square" lIns="0" tIns="0" rIns="0" bIns="0" rtlCol="0" anchor="ctr"/>
+          <a:lstStyle/>
+          <a:p>
+            <a:pPr marL="0" indent="0">
+              <a:buNone/>
+            </a:pPr>
+            <a:r>
+              <a:rPr lang="en-US" sz="1200" dirty="0">
+                <a:solidFill>
+                  <a:srgbClr val="5B6472"/>
+                </a:solidFill>
+                <a:latin typeface="Calibri" pitchFamily="34" charset="0"/>
+                <a:ea typeface="Calibri" pitchFamily="34" charset="-122"/>
+                <a:cs typeface="Calibri" pitchFamily="34" charset="-120"/>
+              </a:rPr>
+              <a:t>Task-status and project-split charts driven by real data</a:t>
+            </a:r>
+            <a:endParaRPr lang="en-US" sz="1200" dirty="0"/>
+          </a:p>
+        </p:txBody>
+      </p:sp>
+      <p:sp>
+        <p:nvSpPr>
+          <p:cNvPr id="23" name="Shape 17"/>
+          <p:cNvSpPr/>
+          <p:nvPr/>
+        </p:nvSpPr>
+        <p:spPr>
+          <a:xfrm>
+            <a:off x="548640" y="4864608"/>
+            <a:ext cx="11064240" cy="0"/>
+          </a:xfrm>
+          <a:prstGeom prst="line">
+            <a:avLst/>
+          </a:prstGeom>
+          <a:noFill/>
+          <a:ln w="12700">
+            <a:solidFill>
+              <a:srgbClr val="E3E8EF"/>
+            </a:solidFill>
+            <a:prstDash val="solid"/>
+          </a:ln>
+        </p:spPr>
+      </p:sp>
+      <p:sp>
+        <p:nvSpPr>
+          <p:cNvPr id="24" name="Shape 18"/>
+          <p:cNvSpPr/>
+          <p:nvPr/>
+        </p:nvSpPr>
+        <p:spPr>
+          <a:xfrm>
+            <a:off x="548640" y="5074920"/>
+            <a:ext cx="502920" cy="502920"/>
+          </a:xfrm>
+          <a:prstGeom prst="ellipse">
+            <a:avLst/>
+          </a:prstGeom>
+          <a:solidFill>
+            <a:srgbClr val="4F46E5"/>
+          </a:solidFill>
+          <a:ln/>
+        </p:spPr>
+      </p:sp>
+      <p:pic>
+        <p:nvPicPr>
+          <p:cNvPr id="25" name="Image 4" descr="preencoded.png"/>
+          <p:cNvPicPr>
+            <a:picLocks noChangeAspect="1"/>
+          </p:cNvPicPr>
+          <p:nvPr/>
+        </p:nvPicPr>
+        <p:blipFill>
+          <a:blip r:embed="rId7"/>
+          <a:stretch>
+            <a:fillRect/>
+          </a:stretch>
+        </p:blipFill>
+        <p:spPr>
+          <a:xfrm>
+            <a:off x="679399" y="5205679"/>
+            <a:ext cx="241402" cy="241402"/>
+          </a:xfrm>
+          <a:prstGeom prst="rect">
+            <a:avLst/>
+          </a:prstGeom>
+        </p:spPr>
+      </p:pic>
+      <p:sp>
+        <p:nvSpPr>
+          <p:cNvPr id="26" name="Text 19"/>
+          <p:cNvSpPr/>
+          <p:nvPr/>
+        </p:nvSpPr>
+        <p:spPr>
+          <a:xfrm>
+            <a:off x="1234440" y="5056632"/>
+            <a:ext cx="4937760" cy="548640"/>
+          </a:xfrm>
+          <a:prstGeom prst="rect">
+            <a:avLst/>
+          </a:prstGeom>
+          <a:noFill/>
+          <a:ln/>
+        </p:spPr>
+        <p:txBody>
+          <a:bodyPr wrap="square" lIns="0" tIns="0" rIns="0" bIns="0" rtlCol="0" anchor="ctr"/>
+          <a:lstStyle/>
+          <a:p>
+            <a:pPr marL="0" indent="0">
+              <a:buNone/>
+            </a:pPr>
+            <a:r>
+              <a:rPr lang="en-US" sz="1450" b="1" dirty="0">
+                <a:solidFill>
+                  <a:srgbClr val="171B23"/>
+                </a:solidFill>
+                <a:latin typeface="Calibri" pitchFamily="34" charset="0"/>
+                <a:ea typeface="Calibri" pitchFamily="34" charset="-122"/>
+                <a:cs typeface="Calibri" pitchFamily="34" charset="-120"/>
+              </a:rPr>
+              <a:t>Project Progress Tracking</a:t>
+            </a:r>
+            <a:endParaRPr lang="en-US" sz="1450" dirty="0"/>
+          </a:p>
+        </p:txBody>
+      </p:sp>
+      <p:sp>
+        <p:nvSpPr>
+          <p:cNvPr id="27" name="Text 20"/>
+          <p:cNvSpPr/>
+          <p:nvPr/>
+        </p:nvSpPr>
+        <p:spPr>
+          <a:xfrm>
+            <a:off x="6263640" y="5056632"/>
+            <a:ext cx="5394960" cy="548640"/>
+          </a:xfrm>
+          <a:prstGeom prst="rect">
+            <a:avLst/>
+          </a:prstGeom>
+          <a:noFill/>
+          <a:ln/>
+        </p:spPr>
+        <p:txBody>
+          <a:bodyPr wrap="square" lIns="0" tIns="0" rIns="0" bIns="0" rtlCol="0" anchor="ctr"/>
+          <a:lstStyle/>
+          <a:p>
+            <a:pPr marL="0" indent="0">
+              <a:buNone/>
+            </a:pPr>
+            <a:r>
+              <a:rPr lang="en-US" sz="1200" dirty="0">
+                <a:solidFill>
+                  <a:srgbClr val="5B6472"/>
+                </a:solidFill>
+                <a:latin typeface="Calibri" pitchFamily="34" charset="0"/>
+                <a:ea typeface="Calibri" pitchFamily="34" charset="-122"/>
+                <a:cs typeface="Calibri" pitchFamily="34" charset="-120"/>
+              </a:rPr>
+              <a:t>Completion percentage computed from actual task counts</a:t>
+            </a:r>
+            <a:endParaRPr lang="en-US" sz="1200" dirty="0"/>
+          </a:p>
+        </p:txBody>
+      </p:sp>
+      <p:sp>
+        <p:nvSpPr>
+          <p:cNvPr id="28" name="Shape 21"/>
+          <p:cNvSpPr/>
+          <p:nvPr/>
+        </p:nvSpPr>
+        <p:spPr>
+          <a:xfrm>
+            <a:off x="548640" y="5733288"/>
+            <a:ext cx="11064240" cy="0"/>
+          </a:xfrm>
+          <a:prstGeom prst="line">
+            <a:avLst/>
+          </a:prstGeom>
+          <a:noFill/>
+          <a:ln w="12700">
+            <a:solidFill>
+              <a:srgbClr val="E3E8EF"/>
+            </a:solidFill>
+            <a:prstDash val="solid"/>
+          </a:ln>
+        </p:spPr>
+      </p:sp>
+      <p:sp>
+        <p:nvSpPr>
           <p:cNvPr id="29" name="Text 22"/>
           <p:cNvSpPr/>
           <p:nvPr/>
@@ -12997,7 +12943,7 @@
           <a:bodyPr wrap="square" lIns="0" tIns="0" rIns="0" bIns="0" rtlCol="0" anchor="ctr"/>
           <a:lstStyle/>
           <a:p>
-            <a:pPr indent="0" marL="0">
+            <a:pPr marL="0" indent="0">
               <a:buNone/>
             </a:pPr>
             <a:r>
@@ -13036,7 +12982,7 @@
           <a:bodyPr wrap="square" lIns="0" tIns="0" rIns="0" bIns="0" rtlCol="0" anchor="ctr"/>
           <a:lstStyle/>
           <a:p>
-            <a:pPr algn="r" indent="0" marL="0">
+            <a:pPr marL="0" indent="0" algn="r">
               <a:buNone/>
             </a:pPr>
             <a:r>
@@ -13070,6 +13016,7 @@
         <a:solidFill>
           <a:srgbClr val="FFFFFF"/>
         </a:solidFill>
+        <a:effectLst/>
       </p:bgPr>
     </p:bg>
     <p:spTree>
@@ -13107,11 +13054,11 @@
           <a:bodyPr wrap="square" lIns="0" tIns="0" rIns="0" bIns="0" rtlCol="0" anchor="ctr"/>
           <a:lstStyle/>
           <a:p>
-            <a:pPr indent="0" marL="0">
-              <a:buNone/>
-            </a:pPr>
-            <a:r>
-              <a:rPr lang="en-US" sz="1200" b="1" spc="200" kern="0" dirty="0">
+            <a:pPr marL="0" indent="0">
+              <a:buNone/>
+            </a:pPr>
+            <a:r>
+              <a:rPr lang="en-US" sz="1200" b="1" kern="0" spc="200" dirty="0">
                 <a:solidFill>
                   <a:srgbClr val="4F46E5"/>
                 </a:solidFill>
@@ -13146,7 +13093,7 @@
           <a:bodyPr wrap="square" lIns="0" tIns="0" rIns="0" bIns="0" rtlCol="0" anchor="ctr"/>
           <a:lstStyle/>
           <a:p>
-            <a:pPr indent="0" marL="0">
+            <a:pPr marL="0" indent="0">
               <a:buNone/>
             </a:pPr>
             <a:r>
@@ -13166,15 +13113,15 @@
       </p:sp>
       <p:pic>
         <p:nvPicPr>
-          <p:cNvPr id="4" name="Image 0" descr="/mnt/user-data/uploads/Screenshot_2026-07-24_173523.png">    </p:cNvPr>
+          <p:cNvPr id="4" name="Image 0" descr="/mnt/user-data/uploads/Screenshot_2026-07-24_173523.png"/>
           <p:cNvPicPr>
             <a:picLocks noChangeAspect="1"/>
           </p:cNvPicPr>
           <p:nvPr/>
         </p:nvPicPr>
         <p:blipFill>
-          <a:blip r:embed="rId1"/>
-          <a:srcRect l="0" r="0" t="0" b="0"/>
+          <a:blip r:embed="rId3"/>
+          <a:srcRect/>
           <a:stretch/>
         </p:blipFill>
         <p:spPr>
@@ -13230,7 +13177,7 @@
           <a:bodyPr wrap="square" lIns="0" tIns="0" rIns="0" bIns="0" rtlCol="0" anchor="ctr"/>
           <a:lstStyle/>
           <a:p>
-            <a:pPr algn="ctr" indent="0" marL="0">
+            <a:pPr marL="0" indent="0" algn="ctr">
               <a:buNone/>
             </a:pPr>
             <a:r>
@@ -13250,15 +13197,15 @@
       </p:sp>
       <p:pic>
         <p:nvPicPr>
-          <p:cNvPr id="7" name="Image 1" descr="/mnt/user-data/uploads/Screenshot_2026-07-24_182038.png">    </p:cNvPr>
+          <p:cNvPr id="7" name="Image 1" descr="/mnt/user-data/uploads/Screenshot_2026-07-24_182038.png"/>
           <p:cNvPicPr>
             <a:picLocks noChangeAspect="1"/>
           </p:cNvPicPr>
           <p:nvPr/>
         </p:nvPicPr>
         <p:blipFill>
-          <a:blip r:embed="rId2"/>
-          <a:srcRect l="0" r="0" t="0" b="0"/>
+          <a:blip r:embed="rId4"/>
+          <a:srcRect/>
           <a:stretch/>
         </p:blipFill>
         <p:spPr>
@@ -13314,7 +13261,7 @@
           <a:bodyPr wrap="square" lIns="0" tIns="0" rIns="0" bIns="0" rtlCol="0" anchor="ctr"/>
           <a:lstStyle/>
           <a:p>
-            <a:pPr algn="ctr" indent="0" marL="0">
+            <a:pPr marL="0" indent="0" algn="ctr">
               <a:buNone/>
             </a:pPr>
             <a:r>
@@ -13334,15 +13281,15 @@
       </p:sp>
       <p:pic>
         <p:nvPicPr>
-          <p:cNvPr id="10" name="Image 2" descr="/mnt/user-data/uploads/Screenshot_2026-07-24_182101.png">    </p:cNvPr>
+          <p:cNvPr id="10" name="Image 2" descr="/mnt/user-data/uploads/Screenshot_2026-07-24_182101.png"/>
           <p:cNvPicPr>
             <a:picLocks noChangeAspect="1"/>
           </p:cNvPicPr>
           <p:nvPr/>
         </p:nvPicPr>
         <p:blipFill>
-          <a:blip r:embed="rId3"/>
-          <a:srcRect l="0" r="0" t="0" b="0"/>
+          <a:blip r:embed="rId5"/>
+          <a:srcRect/>
           <a:stretch/>
         </p:blipFill>
         <p:spPr>
@@ -13398,7 +13345,7 @@
           <a:bodyPr wrap="square" lIns="0" tIns="0" rIns="0" bIns="0" rtlCol="0" anchor="ctr"/>
           <a:lstStyle/>
           <a:p>
-            <a:pPr algn="ctr" indent="0" marL="0">
+            <a:pPr marL="0" indent="0" algn="ctr">
               <a:buNone/>
             </a:pPr>
             <a:r>
@@ -13418,15 +13365,15 @@
       </p:sp>
       <p:pic>
         <p:nvPicPr>
-          <p:cNvPr id="13" name="Image 3" descr="/mnt/user-data/uploads/Screenshot_2026-07-24_182123.png">    </p:cNvPr>
+          <p:cNvPr id="13" name="Image 3" descr="/mnt/user-data/uploads/Screenshot_2026-07-24_182123.png"/>
           <p:cNvPicPr>
             <a:picLocks noChangeAspect="1"/>
           </p:cNvPicPr>
           <p:nvPr/>
         </p:nvPicPr>
         <p:blipFill>
-          <a:blip r:embed="rId4"/>
-          <a:srcRect l="0" r="0" t="0" b="0"/>
+          <a:blip r:embed="rId6"/>
+          <a:srcRect/>
           <a:stretch/>
         </p:blipFill>
         <p:spPr>
@@ -13482,7 +13429,7 @@
           <a:bodyPr wrap="square" lIns="0" tIns="0" rIns="0" bIns="0" rtlCol="0" anchor="ctr"/>
           <a:lstStyle/>
           <a:p>
-            <a:pPr algn="ctr" indent="0" marL="0">
+            <a:pPr marL="0" indent="0" algn="ctr">
               <a:buNone/>
             </a:pPr>
             <a:r>
@@ -13502,15 +13449,15 @@
       </p:sp>
       <p:pic>
         <p:nvPicPr>
-          <p:cNvPr id="16" name="Image 4" descr="/mnt/user-data/uploads/Screenshot_2026-07-24_182203.png">    </p:cNvPr>
+          <p:cNvPr id="16" name="Image 4" descr="/mnt/user-data/uploads/Screenshot_2026-07-24_182203.png"/>
           <p:cNvPicPr>
             <a:picLocks noChangeAspect="1"/>
           </p:cNvPicPr>
           <p:nvPr/>
         </p:nvPicPr>
         <p:blipFill>
-          <a:blip r:embed="rId5"/>
-          <a:srcRect l="0" r="0" t="0" b="0"/>
+          <a:blip r:embed="rId7"/>
+          <a:srcRect/>
           <a:stretch/>
         </p:blipFill>
         <p:spPr>
@@ -13566,7 +13513,7 @@
           <a:bodyPr wrap="square" lIns="0" tIns="0" rIns="0" bIns="0" rtlCol="0" anchor="ctr"/>
           <a:lstStyle/>
           <a:p>
-            <a:pPr algn="ctr" indent="0" marL="0">
+            <a:pPr marL="0" indent="0" algn="ctr">
               <a:buNone/>
             </a:pPr>
             <a:r>
@@ -13605,7 +13552,7 @@
           <a:bodyPr wrap="square" lIns="0" tIns="0" rIns="0" bIns="0" rtlCol="0" anchor="ctr"/>
           <a:lstStyle/>
           <a:p>
-            <a:pPr indent="0" marL="0">
+            <a:pPr marL="0" indent="0">
               <a:buNone/>
             </a:pPr>
             <a:r>
@@ -13644,7 +13591,7 @@
           <a:bodyPr wrap="square" lIns="0" tIns="0" rIns="0" bIns="0" rtlCol="0" anchor="ctr"/>
           <a:lstStyle/>
           <a:p>
-            <a:pPr algn="r" indent="0" marL="0">
+            <a:pPr marL="0" indent="0" algn="r">
               <a:buNone/>
             </a:pPr>
             <a:r>
@@ -13963,4 +13910,299 @@
     </a:ext>
   </a:extLst>
 </a:theme>
+</file>
+
+<file path=ppt/theme/theme2.xml><?xml version="1.0" encoding="utf-8"?>
+<a:theme xmlns:a="http://schemas.openxmlformats.org/drawingml/2006/main" name="Office Theme">
+  <a:themeElements>
+    <a:clrScheme name="Office">
+      <a:dk1>
+        <a:sysClr val="windowText" lastClr="000000"/>
+      </a:dk1>
+      <a:lt1>
+        <a:sysClr val="window" lastClr="FFFFFF"/>
+      </a:lt1>
+      <a:dk2>
+        <a:srgbClr val="44546A"/>
+      </a:dk2>
+      <a:lt2>
+        <a:srgbClr val="E7E6E6"/>
+      </a:lt2>
+      <a:accent1>
+        <a:srgbClr val="4472C4"/>
+      </a:accent1>
+      <a:accent2>
+        <a:srgbClr val="ED7D31"/>
+      </a:accent2>
+      <a:accent3>
+        <a:srgbClr val="A5A5A5"/>
+      </a:accent3>
+      <a:accent4>
+        <a:srgbClr val="FFC000"/>
+      </a:accent4>
+      <a:accent5>
+        <a:srgbClr val="5B9BD5"/>
+      </a:accent5>
+      <a:accent6>
+        <a:srgbClr val="70AD47"/>
+      </a:accent6>
+      <a:hlink>
+        <a:srgbClr val="0563C1"/>
+      </a:hlink>
+      <a:folHlink>
+        <a:srgbClr val="954F72"/>
+      </a:folHlink>
+    </a:clrScheme>
+    <a:fontScheme name="Office">
+      <a:majorFont>
+        <a:latin typeface="Calibri Light" panose="020F0302020204030204"/>
+        <a:ea typeface=""/>
+        <a:cs typeface=""/>
+        <a:font script="Jpan" typeface="游ゴシック Light"/>
+        <a:font script="Hang" typeface="맑은 고딕"/>
+        <a:font script="Hans" typeface="等线 Light"/>
+        <a:font script="Hant" typeface="新細明體"/>
+        <a:font script="Arab" typeface="Times New Roman"/>
+        <a:font script="Hebr" typeface="Times New Roman"/>
+        <a:font script="Thai" typeface="Angsana New"/>
+        <a:font script="Ethi" typeface="Nyala"/>
+        <a:font script="Beng" typeface="Vrinda"/>
+        <a:font script="Gujr" typeface="Shruti"/>
+        <a:font script="Khmr" typeface="MoolBoran"/>
+        <a:font script="Knda" typeface="Tunga"/>
+        <a:font script="Guru" typeface="Raavi"/>
+        <a:font script="Cans" typeface="Euphemia"/>
+        <a:font script="Cher" typeface="Plantagenet Cherokee"/>
+        <a:font script="Yiii" typeface="Microsoft Yi Baiti"/>
+        <a:font script="Tibt" typeface="Microsoft Himalaya"/>
+        <a:font script="Thaa" typeface="MV Boli"/>
+        <a:font script="Deva" typeface="Mangal"/>
+        <a:font script="Telu" typeface="Gautami"/>
+        <a:font script="Taml" typeface="Latha"/>
+        <a:font script="Syrc" typeface="Estrangelo Edessa"/>
+        <a:font script="Orya" typeface="Kalinga"/>
+        <a:font script="Mlym" typeface="Kartika"/>
+        <a:font script="Laoo" typeface="DokChampa"/>
+        <a:font script="Sinh" typeface="Iskoola Pota"/>
+        <a:font script="Mong" typeface="Mongolian Baiti"/>
+        <a:font script="Viet" typeface="Times New Roman"/>
+        <a:font script="Uigh" typeface="Microsoft Uighur"/>
+        <a:font script="Geor" typeface="Sylfaen"/>
+        <a:font script="Armn" typeface="Arial"/>
+        <a:font script="Bugi" typeface="Leelawadee UI"/>
+        <a:font script="Bopo" typeface="Microsoft JhengHei"/>
+        <a:font script="Java" typeface="Javanese Text"/>
+        <a:font script="Lisu" typeface="Segoe UI"/>
+        <a:font script="Mymr" typeface="Myanmar Text"/>
+        <a:font script="Nkoo" typeface="Ebrima"/>
+        <a:font script="Olck" typeface="Nirmala UI"/>
+        <a:font script="Osma" typeface="Ebrima"/>
+        <a:font script="Phag" typeface="Phagspa"/>
+        <a:font script="Syrn" typeface="Estrangelo Edessa"/>
+        <a:font script="Syrj" typeface="Estrangelo Edessa"/>
+        <a:font script="Syre" typeface="Estrangelo Edessa"/>
+        <a:font script="Sora" typeface="Nirmala UI"/>
+        <a:font script="Tale" typeface="Microsoft Tai Le"/>
+        <a:font script="Talu" typeface="Microsoft New Tai Lue"/>
+        <a:font script="Tfng" typeface="Ebrima"/>
+      </a:majorFont>
+      <a:minorFont>
+        <a:latin typeface="Calibri" panose="020F0502020204030204"/>
+        <a:ea typeface=""/>
+        <a:cs typeface=""/>
+        <a:font script="Jpan" typeface="游ゴシック"/>
+        <a:font script="Hang" typeface="맑은 고딕"/>
+        <a:font script="Hans" typeface="等线"/>
+        <a:font script="Hant" typeface="新細明體"/>
+        <a:font script="Arab" typeface="Arial"/>
+        <a:font script="Hebr" typeface="Arial"/>
+        <a:font script="Thai" typeface="Cordia New"/>
+        <a:font script="Ethi" typeface="Nyala"/>
+        <a:font script="Beng" typeface="Vrinda"/>
+        <a:font script="Gujr" typeface="Shruti"/>
+        <a:font script="Khmr" typeface="DaunPenh"/>
+        <a:font script="Knda" typeface="Tunga"/>
+        <a:font script="Guru" typeface="Raavi"/>
+        <a:font script="Cans" typeface="Euphemia"/>
+        <a:font script="Cher" typeface="Plantagenet Cherokee"/>
+        <a:font script="Yiii" typeface="Microsoft Yi Baiti"/>
+        <a:font script="Tibt" typeface="Microsoft Himalaya"/>
+        <a:font script="Thaa" typeface="MV Boli"/>
+        <a:font script="Deva" typeface="Mangal"/>
+        <a:font script="Telu" typeface="Gautami"/>
+        <a:font script="Taml" typeface="Latha"/>
+        <a:font script="Syrc" typeface="Estrangelo Edessa"/>
+        <a:font script="Orya" typeface="Kalinga"/>
+        <a:font script="Mlym" typeface="Kartika"/>
+        <a:font script="Laoo" typeface="DokChampa"/>
+        <a:font script="Sinh" typeface="Iskoola Pota"/>
+        <a:font script="Mong" typeface="Mongolian Baiti"/>
+        <a:font script="Viet" typeface="Arial"/>
+        <a:font script="Uigh" typeface="Microsoft Uighur"/>
+        <a:font script="Geor" typeface="Sylfaen"/>
+        <a:font script="Armn" typeface="Arial"/>
+        <a:font script="Bugi" typeface="Leelawadee UI"/>
+        <a:font script="Bopo" typeface="Microsoft JhengHei"/>
+        <a:font script="Java" typeface="Javanese Text"/>
+        <a:font script="Lisu" typeface="Segoe UI"/>
+        <a:font script="Mymr" typeface="Myanmar Text"/>
+        <a:font script="Nkoo" typeface="Ebrima"/>
+        <a:font script="Olck" typeface="Nirmala UI"/>
+        <a:font script="Osma" typeface="Ebrima"/>
+        <a:font script="Phag" typeface="Phagspa"/>
+        <a:font script="Syrn" typeface="Estrangelo Edessa"/>
+        <a:font script="Syrj" typeface="Estrangelo Edessa"/>
+        <a:font script="Syre" typeface="Estrangelo Edessa"/>
+        <a:font script="Sora" typeface="Nirmala UI"/>
+        <a:font script="Tale" typeface="Microsoft Tai Le"/>
+        <a:font script="Talu" typeface="Microsoft New Tai Lue"/>
+        <a:font script="Tfng" typeface="Ebrima"/>
+      </a:minorFont>
+    </a:fontScheme>
+    <a:fmtScheme name="Office">
+      <a:fillStyleLst>
+        <a:solidFill>
+          <a:schemeClr val="phClr"/>
+        </a:solidFill>
+        <a:gradFill rotWithShape="1">
+          <a:gsLst>
+            <a:gs pos="0">
+              <a:schemeClr val="phClr">
+                <a:lumMod val="110000"/>
+                <a:satMod val="105000"/>
+                <a:tint val="67000"/>
+              </a:schemeClr>
+            </a:gs>
+            <a:gs pos="50000">
+              <a:schemeClr val="phClr">
+                <a:lumMod val="105000"/>
+                <a:satMod val="103000"/>
+                <a:tint val="73000"/>
+              </a:schemeClr>
+            </a:gs>
+            <a:gs pos="100000">
+              <a:schemeClr val="phClr">
+                <a:lumMod val="105000"/>
+                <a:satMod val="109000"/>
+                <a:tint val="81000"/>
+              </a:schemeClr>
+            </a:gs>
+          </a:gsLst>
+          <a:lin ang="5400000" scaled="0"/>
+        </a:gradFill>
+        <a:gradFill rotWithShape="1">
+          <a:gsLst>
+            <a:gs pos="0">
+              <a:schemeClr val="phClr">
+                <a:satMod val="103000"/>
+                <a:lumMod val="102000"/>
+                <a:tint val="94000"/>
+              </a:schemeClr>
+            </a:gs>
+            <a:gs pos="50000">
+              <a:schemeClr val="phClr">
+                <a:satMod val="110000"/>
+                <a:lumMod val="100000"/>
+                <a:shade val="100000"/>
+              </a:schemeClr>
+            </a:gs>
+            <a:gs pos="100000">
+              <a:schemeClr val="phClr">
+                <a:lumMod val="99000"/>
+                <a:satMod val="120000"/>
+                <a:shade val="78000"/>
+              </a:schemeClr>
+            </a:gs>
+          </a:gsLst>
+          <a:lin ang="5400000" scaled="0"/>
+        </a:gradFill>
+      </a:fillStyleLst>
+      <a:lnStyleLst>
+        <a:ln w="6350" cap="flat" cmpd="sng" algn="ctr">
+          <a:solidFill>
+            <a:schemeClr val="phClr"/>
+          </a:solidFill>
+          <a:prstDash val="solid"/>
+          <a:miter lim="800000"/>
+        </a:ln>
+        <a:ln w="12700" cap="flat" cmpd="sng" algn="ctr">
+          <a:solidFill>
+            <a:schemeClr val="phClr"/>
+          </a:solidFill>
+          <a:prstDash val="solid"/>
+          <a:miter lim="800000"/>
+        </a:ln>
+        <a:ln w="19050" cap="flat" cmpd="sng" algn="ctr">
+          <a:solidFill>
+            <a:schemeClr val="phClr"/>
+          </a:solidFill>
+          <a:prstDash val="solid"/>
+          <a:miter lim="800000"/>
+        </a:ln>
+      </a:lnStyleLst>
+      <a:effectStyleLst>
+        <a:effectStyle>
+          <a:effectLst/>
+        </a:effectStyle>
+        <a:effectStyle>
+          <a:effectLst/>
+        </a:effectStyle>
+        <a:effectStyle>
+          <a:effectLst>
+            <a:outerShdw blurRad="57150" dist="19050" dir="5400000" algn="ctr" rotWithShape="0">
+              <a:srgbClr val="000000">
+                <a:alpha val="63000"/>
+              </a:srgbClr>
+            </a:outerShdw>
+          </a:effectLst>
+        </a:effectStyle>
+      </a:effectStyleLst>
+      <a:bgFillStyleLst>
+        <a:solidFill>
+          <a:schemeClr val="phClr"/>
+        </a:solidFill>
+        <a:solidFill>
+          <a:schemeClr val="phClr">
+            <a:tint val="95000"/>
+            <a:satMod val="170000"/>
+          </a:schemeClr>
+        </a:solidFill>
+        <a:gradFill rotWithShape="1">
+          <a:gsLst>
+            <a:gs pos="0">
+              <a:schemeClr val="phClr">
+                <a:tint val="93000"/>
+                <a:satMod val="150000"/>
+                <a:shade val="98000"/>
+                <a:lumMod val="102000"/>
+              </a:schemeClr>
+            </a:gs>
+            <a:gs pos="50000">
+              <a:schemeClr val="phClr">
+                <a:tint val="98000"/>
+                <a:satMod val="130000"/>
+                <a:shade val="90000"/>
+                <a:lumMod val="103000"/>
+              </a:schemeClr>
+            </a:gs>
+            <a:gs pos="100000">
+              <a:schemeClr val="phClr">
+                <a:shade val="63000"/>
+                <a:satMod val="120000"/>
+              </a:schemeClr>
+            </a:gs>
+          </a:gsLst>
+          <a:lin ang="5400000" scaled="0"/>
+        </a:gradFill>
+      </a:bgFillStyleLst>
+    </a:fmtScheme>
+  </a:themeElements>
+  <a:objectDefaults/>
+  <a:extraClrSchemeLst/>
+  <a:extLst>
+    <a:ext uri="{05A4C25C-085E-4340-85A3-A5531E510DB2}">
+      <thm15:themeFamily xmlns:thm15="http://schemas.microsoft.com/office/thememl/2012/main" name="Office Theme" id="{62F939B6-93AF-4DB8-9C6B-D6C7DFDC589F}" vid="{4A3C46E8-61CC-4603-A589-7422A47A8E4A}"/>
+    </a:ext>
+  </a:extLst>
+</a:theme>
 </file>